--- a/slides/output/lapa-ryadom-pitch.pptx
+++ b/slides/output/lapa-ryadom-pitch.pptx
@@ -774,16 +774,7 @@
           <a:p>
             <a:r>
               <a:rPr lang="en-US" dirty="0"/>
-              <a:t>ЗАГОТОВКА СЛАЙДА. Перед выступлением заменить оба пунктирных кадра реальными
-скриншотами работающего приложения (задача DEV-06). На сцене показывается живое
-приложение, а не этот слайд -- см. docs/07_DEMO_AND_PITCH.md раздел 2, слайд 4.
-Требования к кадрам: ширина 1280 px, масштаб браузера 110-125%, отключены
-уведомления, нет личных вкладок и отладочных панелей, пароли на экране не видны.
-Окно A (публичное): каталог -&gt; карточка потребности -&gt; предложить помощь -&gt; код.
-Окно B (кабинет приюта): заранее авторизованный представитель "Добрые лапы" -&gt;
-экран подтверждения по коду.
-Исходное состояние перед показом: требуется 20 / обещано 0 / получено 0 / свободно 20.
-Сброс демоданных делать ДО выхода на сцену, не на сцене.</a:t>
+              <a:t/>
             </a:r>
             <a:endParaRPr lang="en-US" dirty="0"/>
           </a:p>
@@ -4235,24 +4226,24 @@
         </p:nvSpPr>
         <p:spPr>
           <a:xfrm>
-            <a:off x="548640" y="329184"/>
-            <a:ext cx="5486400" cy="502920"/>
-          </a:xfrm>
-          <a:prstGeom prst="rect">
-            <a:avLst/>
-          </a:prstGeom>
-          <a:noFill/>
-          <a:ln/>
-        </p:spPr>
-        <p:txBody>
-          <a:bodyPr wrap="square" lIns="0" tIns="0" rIns="0" bIns="0" rtlCol="0" anchor="ctr"/>
-          <a:lstStyle/>
-          <a:p>
-            <a:pPr indent="0" marL="0">
-              <a:buNone/>
-            </a:pPr>
-            <a:r>
-              <a:rPr lang="en-US" sz="3000" b="1" dirty="0">
+            <a:off x="548640" y="274320"/>
+            <a:ext cx="5486400" cy="475488"/>
+          </a:xfrm>
+          <a:prstGeom prst="rect">
+            <a:avLst/>
+          </a:prstGeom>
+          <a:noFill/>
+          <a:ln/>
+        </p:spPr>
+        <p:txBody>
+          <a:bodyPr wrap="square" lIns="0" tIns="0" rIns="0" bIns="0" rtlCol="0" anchor="ctr"/>
+          <a:lstStyle/>
+          <a:p>
+            <a:pPr indent="0" marL="0">
+              <a:buNone/>
+            </a:pPr>
+            <a:r>
+              <a:rPr lang="en-US" sz="2800" b="1" dirty="0">
                 <a:solidFill>
                   <a:srgbClr val="283618"/>
                 </a:solidFill>
@@ -4262,7 +4253,7 @@
               </a:rPr>
               <a:t>Живая демонстрация</a:t>
             </a:r>
-            <a:endParaRPr lang="en-US" sz="3000" dirty="0"/>
+            <a:endParaRPr lang="en-US" sz="2800" dirty="0"/>
           </a:p>
         </p:txBody>
       </p:sp>
@@ -4274,24 +4265,24 @@
         </p:nvSpPr>
         <p:spPr>
           <a:xfrm>
-            <a:off x="548640" y="859536"/>
-            <a:ext cx="5486400" cy="256032"/>
-          </a:xfrm>
-          <a:prstGeom prst="rect">
-            <a:avLst/>
-          </a:prstGeom>
-          <a:noFill/>
-          <a:ln/>
-        </p:spPr>
-        <p:txBody>
-          <a:bodyPr wrap="square" lIns="0" tIns="0" rIns="0" bIns="0" rtlCol="0" anchor="ctr"/>
-          <a:lstStyle/>
-          <a:p>
-            <a:pPr indent="0" marL="0">
-              <a:buNone/>
-            </a:pPr>
-            <a:r>
-              <a:rPr lang="en-US" sz="1300" dirty="0">
+            <a:off x="548640" y="768096"/>
+            <a:ext cx="6035040" cy="237744"/>
+          </a:xfrm>
+          <a:prstGeom prst="rect">
+            <a:avLst/>
+          </a:prstGeom>
+          <a:noFill/>
+          <a:ln/>
+        </p:spPr>
+        <p:txBody>
+          <a:bodyPr wrap="square" lIns="0" tIns="0" rIns="0" bIns="0" rtlCol="0" anchor="ctr"/>
+          <a:lstStyle/>
+          <a:p>
+            <a:pPr indent="0" marL="0">
+              <a:buNone/>
+            </a:pPr>
+            <a:r>
+              <a:rPr lang="en-US" sz="1250" dirty="0">
                 <a:solidFill>
                   <a:srgbClr val="606C38"/>
                 </a:solidFill>
@@ -4299,9 +4290,9 @@
                 <a:ea typeface="Calibri" pitchFamily="34" charset="-122"/>
                 <a:cs typeface="Calibri" pitchFamily="34" charset="-120"/>
               </a:rPr>
-              <a:t>Сценарий D0 -&gt; D1 -&gt; D2 на одном экране</a:t>
-            </a:r>
-            <a:endParaRPr lang="en-US" sz="1300" dirty="0"/>
+              <a:t>Публичная часть: без регистрации, счётчики пересчитываются автоматически</a:t>
+            </a:r>
+            <a:endParaRPr lang="en-US" sz="1250" dirty="0"/>
           </a:p>
         </p:txBody>
       </p:sp>
@@ -4313,8 +4304,8 @@
         </p:nvSpPr>
         <p:spPr>
           <a:xfrm>
-            <a:off x="6144768" y="384048"/>
-            <a:ext cx="2450592" cy="566928"/>
+            <a:off x="566928" y="1170432"/>
+            <a:ext cx="3657600" cy="274320"/>
           </a:xfrm>
           <a:prstGeom prst="rect">
             <a:avLst/>
@@ -4333,24 +4324,24 @@
         </p:nvSpPr>
         <p:spPr>
           <a:xfrm>
-            <a:off x="6254496" y="420624"/>
-            <a:ext cx="2231136" cy="493776"/>
-          </a:xfrm>
-          <a:prstGeom prst="rect">
-            <a:avLst/>
-          </a:prstGeom>
-          <a:noFill/>
-          <a:ln/>
-        </p:spPr>
-        <p:txBody>
-          <a:bodyPr wrap="square" lIns="0" tIns="0" rIns="0" bIns="0" rtlCol="0" anchor="ctr"/>
-          <a:lstStyle/>
-          <a:p>
-            <a:pPr indent="0" marL="0">
-              <a:buNone/>
-            </a:pPr>
-            <a:r>
-              <a:rPr lang="en-US" sz="1050" dirty="0">
+            <a:off x="676656" y="1170432"/>
+            <a:ext cx="3438144" cy="274320"/>
+          </a:xfrm>
+          <a:prstGeom prst="rect">
+            <a:avLst/>
+          </a:prstGeom>
+          <a:noFill/>
+          <a:ln/>
+        </p:spPr>
+        <p:txBody>
+          <a:bodyPr wrap="square" lIns="0" tIns="0" rIns="0" bIns="0" rtlCol="0" anchor="ctr"/>
+          <a:lstStyle/>
+          <a:p>
+            <a:pPr indent="0" marL="0">
+              <a:buNone/>
+            </a:pPr>
+            <a:r>
+              <a:rPr lang="en-US" sz="900" b="1" spc="60" kern="0" dirty="0">
                 <a:solidFill>
                   <a:srgbClr val="FEFAE0"/>
                 </a:solidFill>
@@ -4358,47 +4349,85 @@
                 <a:ea typeface="Calibri" pitchFamily="34" charset="-122"/>
                 <a:cs typeface="Calibri" pitchFamily="34" charset="-120"/>
               </a:rPr>
-              <a:t>Показ идёт в двух окнах браузера</a:t>
-            </a:r>
-            <a:endParaRPr lang="en-US" sz="1050" dirty="0"/>
-          </a:p>
-        </p:txBody>
-      </p:sp>
-      <p:sp>
-        <p:nvSpPr>
-          <p:cNvPr id="8" name="Shape 6"/>
-          <p:cNvSpPr/>
-          <p:nvPr/>
-        </p:nvSpPr>
-        <p:spPr>
-          <a:xfrm>
-            <a:off x="548640" y="1207008"/>
-            <a:ext cx="3913632" cy="2487168"/>
-          </a:xfrm>
-          <a:prstGeom prst="rect">
-            <a:avLst/>
-          </a:prstGeom>
-          <a:solidFill>
-            <a:srgbClr val="FEFAE0"/>
-          </a:solidFill>
-          <a:ln w="15875">
-            <a:solidFill>
-              <a:srgbClr val="606C38"/>
-            </a:solidFill>
-            <a:prstDash val="dash"/>
-          </a:ln>
-        </p:spPr>
-      </p:sp>
-      <p:sp>
-        <p:nvSpPr>
-          <p:cNvPr id="9" name="Shape 7"/>
-          <p:cNvSpPr/>
-          <p:nvPr/>
-        </p:nvSpPr>
-        <p:spPr>
-          <a:xfrm>
-            <a:off x="548640" y="1207008"/>
-            <a:ext cx="3913632" cy="292608"/>
+              <a:t>ОКНО A -- КАТАЛОГ ПОТРЕБНОСТЕЙ</a:t>
+            </a:r>
+            <a:endParaRPr lang="en-US" sz="900" dirty="0"/>
+          </a:p>
+        </p:txBody>
+      </p:sp>
+      <p:pic>
+        <p:nvPicPr>
+          <p:cNvPr id="8" name="Image 0" descr="screenshots/needs-catalog.png">    </p:cNvPr>
+          <p:cNvPicPr>
+            <a:picLocks noChangeAspect="1"/>
+          </p:cNvPicPr>
+          <p:nvPr/>
+        </p:nvPicPr>
+        <p:blipFill>
+          <a:blip r:embed="rId1"/>
+          <a:stretch>
+            <a:fillRect/>
+          </a:stretch>
+        </p:blipFill>
+        <p:spPr>
+          <a:xfrm>
+            <a:off x="630936" y="1463040"/>
+            <a:ext cx="3529584" cy="2481739"/>
+          </a:xfrm>
+          <a:prstGeom prst="rect">
+            <a:avLst/>
+          </a:prstGeom>
+        </p:spPr>
+      </p:pic>
+      <p:sp>
+        <p:nvSpPr>
+          <p:cNvPr id="9" name="Text 6"/>
+          <p:cNvSpPr/>
+          <p:nvPr/>
+        </p:nvSpPr>
+        <p:spPr>
+          <a:xfrm>
+            <a:off x="585216" y="3981355"/>
+            <a:ext cx="3621024" cy="384048"/>
+          </a:xfrm>
+          <a:prstGeom prst="rect">
+            <a:avLst/>
+          </a:prstGeom>
+          <a:noFill/>
+          <a:ln/>
+        </p:spPr>
+        <p:txBody>
+          <a:bodyPr wrap="square" lIns="0" tIns="0" rIns="0" bIns="0" rtlCol="0" anchor="ctr"/>
+          <a:lstStyle/>
+          <a:p>
+            <a:pPr indent="0" marL="0">
+              <a:buNone/>
+            </a:pPr>
+            <a:r>
+              <a:rPr lang="en-US" sz="800" dirty="0">
+                <a:solidFill>
+                  <a:srgbClr val="606C38"/>
+                </a:solidFill>
+                <a:latin typeface="Calibri" pitchFamily="34" charset="0"/>
+                <a:ea typeface="Calibri" pitchFamily="34" charset="-122"/>
+                <a:cs typeface="Calibri" pitchFamily="34" charset="-120"/>
+              </a:rPr>
+              <a:t>Фильтры по городу, категории и приоритету; поиск; пагинация. Каждая карточка показывает требуется, обещано, получено и свободно.</a:t>
+            </a:r>
+            <a:endParaRPr lang="en-US" sz="800" dirty="0"/>
+          </a:p>
+        </p:txBody>
+      </p:sp>
+      <p:sp>
+        <p:nvSpPr>
+          <p:cNvPr id="10" name="Shape 7"/>
+          <p:cNvSpPr/>
+          <p:nvPr/>
+        </p:nvSpPr>
+        <p:spPr>
+          <a:xfrm>
+            <a:off x="4919472" y="1170432"/>
+            <a:ext cx="3657600" cy="274320"/>
           </a:xfrm>
           <a:prstGeom prst="rect">
             <a:avLst/>
@@ -4411,30 +4440,30 @@
       </p:sp>
       <p:sp>
         <p:nvSpPr>
-          <p:cNvPr id="10" name="Text 8"/>
-          <p:cNvSpPr/>
-          <p:nvPr/>
-        </p:nvSpPr>
-        <p:spPr>
-          <a:xfrm>
-            <a:off x="658368" y="1207008"/>
-            <a:ext cx="3694176" cy="292608"/>
-          </a:xfrm>
-          <a:prstGeom prst="rect">
-            <a:avLst/>
-          </a:prstGeom>
-          <a:noFill/>
-          <a:ln/>
-        </p:spPr>
-        <p:txBody>
-          <a:bodyPr wrap="square" lIns="0" tIns="0" rIns="0" bIns="0" rtlCol="0" anchor="ctr"/>
-          <a:lstStyle/>
-          <a:p>
-            <a:pPr indent="0" marL="0">
-              <a:buNone/>
-            </a:pPr>
-            <a:r>
-              <a:rPr lang="en-US" sz="1000" b="1" spc="80" kern="0" dirty="0">
+          <p:cNvPr id="11" name="Text 8"/>
+          <p:cNvSpPr/>
+          <p:nvPr/>
+        </p:nvSpPr>
+        <p:spPr>
+          <a:xfrm>
+            <a:off x="5029200" y="1170432"/>
+            <a:ext cx="3438144" cy="274320"/>
+          </a:xfrm>
+          <a:prstGeom prst="rect">
+            <a:avLst/>
+          </a:prstGeom>
+          <a:noFill/>
+          <a:ln/>
+        </p:spPr>
+        <p:txBody>
+          <a:bodyPr wrap="square" lIns="0" tIns="0" rIns="0" bIns="0" rtlCol="0" anchor="ctr"/>
+          <a:lstStyle/>
+          <a:p>
+            <a:pPr indent="0" marL="0">
+              <a:buNone/>
+            </a:pPr>
+            <a:r>
+              <a:rPr lang="en-US" sz="900" b="1" spc="60" kern="0" dirty="0">
                 <a:solidFill>
                   <a:srgbClr val="FEFAE0"/>
                 </a:solidFill>
@@ -4442,22 +4471,220 @@
                 <a:ea typeface="Calibri" pitchFamily="34" charset="-122"/>
                 <a:cs typeface="Calibri" pitchFamily="34" charset="-120"/>
               </a:rPr>
-              <a:t>ОКНО A -- ПУБЛИЧНОЕ</a:t>
-            </a:r>
-            <a:endParaRPr lang="en-US" sz="1000" dirty="0"/>
-          </a:p>
-        </p:txBody>
-      </p:sp>
-      <p:sp>
-        <p:nvSpPr>
-          <p:cNvPr id="11" name="Text 9"/>
-          <p:cNvSpPr/>
-          <p:nvPr/>
-        </p:nvSpPr>
-        <p:spPr>
-          <a:xfrm>
-            <a:off x="548640" y="1984248"/>
-            <a:ext cx="3913632" cy="365760"/>
+              <a:t>КАРТОЧКА ПОТРЕБНОСТИ</a:t>
+            </a:r>
+            <a:endParaRPr lang="en-US" sz="900" dirty="0"/>
+          </a:p>
+        </p:txBody>
+      </p:sp>
+      <p:pic>
+        <p:nvPicPr>
+          <p:cNvPr id="12" name="Image 1" descr="screenshots/need-detail.png">    </p:cNvPr>
+          <p:cNvPicPr>
+            <a:picLocks noChangeAspect="1"/>
+          </p:cNvPicPr>
+          <p:nvPr/>
+        </p:nvPicPr>
+        <p:blipFill>
+          <a:blip r:embed="rId2"/>
+          <a:stretch>
+            <a:fillRect/>
+          </a:stretch>
+        </p:blipFill>
+        <p:spPr>
+          <a:xfrm>
+            <a:off x="4983480" y="1463040"/>
+            <a:ext cx="3529584" cy="2481739"/>
+          </a:xfrm>
+          <a:prstGeom prst="rect">
+            <a:avLst/>
+          </a:prstGeom>
+        </p:spPr>
+      </p:pic>
+      <p:sp>
+        <p:nvSpPr>
+          <p:cNvPr id="13" name="Text 9"/>
+          <p:cNvSpPr/>
+          <p:nvPr/>
+        </p:nvSpPr>
+        <p:spPr>
+          <a:xfrm>
+            <a:off x="4937760" y="3981355"/>
+            <a:ext cx="3621024" cy="384048"/>
+          </a:xfrm>
+          <a:prstGeom prst="rect">
+            <a:avLst/>
+          </a:prstGeom>
+          <a:noFill/>
+          <a:ln/>
+        </p:spPr>
+        <p:txBody>
+          <a:bodyPr wrap="square" lIns="0" tIns="0" rIns="0" bIns="0" rtlCol="0" anchor="ctr"/>
+          <a:lstStyle/>
+          <a:p>
+            <a:pPr indent="0" marL="0">
+              <a:buNone/>
+            </a:pPr>
+            <a:r>
+              <a:rPr lang="en-US" sz="800" dirty="0">
+                <a:solidFill>
+                  <a:srgbClr val="606C38"/>
+                </a:solidFill>
+                <a:latin typeface="Calibri" pitchFamily="34" charset="0"/>
+                <a:ea typeface="Calibri" pitchFamily="34" charset="-122"/>
+                <a:cs typeface="Calibri" pitchFamily="34" charset="-120"/>
+              </a:rPr>
+              <a:t>Адрес и часы приёма. Посетитель называет посильное количество и получает одноразовый код -- без аккаунта и телефона.</a:t>
+            </a:r>
+            <a:endParaRPr lang="en-US" sz="800" dirty="0"/>
+          </a:p>
+        </p:txBody>
+      </p:sp>
+      <p:sp>
+        <p:nvSpPr>
+          <p:cNvPr id="14" name="Text 10"/>
+          <p:cNvSpPr/>
+          <p:nvPr/>
+        </p:nvSpPr>
+        <p:spPr>
+          <a:xfrm>
+            <a:off x="566928" y="3963067"/>
+            <a:ext cx="3657600" cy="914"/>
+          </a:xfrm>
+          <a:prstGeom prst="rect">
+            <a:avLst/>
+          </a:prstGeom>
+          <a:noFill/>
+          <a:ln/>
+        </p:spPr>
+        <p:txBody>
+          <a:bodyPr wrap="square" lIns="0" tIns="0" rIns="0" bIns="0" rtlCol="0" anchor="ctr"/>
+          <a:lstStyle/>
+          <a:p>
+            <a:pPr indent="0" marL="0">
+              <a:buNone/>
+            </a:pPr>
+            <a:endParaRPr lang="en-US" dirty="0"/>
+          </a:p>
+        </p:txBody>
+      </p:sp>
+      <p:sp>
+        <p:nvSpPr>
+          <p:cNvPr id="15" name="Text 11"/>
+          <p:cNvSpPr/>
+          <p:nvPr/>
+        </p:nvSpPr>
+        <p:spPr>
+          <a:xfrm>
+            <a:off x="4919472" y="3963067"/>
+            <a:ext cx="3657600" cy="914"/>
+          </a:xfrm>
+          <a:prstGeom prst="rect">
+            <a:avLst/>
+          </a:prstGeom>
+          <a:noFill/>
+          <a:ln/>
+        </p:spPr>
+        <p:txBody>
+          <a:bodyPr wrap="square" lIns="0" tIns="0" rIns="0" bIns="0" rtlCol="0" anchor="ctr"/>
+          <a:lstStyle/>
+          <a:p>
+            <a:pPr indent="0" marL="0">
+              <a:buNone/>
+            </a:pPr>
+            <a:endParaRPr lang="en-US" dirty="0"/>
+          </a:p>
+        </p:txBody>
+      </p:sp>
+      <p:sp>
+        <p:nvSpPr>
+          <p:cNvPr id="16" name="Text 12"/>
+          <p:cNvSpPr/>
+          <p:nvPr/>
+        </p:nvSpPr>
+        <p:spPr>
+          <a:xfrm>
+            <a:off x="566928" y="4036219"/>
+            <a:ext cx="4572000" cy="219456"/>
+          </a:xfrm>
+          <a:prstGeom prst="rect">
+            <a:avLst/>
+          </a:prstGeom>
+          <a:noFill/>
+          <a:ln/>
+        </p:spPr>
+        <p:txBody>
+          <a:bodyPr wrap="square" lIns="0" tIns="0" rIns="0" bIns="0" rtlCol="0" anchor="ctr"/>
+          <a:lstStyle/>
+          <a:p>
+            <a:pPr indent="0" marL="0">
+              <a:buNone/>
+            </a:pPr>
+            <a:r>
+              <a:rPr lang="en-US" sz="950" b="1" spc="120" kern="0" dirty="0">
+                <a:solidFill>
+                  <a:srgbClr val="283618"/>
+                </a:solidFill>
+                <a:latin typeface="Calibri" pitchFamily="34" charset="0"/>
+                <a:ea typeface="Calibri" pitchFamily="34" charset="-122"/>
+                <a:cs typeface="Calibri" pitchFamily="34" charset="-120"/>
+              </a:rPr>
+              <a:t>КОНТРОЛЬНЫЕ ТОЧКИ НА ЭКРАНЕ</a:t>
+            </a:r>
+            <a:endParaRPr lang="en-US" sz="950" dirty="0"/>
+          </a:p>
+        </p:txBody>
+      </p:sp>
+      <p:sp>
+        <p:nvSpPr>
+          <p:cNvPr id="17" name="Shape 13"/>
+          <p:cNvSpPr/>
+          <p:nvPr/>
+        </p:nvSpPr>
+        <p:spPr>
+          <a:xfrm>
+            <a:off x="566928" y="4292251"/>
+            <a:ext cx="2066544" cy="530352"/>
+          </a:xfrm>
+          <a:prstGeom prst="rect">
+            <a:avLst/>
+          </a:prstGeom>
+          <a:solidFill>
+            <a:srgbClr val="DDA15E"/>
+          </a:solidFill>
+          <a:ln/>
+        </p:spPr>
+      </p:sp>
+      <p:sp>
+        <p:nvSpPr>
+          <p:cNvPr id="18" name="Shape 14"/>
+          <p:cNvSpPr/>
+          <p:nvPr/>
+        </p:nvSpPr>
+        <p:spPr>
+          <a:xfrm>
+            <a:off x="566928" y="4292251"/>
+            <a:ext cx="402336" cy="530352"/>
+          </a:xfrm>
+          <a:prstGeom prst="rect">
+            <a:avLst/>
+          </a:prstGeom>
+          <a:solidFill>
+            <a:srgbClr val="283618"/>
+          </a:solidFill>
+          <a:ln/>
+        </p:spPr>
+      </p:sp>
+      <p:sp>
+        <p:nvSpPr>
+          <p:cNvPr id="19" name="Text 15"/>
+          <p:cNvSpPr/>
+          <p:nvPr/>
+        </p:nvSpPr>
+        <p:spPr>
+          <a:xfrm>
+            <a:off x="566928" y="4292251"/>
+            <a:ext cx="402336" cy="530352"/>
           </a:xfrm>
           <a:prstGeom prst="rect">
             <a:avLst/>
@@ -4473,933 +4700,448 @@
               <a:buNone/>
             </a:pPr>
             <a:r>
-              <a:rPr lang="en-US" sz="1400" b="1" dirty="0">
-                <a:solidFill>
-                  <a:srgbClr val="606C38"/>
+              <a:rPr lang="en-US" sz="1300" b="1" dirty="0">
+                <a:solidFill>
+                  <a:srgbClr val="FEFAE0"/>
                 </a:solidFill>
                 <a:latin typeface="Georgia" pitchFamily="34" charset="0"/>
                 <a:ea typeface="Georgia" pitchFamily="34" charset="-122"/>
                 <a:cs typeface="Georgia" pitchFamily="34" charset="-120"/>
               </a:rPr>
-              <a:t>Кадр приложения</a:t>
-            </a:r>
-            <a:endParaRPr lang="en-US" sz="1400" dirty="0"/>
-          </a:p>
-        </p:txBody>
-      </p:sp>
-      <p:sp>
-        <p:nvSpPr>
-          <p:cNvPr id="12" name="Text 10"/>
-          <p:cNvSpPr/>
-          <p:nvPr/>
-        </p:nvSpPr>
-        <p:spPr>
-          <a:xfrm>
-            <a:off x="713232" y="2395728"/>
-            <a:ext cx="3584448" cy="1207008"/>
-          </a:xfrm>
-          <a:prstGeom prst="rect">
-            <a:avLst/>
-          </a:prstGeom>
-          <a:noFill/>
-          <a:ln/>
-        </p:spPr>
-        <p:txBody>
-          <a:bodyPr wrap="square" lIns="0" tIns="0" rIns="0" bIns="0" rtlCol="0" anchor="ctr"/>
-          <a:lstStyle/>
-          <a:p>
-            <a:pPr indent="0" marL="0">
-              <a:spcAft>
-                <a:spcPts val="300"/>
-              </a:spcAft>
-              <a:buNone/>
-            </a:pPr>
-            <a:r>
-              <a:rPr lang="en-US" sz="1100" dirty="0">
-                <a:solidFill>
-                  <a:srgbClr val="283618"/>
+              <a:t>D0</a:t>
+            </a:r>
+            <a:endParaRPr lang="en-US" sz="1300" dirty="0"/>
+          </a:p>
+        </p:txBody>
+      </p:sp>
+      <p:sp>
+        <p:nvSpPr>
+          <p:cNvPr id="20" name="Text 16"/>
+          <p:cNvSpPr/>
+          <p:nvPr/>
+        </p:nvSpPr>
+        <p:spPr>
+          <a:xfrm>
+            <a:off x="1042416" y="4337971"/>
+            <a:ext cx="1554480" cy="164592"/>
+          </a:xfrm>
+          <a:prstGeom prst="rect">
+            <a:avLst/>
+          </a:prstGeom>
+          <a:noFill/>
+          <a:ln/>
+        </p:spPr>
+        <p:txBody>
+          <a:bodyPr wrap="square" lIns="0" tIns="0" rIns="0" bIns="0" rtlCol="0" anchor="ctr"/>
+          <a:lstStyle/>
+          <a:p>
+            <a:pPr indent="0" marL="0">
+              <a:buNone/>
+            </a:pPr>
+            <a:r>
+              <a:rPr lang="en-US" sz="700" dirty="0">
+                <a:solidFill>
+                  <a:srgbClr val="606C38"/>
                 </a:solidFill>
                 <a:latin typeface="Calibri" pitchFamily="34" charset="0"/>
                 <a:ea typeface="Calibri" pitchFamily="34" charset="-122"/>
                 <a:cs typeface="Calibri" pitchFamily="34" charset="-120"/>
               </a:rPr>
-              <a:t>1.  Каталог: город, категория, поиск</a:t>
-            </a:r>
-            <a:endParaRPr lang="en-US" sz="1100" dirty="0"/>
-          </a:p>
-          <a:p>
-            <a:pPr indent="0" marL="0">
-              <a:spcAft>
-                <a:spcPts val="300"/>
-              </a:spcAft>
-              <a:buNone/>
-            </a:pPr>
-            <a:r>
-              <a:rPr lang="en-US" sz="1100" dirty="0">
+              <a:t>требуется / обещано / получено / свободно</a:t>
+            </a:r>
+            <a:endParaRPr lang="en-US" sz="700" dirty="0"/>
+          </a:p>
+        </p:txBody>
+      </p:sp>
+      <p:sp>
+        <p:nvSpPr>
+          <p:cNvPr id="21" name="Text 17"/>
+          <p:cNvSpPr/>
+          <p:nvPr/>
+        </p:nvSpPr>
+        <p:spPr>
+          <a:xfrm>
+            <a:off x="1042416" y="4502563"/>
+            <a:ext cx="1554480" cy="274320"/>
+          </a:xfrm>
+          <a:prstGeom prst="rect">
+            <a:avLst/>
+          </a:prstGeom>
+          <a:noFill/>
+          <a:ln/>
+        </p:spPr>
+        <p:txBody>
+          <a:bodyPr wrap="square" lIns="0" tIns="0" rIns="0" bIns="0" rtlCol="0" anchor="ctr"/>
+          <a:lstStyle/>
+          <a:p>
+            <a:pPr indent="0" marL="0">
+              <a:buNone/>
+            </a:pPr>
+            <a:r>
+              <a:rPr lang="en-US" sz="1350" b="1" dirty="0">
                 <a:solidFill>
                   <a:srgbClr val="283618"/>
+                </a:solidFill>
+                <a:latin typeface="Georgia" pitchFamily="34" charset="0"/>
+                <a:ea typeface="Georgia" pitchFamily="34" charset="-122"/>
+                <a:cs typeface="Georgia" pitchFamily="34" charset="-120"/>
+              </a:rPr>
+              <a:t>20 / 0 / 0 / 20</a:t>
+            </a:r>
+            <a:endParaRPr lang="en-US" sz="1350" dirty="0"/>
+          </a:p>
+        </p:txBody>
+      </p:sp>
+      <p:sp>
+        <p:nvSpPr>
+          <p:cNvPr id="22" name="Shape 18"/>
+          <p:cNvSpPr/>
+          <p:nvPr/>
+        </p:nvSpPr>
+        <p:spPr>
+          <a:xfrm>
+            <a:off x="2816352" y="4292251"/>
+            <a:ext cx="2066544" cy="530352"/>
+          </a:xfrm>
+          <a:prstGeom prst="rect">
+            <a:avLst/>
+          </a:prstGeom>
+          <a:solidFill>
+            <a:srgbClr val="DDA15E"/>
+          </a:solidFill>
+          <a:ln/>
+        </p:spPr>
+      </p:sp>
+      <p:sp>
+        <p:nvSpPr>
+          <p:cNvPr id="23" name="Shape 19"/>
+          <p:cNvSpPr/>
+          <p:nvPr/>
+        </p:nvSpPr>
+        <p:spPr>
+          <a:xfrm>
+            <a:off x="2816352" y="4292251"/>
+            <a:ext cx="402336" cy="530352"/>
+          </a:xfrm>
+          <a:prstGeom prst="rect">
+            <a:avLst/>
+          </a:prstGeom>
+          <a:solidFill>
+            <a:srgbClr val="283618"/>
+          </a:solidFill>
+          <a:ln/>
+        </p:spPr>
+      </p:sp>
+      <p:sp>
+        <p:nvSpPr>
+          <p:cNvPr id="24" name="Text 20"/>
+          <p:cNvSpPr/>
+          <p:nvPr/>
+        </p:nvSpPr>
+        <p:spPr>
+          <a:xfrm>
+            <a:off x="2816352" y="4292251"/>
+            <a:ext cx="402336" cy="530352"/>
+          </a:xfrm>
+          <a:prstGeom prst="rect">
+            <a:avLst/>
+          </a:prstGeom>
+          <a:noFill/>
+          <a:ln/>
+        </p:spPr>
+        <p:txBody>
+          <a:bodyPr wrap="square" lIns="0" tIns="0" rIns="0" bIns="0" rtlCol="0" anchor="ctr"/>
+          <a:lstStyle/>
+          <a:p>
+            <a:pPr algn="ctr" indent="0" marL="0">
+              <a:buNone/>
+            </a:pPr>
+            <a:r>
+              <a:rPr lang="en-US" sz="1300" b="1" dirty="0">
+                <a:solidFill>
+                  <a:srgbClr val="FEFAE0"/>
+                </a:solidFill>
+                <a:latin typeface="Georgia" pitchFamily="34" charset="0"/>
+                <a:ea typeface="Georgia" pitchFamily="34" charset="-122"/>
+                <a:cs typeface="Georgia" pitchFamily="34" charset="-120"/>
+              </a:rPr>
+              <a:t>D1</a:t>
+            </a:r>
+            <a:endParaRPr lang="en-US" sz="1300" dirty="0"/>
+          </a:p>
+        </p:txBody>
+      </p:sp>
+      <p:sp>
+        <p:nvSpPr>
+          <p:cNvPr id="25" name="Text 21"/>
+          <p:cNvSpPr/>
+          <p:nvPr/>
+        </p:nvSpPr>
+        <p:spPr>
+          <a:xfrm>
+            <a:off x="3291840" y="4337971"/>
+            <a:ext cx="1554480" cy="164592"/>
+          </a:xfrm>
+          <a:prstGeom prst="rect">
+            <a:avLst/>
+          </a:prstGeom>
+          <a:noFill/>
+          <a:ln/>
+        </p:spPr>
+        <p:txBody>
+          <a:bodyPr wrap="square" lIns="0" tIns="0" rIns="0" bIns="0" rtlCol="0" anchor="ctr"/>
+          <a:lstStyle/>
+          <a:p>
+            <a:pPr indent="0" marL="0">
+              <a:buNone/>
+            </a:pPr>
+            <a:r>
+              <a:rPr lang="en-US" sz="700" dirty="0">
+                <a:solidFill>
+                  <a:srgbClr val="606C38"/>
                 </a:solidFill>
                 <a:latin typeface="Calibri" pitchFamily="34" charset="0"/>
                 <a:ea typeface="Calibri" pitchFamily="34" charset="-122"/>
                 <a:cs typeface="Calibri" pitchFamily="34" charset="-120"/>
               </a:rPr>
-              <a:t>2.  Карточка потребности и счётчики</a:t>
-            </a:r>
-            <a:endParaRPr lang="en-US" sz="1100" dirty="0"/>
-          </a:p>
-          <a:p>
-            <a:pPr indent="0" marL="0">
-              <a:spcAft>
-                <a:spcPts val="300"/>
-              </a:spcAft>
-              <a:buNone/>
-            </a:pPr>
-            <a:r>
-              <a:rPr lang="en-US" sz="1100" dirty="0">
+              <a:t>требуется / обещано / получено / свободно</a:t>
+            </a:r>
+            <a:endParaRPr lang="en-US" sz="700" dirty="0"/>
+          </a:p>
+        </p:txBody>
+      </p:sp>
+      <p:sp>
+        <p:nvSpPr>
+          <p:cNvPr id="26" name="Text 22"/>
+          <p:cNvSpPr/>
+          <p:nvPr/>
+        </p:nvSpPr>
+        <p:spPr>
+          <a:xfrm>
+            <a:off x="3291840" y="4502563"/>
+            <a:ext cx="1554480" cy="274320"/>
+          </a:xfrm>
+          <a:prstGeom prst="rect">
+            <a:avLst/>
+          </a:prstGeom>
+          <a:noFill/>
+          <a:ln/>
+        </p:spPr>
+        <p:txBody>
+          <a:bodyPr wrap="square" lIns="0" tIns="0" rIns="0" bIns="0" rtlCol="0" anchor="ctr"/>
+          <a:lstStyle/>
+          <a:p>
+            <a:pPr indent="0" marL="0">
+              <a:buNone/>
+            </a:pPr>
+            <a:r>
+              <a:rPr lang="en-US" sz="1350" b="1" dirty="0">
                 <a:solidFill>
                   <a:srgbClr val="283618"/>
+                </a:solidFill>
+                <a:latin typeface="Georgia" pitchFamily="34" charset="0"/>
+                <a:ea typeface="Georgia" pitchFamily="34" charset="-122"/>
+                <a:cs typeface="Georgia" pitchFamily="34" charset="-120"/>
+              </a:rPr>
+              <a:t>20 / 5 / 0 / 15</a:t>
+            </a:r>
+            <a:endParaRPr lang="en-US" sz="1350" dirty="0"/>
+          </a:p>
+        </p:txBody>
+      </p:sp>
+      <p:sp>
+        <p:nvSpPr>
+          <p:cNvPr id="27" name="Shape 23"/>
+          <p:cNvSpPr/>
+          <p:nvPr/>
+        </p:nvSpPr>
+        <p:spPr>
+          <a:xfrm>
+            <a:off x="5065776" y="4292251"/>
+            <a:ext cx="2066544" cy="530352"/>
+          </a:xfrm>
+          <a:prstGeom prst="rect">
+            <a:avLst/>
+          </a:prstGeom>
+          <a:solidFill>
+            <a:srgbClr val="DDA15E"/>
+          </a:solidFill>
+          <a:ln/>
+        </p:spPr>
+      </p:sp>
+      <p:sp>
+        <p:nvSpPr>
+          <p:cNvPr id="28" name="Shape 24"/>
+          <p:cNvSpPr/>
+          <p:nvPr/>
+        </p:nvSpPr>
+        <p:spPr>
+          <a:xfrm>
+            <a:off x="5065776" y="4292251"/>
+            <a:ext cx="402336" cy="530352"/>
+          </a:xfrm>
+          <a:prstGeom prst="rect">
+            <a:avLst/>
+          </a:prstGeom>
+          <a:solidFill>
+            <a:srgbClr val="283618"/>
+          </a:solidFill>
+          <a:ln/>
+        </p:spPr>
+      </p:sp>
+      <p:sp>
+        <p:nvSpPr>
+          <p:cNvPr id="29" name="Text 25"/>
+          <p:cNvSpPr/>
+          <p:nvPr/>
+        </p:nvSpPr>
+        <p:spPr>
+          <a:xfrm>
+            <a:off x="5065776" y="4292251"/>
+            <a:ext cx="402336" cy="530352"/>
+          </a:xfrm>
+          <a:prstGeom prst="rect">
+            <a:avLst/>
+          </a:prstGeom>
+          <a:noFill/>
+          <a:ln/>
+        </p:spPr>
+        <p:txBody>
+          <a:bodyPr wrap="square" lIns="0" tIns="0" rIns="0" bIns="0" rtlCol="0" anchor="ctr"/>
+          <a:lstStyle/>
+          <a:p>
+            <a:pPr algn="ctr" indent="0" marL="0">
+              <a:buNone/>
+            </a:pPr>
+            <a:r>
+              <a:rPr lang="en-US" sz="1300" b="1" dirty="0">
+                <a:solidFill>
+                  <a:srgbClr val="FEFAE0"/>
+                </a:solidFill>
+                <a:latin typeface="Georgia" pitchFamily="34" charset="0"/>
+                <a:ea typeface="Georgia" pitchFamily="34" charset="-122"/>
+                <a:cs typeface="Georgia" pitchFamily="34" charset="-120"/>
+              </a:rPr>
+              <a:t>D2</a:t>
+            </a:r>
+            <a:endParaRPr lang="en-US" sz="1300" dirty="0"/>
+          </a:p>
+        </p:txBody>
+      </p:sp>
+      <p:sp>
+        <p:nvSpPr>
+          <p:cNvPr id="30" name="Text 26"/>
+          <p:cNvSpPr/>
+          <p:nvPr/>
+        </p:nvSpPr>
+        <p:spPr>
+          <a:xfrm>
+            <a:off x="5541264" y="4337971"/>
+            <a:ext cx="1554480" cy="164592"/>
+          </a:xfrm>
+          <a:prstGeom prst="rect">
+            <a:avLst/>
+          </a:prstGeom>
+          <a:noFill/>
+          <a:ln/>
+        </p:spPr>
+        <p:txBody>
+          <a:bodyPr wrap="square" lIns="0" tIns="0" rIns="0" bIns="0" rtlCol="0" anchor="ctr"/>
+          <a:lstStyle/>
+          <a:p>
+            <a:pPr indent="0" marL="0">
+              <a:buNone/>
+            </a:pPr>
+            <a:r>
+              <a:rPr lang="en-US" sz="700" dirty="0">
+                <a:solidFill>
+                  <a:srgbClr val="606C38"/>
                 </a:solidFill>
                 <a:latin typeface="Calibri" pitchFamily="34" charset="0"/>
                 <a:ea typeface="Calibri" pitchFamily="34" charset="-122"/>
                 <a:cs typeface="Calibri" pitchFamily="34" charset="-120"/>
               </a:rPr>
-              <a:t>3.  Кнопка "Предложить помощь"</a:t>
-            </a:r>
-            <a:endParaRPr lang="en-US" sz="1100" dirty="0"/>
-          </a:p>
-          <a:p>
-            <a:pPr indent="0" marL="0">
-              <a:spcAft>
-                <a:spcPts val="300"/>
-              </a:spcAft>
-              <a:buNone/>
-            </a:pPr>
-            <a:r>
-              <a:rPr lang="en-US" sz="1100" dirty="0">
+              <a:t>требуется / обещано / получено / свободно</a:t>
+            </a:r>
+            <a:endParaRPr lang="en-US" sz="700" dirty="0"/>
+          </a:p>
+        </p:txBody>
+      </p:sp>
+      <p:sp>
+        <p:nvSpPr>
+          <p:cNvPr id="31" name="Text 27"/>
+          <p:cNvSpPr/>
+          <p:nvPr/>
+        </p:nvSpPr>
+        <p:spPr>
+          <a:xfrm>
+            <a:off x="5541264" y="4502563"/>
+            <a:ext cx="1554480" cy="274320"/>
+          </a:xfrm>
+          <a:prstGeom prst="rect">
+            <a:avLst/>
+          </a:prstGeom>
+          <a:noFill/>
+          <a:ln/>
+        </p:spPr>
+        <p:txBody>
+          <a:bodyPr wrap="square" lIns="0" tIns="0" rIns="0" bIns="0" rtlCol="0" anchor="ctr"/>
+          <a:lstStyle/>
+          <a:p>
+            <a:pPr indent="0" marL="0">
+              <a:buNone/>
+            </a:pPr>
+            <a:r>
+              <a:rPr lang="en-US" sz="1350" b="1" dirty="0">
                 <a:solidFill>
                   <a:srgbClr val="283618"/>
+                </a:solidFill>
+                <a:latin typeface="Georgia" pitchFamily="34" charset="0"/>
+                <a:ea typeface="Georgia" pitchFamily="34" charset="-122"/>
+                <a:cs typeface="Georgia" pitchFamily="34" charset="-120"/>
+              </a:rPr>
+              <a:t>20 / 0 / 3 / 17</a:t>
+            </a:r>
+            <a:endParaRPr lang="en-US" sz="1350" dirty="0"/>
+          </a:p>
+        </p:txBody>
+      </p:sp>
+      <p:sp>
+        <p:nvSpPr>
+          <p:cNvPr id="32" name="Text 28"/>
+          <p:cNvSpPr/>
+          <p:nvPr/>
+        </p:nvSpPr>
+        <p:spPr>
+          <a:xfrm>
+            <a:off x="7315200" y="4292251"/>
+            <a:ext cx="1280160" cy="530352"/>
+          </a:xfrm>
+          <a:prstGeom prst="rect">
+            <a:avLst/>
+          </a:prstGeom>
+          <a:noFill/>
+          <a:ln/>
+        </p:spPr>
+        <p:txBody>
+          <a:bodyPr wrap="square" lIns="0" tIns="0" rIns="0" bIns="0" rtlCol="0" anchor="ctr"/>
+          <a:lstStyle/>
+          <a:p>
+            <a:pPr indent="0" marL="0">
+              <a:buNone/>
+            </a:pPr>
+            <a:r>
+              <a:rPr lang="en-US" sz="800" dirty="0">
+                <a:solidFill>
+                  <a:srgbClr val="606C38"/>
                 </a:solidFill>
                 <a:latin typeface="Calibri" pitchFamily="34" charset="0"/>
                 <a:ea typeface="Calibri" pitchFamily="34" charset="-122"/>
                 <a:cs typeface="Calibri" pitchFamily="34" charset="-120"/>
               </a:rPr>
-              <a:t>4.  Ввод количества 5, получение кода</a:t>
-            </a:r>
-            <a:endParaRPr lang="en-US" sz="1100" dirty="0"/>
-          </a:p>
-          <a:p>
-            <a:pPr indent="0" marL="0">
-              <a:spcAft>
-                <a:spcPts val="300"/>
-              </a:spcAft>
-              <a:buNone/>
-            </a:pPr>
-            <a:r>
-              <a:rPr lang="en-US" sz="1100" b="1" dirty="0">
-                <a:solidFill>
-                  <a:srgbClr val="283618"/>
-                </a:solidFill>
-                <a:latin typeface="Calibri" pitchFamily="34" charset="0"/>
-                <a:ea typeface="Calibri" pitchFamily="34" charset="-122"/>
-                <a:cs typeface="Calibri" pitchFamily="34" charset="-120"/>
-              </a:rPr>
-              <a:t>5.  Итог: обещано 5, получено 0, свободно 15</a:t>
-            </a:r>
-            <a:endParaRPr lang="en-US" sz="1100" dirty="0"/>
-          </a:p>
-        </p:txBody>
-      </p:sp>
-      <p:sp>
-        <p:nvSpPr>
-          <p:cNvPr id="13" name="Shape 11"/>
-          <p:cNvSpPr/>
-          <p:nvPr/>
-        </p:nvSpPr>
-        <p:spPr>
-          <a:xfrm>
-            <a:off x="4681728" y="1207008"/>
-            <a:ext cx="3913632" cy="2487168"/>
-          </a:xfrm>
-          <a:prstGeom prst="rect">
-            <a:avLst/>
-          </a:prstGeom>
-          <a:solidFill>
-            <a:srgbClr val="FEFAE0"/>
-          </a:solidFill>
-          <a:ln w="15875">
-            <a:solidFill>
-              <a:srgbClr val="606C38"/>
-            </a:solidFill>
-            <a:prstDash val="dash"/>
-          </a:ln>
-        </p:spPr>
-      </p:sp>
-      <p:sp>
-        <p:nvSpPr>
-          <p:cNvPr id="14" name="Shape 12"/>
-          <p:cNvSpPr/>
-          <p:nvPr/>
-        </p:nvSpPr>
-        <p:spPr>
-          <a:xfrm>
-            <a:off x="4681728" y="1207008"/>
-            <a:ext cx="3913632" cy="292608"/>
-          </a:xfrm>
-          <a:prstGeom prst="rect">
-            <a:avLst/>
-          </a:prstGeom>
-          <a:solidFill>
-            <a:srgbClr val="606C38"/>
-          </a:solidFill>
-          <a:ln/>
-        </p:spPr>
-      </p:sp>
-      <p:sp>
-        <p:nvSpPr>
-          <p:cNvPr id="15" name="Text 13"/>
-          <p:cNvSpPr/>
-          <p:nvPr/>
-        </p:nvSpPr>
-        <p:spPr>
-          <a:xfrm>
-            <a:off x="4791456" y="1207008"/>
-            <a:ext cx="3694176" cy="292608"/>
-          </a:xfrm>
-          <a:prstGeom prst="rect">
-            <a:avLst/>
-          </a:prstGeom>
-          <a:noFill/>
-          <a:ln/>
-        </p:spPr>
-        <p:txBody>
-          <a:bodyPr wrap="square" lIns="0" tIns="0" rIns="0" bIns="0" rtlCol="0" anchor="ctr"/>
-          <a:lstStyle/>
-          <a:p>
-            <a:pPr indent="0" marL="0">
-              <a:buNone/>
-            </a:pPr>
-            <a:r>
-              <a:rPr lang="en-US" sz="1000" b="1" spc="80" kern="0" dirty="0">
-                <a:solidFill>
-                  <a:srgbClr val="FEFAE0"/>
-                </a:solidFill>
-                <a:latin typeface="Calibri" pitchFamily="34" charset="0"/>
-                <a:ea typeface="Calibri" pitchFamily="34" charset="-122"/>
-                <a:cs typeface="Calibri" pitchFamily="34" charset="-120"/>
-              </a:rPr>
-              <a:t>ОКНО B -- КАБИНЕТ ПРИЮТА</a:t>
-            </a:r>
-            <a:endParaRPr lang="en-US" sz="1000" dirty="0"/>
-          </a:p>
-        </p:txBody>
-      </p:sp>
-      <p:sp>
-        <p:nvSpPr>
-          <p:cNvPr id="16" name="Text 14"/>
-          <p:cNvSpPr/>
-          <p:nvPr/>
-        </p:nvSpPr>
-        <p:spPr>
-          <a:xfrm>
-            <a:off x="4681728" y="1984248"/>
-            <a:ext cx="3913632" cy="365760"/>
-          </a:xfrm>
-          <a:prstGeom prst="rect">
-            <a:avLst/>
-          </a:prstGeom>
-          <a:noFill/>
-          <a:ln/>
-        </p:spPr>
-        <p:txBody>
-          <a:bodyPr wrap="square" lIns="0" tIns="0" rIns="0" bIns="0" rtlCol="0" anchor="ctr"/>
-          <a:lstStyle/>
-          <a:p>
-            <a:pPr algn="ctr" indent="0" marL="0">
-              <a:buNone/>
-            </a:pPr>
-            <a:r>
-              <a:rPr lang="en-US" sz="1400" b="1" dirty="0">
-                <a:solidFill>
-                  <a:srgbClr val="606C38"/>
-                </a:solidFill>
-                <a:latin typeface="Georgia" pitchFamily="34" charset="0"/>
-                <a:ea typeface="Georgia" pitchFamily="34" charset="-122"/>
-                <a:cs typeface="Georgia" pitchFamily="34" charset="-120"/>
-              </a:rPr>
-              <a:t>Кадр приложения</a:t>
-            </a:r>
-            <a:endParaRPr lang="en-US" sz="1400" dirty="0"/>
-          </a:p>
-        </p:txBody>
-      </p:sp>
-      <p:sp>
-        <p:nvSpPr>
-          <p:cNvPr id="17" name="Text 15"/>
-          <p:cNvSpPr/>
-          <p:nvPr/>
-        </p:nvSpPr>
-        <p:spPr>
-          <a:xfrm>
-            <a:off x="4846320" y="2395728"/>
-            <a:ext cx="3584448" cy="1207008"/>
-          </a:xfrm>
-          <a:prstGeom prst="rect">
-            <a:avLst/>
-          </a:prstGeom>
-          <a:noFill/>
-          <a:ln/>
-        </p:spPr>
-        <p:txBody>
-          <a:bodyPr wrap="square" lIns="0" tIns="0" rIns="0" bIns="0" rtlCol="0" anchor="ctr"/>
-          <a:lstStyle/>
-          <a:p>
-            <a:pPr indent="0" marL="0">
-              <a:spcAft>
-                <a:spcPts val="300"/>
-              </a:spcAft>
-              <a:buNone/>
-            </a:pPr>
-            <a:r>
-              <a:rPr lang="en-US" sz="1100" dirty="0">
-                <a:solidFill>
-                  <a:srgbClr val="283618"/>
-                </a:solidFill>
-                <a:latin typeface="Calibri" pitchFamily="34" charset="0"/>
-                <a:ea typeface="Calibri" pitchFamily="34" charset="-122"/>
-                <a:cs typeface="Calibri" pitchFamily="34" charset="-120"/>
-              </a:rPr>
-              <a:t>1.  Вход представителя приюта</a:t>
-            </a:r>
-            <a:endParaRPr lang="en-US" sz="1100" dirty="0"/>
-          </a:p>
-          <a:p>
-            <a:pPr indent="0" marL="0">
-              <a:spcAft>
-                <a:spcPts val="300"/>
-              </a:spcAft>
-              <a:buNone/>
-            </a:pPr>
-            <a:r>
-              <a:rPr lang="en-US" sz="1100" dirty="0">
-                <a:solidFill>
-                  <a:srgbClr val="283618"/>
-                </a:solidFill>
-                <a:latin typeface="Calibri" pitchFamily="34" charset="0"/>
-                <a:ea typeface="Calibri" pitchFamily="34" charset="-122"/>
-                <a:cs typeface="Calibri" pitchFamily="34" charset="-120"/>
-              </a:rPr>
-              <a:t>2.  Свои потребности, включая закрытые</a:t>
-            </a:r>
-            <a:endParaRPr lang="en-US" sz="1100" dirty="0"/>
-          </a:p>
-          <a:p>
-            <a:pPr indent="0" marL="0">
-              <a:spcAft>
-                <a:spcPts val="300"/>
-              </a:spcAft>
-              <a:buNone/>
-            </a:pPr>
-            <a:r>
-              <a:rPr lang="en-US" sz="1100" dirty="0">
-                <a:solidFill>
-                  <a:srgbClr val="283618"/>
-                </a:solidFill>
-                <a:latin typeface="Calibri" pitchFamily="34" charset="0"/>
-                <a:ea typeface="Calibri" pitchFamily="34" charset="-122"/>
-                <a:cs typeface="Calibri" pitchFamily="34" charset="-120"/>
-              </a:rPr>
-              <a:t>3.  Экран подтверждения по коду</a:t>
-            </a:r>
-            <a:endParaRPr lang="en-US" sz="1100" dirty="0"/>
-          </a:p>
-          <a:p>
-            <a:pPr indent="0" marL="0">
-              <a:spcAft>
-                <a:spcPts val="300"/>
-              </a:spcAft>
-              <a:buNone/>
-            </a:pPr>
-            <a:r>
-              <a:rPr lang="en-US" sz="1100" dirty="0">
-                <a:solidFill>
-                  <a:srgbClr val="283618"/>
-                </a:solidFill>
-                <a:latin typeface="Calibri" pitchFamily="34" charset="0"/>
-                <a:ea typeface="Calibri" pitchFamily="34" charset="-122"/>
-                <a:cs typeface="Calibri" pitchFamily="34" charset="-120"/>
-              </a:rPr>
-              <a:t>4.  Фактически получено 3, подтвердить</a:t>
-            </a:r>
-            <a:endParaRPr lang="en-US" sz="1100" dirty="0"/>
-          </a:p>
-          <a:p>
-            <a:pPr indent="0" marL="0">
-              <a:spcAft>
-                <a:spcPts val="300"/>
-              </a:spcAft>
-              <a:buNone/>
-            </a:pPr>
-            <a:r>
-              <a:rPr lang="en-US" sz="1100" b="1" dirty="0">
-                <a:solidFill>
-                  <a:srgbClr val="283618"/>
-                </a:solidFill>
-                <a:latin typeface="Calibri" pitchFamily="34" charset="0"/>
-                <a:ea typeface="Calibri" pitchFamily="34" charset="-122"/>
-                <a:cs typeface="Calibri" pitchFamily="34" charset="-120"/>
-              </a:rPr>
-              <a:t>5.  Итог: обещано 0, получено 3, свободно 17</a:t>
-            </a:r>
-            <a:endParaRPr lang="en-US" sz="1100" dirty="0"/>
-          </a:p>
-        </p:txBody>
-      </p:sp>
-      <p:sp>
-        <p:nvSpPr>
-          <p:cNvPr id="18" name="Text 16"/>
-          <p:cNvSpPr/>
-          <p:nvPr/>
-        </p:nvSpPr>
-        <p:spPr>
-          <a:xfrm>
-            <a:off x="548640" y="3840480"/>
-            <a:ext cx="3657600" cy="237744"/>
-          </a:xfrm>
-          <a:prstGeom prst="rect">
-            <a:avLst/>
-          </a:prstGeom>
-          <a:noFill/>
-          <a:ln/>
-        </p:spPr>
-        <p:txBody>
-          <a:bodyPr wrap="square" lIns="0" tIns="0" rIns="0" bIns="0" rtlCol="0" anchor="ctr"/>
-          <a:lstStyle/>
-          <a:p>
-            <a:pPr indent="0" marL="0">
-              <a:buNone/>
-            </a:pPr>
-            <a:r>
-              <a:rPr lang="en-US" sz="1000" b="1" spc="120" kern="0" dirty="0">
-                <a:solidFill>
-                  <a:srgbClr val="283618"/>
-                </a:solidFill>
-                <a:latin typeface="Calibri" pitchFamily="34" charset="0"/>
-                <a:ea typeface="Calibri" pitchFamily="34" charset="-122"/>
-                <a:cs typeface="Calibri" pitchFamily="34" charset="-120"/>
-              </a:rPr>
-              <a:t>КОНТРОЛЬНЫЕ ТОЧКИ НА ЭКРАНЕ</a:t>
-            </a:r>
-            <a:endParaRPr lang="en-US" sz="1000" dirty="0"/>
-          </a:p>
-        </p:txBody>
-      </p:sp>
-      <p:sp>
-        <p:nvSpPr>
-          <p:cNvPr id="19" name="Shape 17"/>
-          <p:cNvSpPr/>
-          <p:nvPr/>
-        </p:nvSpPr>
-        <p:spPr>
-          <a:xfrm>
-            <a:off x="548640" y="4114800"/>
-            <a:ext cx="2084832" cy="548640"/>
-          </a:xfrm>
-          <a:prstGeom prst="rect">
-            <a:avLst/>
-          </a:prstGeom>
-          <a:solidFill>
-            <a:srgbClr val="DDA15E"/>
-          </a:solidFill>
-          <a:ln/>
-        </p:spPr>
-      </p:sp>
-      <p:sp>
-        <p:nvSpPr>
-          <p:cNvPr id="20" name="Shape 18"/>
-          <p:cNvSpPr/>
-          <p:nvPr/>
-        </p:nvSpPr>
-        <p:spPr>
-          <a:xfrm>
-            <a:off x="548640" y="4114800"/>
-            <a:ext cx="402336" cy="548640"/>
-          </a:xfrm>
-          <a:prstGeom prst="rect">
-            <a:avLst/>
-          </a:prstGeom>
-          <a:solidFill>
-            <a:srgbClr val="283618"/>
-          </a:solidFill>
-          <a:ln/>
-        </p:spPr>
-      </p:sp>
-      <p:sp>
-        <p:nvSpPr>
-          <p:cNvPr id="21" name="Text 19"/>
-          <p:cNvSpPr/>
-          <p:nvPr/>
-        </p:nvSpPr>
-        <p:spPr>
-          <a:xfrm>
-            <a:off x="548640" y="4114800"/>
-            <a:ext cx="402336" cy="548640"/>
-          </a:xfrm>
-          <a:prstGeom prst="rect">
-            <a:avLst/>
-          </a:prstGeom>
-          <a:noFill/>
-          <a:ln/>
-        </p:spPr>
-        <p:txBody>
-          <a:bodyPr wrap="square" lIns="0" tIns="0" rIns="0" bIns="0" rtlCol="0" anchor="ctr"/>
-          <a:lstStyle/>
-          <a:p>
-            <a:pPr algn="ctr" indent="0" marL="0">
-              <a:buNone/>
-            </a:pPr>
-            <a:r>
-              <a:rPr lang="en-US" sz="1300" b="1" dirty="0">
-                <a:solidFill>
-                  <a:srgbClr val="FEFAE0"/>
-                </a:solidFill>
-                <a:latin typeface="Georgia" pitchFamily="34" charset="0"/>
-                <a:ea typeface="Georgia" pitchFamily="34" charset="-122"/>
-                <a:cs typeface="Georgia" pitchFamily="34" charset="-120"/>
-              </a:rPr>
-              <a:t>D0</a:t>
-            </a:r>
-            <a:endParaRPr lang="en-US" sz="1300" dirty="0"/>
-          </a:p>
-        </p:txBody>
-      </p:sp>
-      <p:sp>
-        <p:nvSpPr>
-          <p:cNvPr id="22" name="Text 20"/>
-          <p:cNvSpPr/>
-          <p:nvPr/>
-        </p:nvSpPr>
-        <p:spPr>
-          <a:xfrm>
-            <a:off x="1042416" y="4169664"/>
-            <a:ext cx="1536192" cy="182880"/>
-          </a:xfrm>
-          <a:prstGeom prst="rect">
-            <a:avLst/>
-          </a:prstGeom>
-          <a:noFill/>
-          <a:ln/>
-        </p:spPr>
-        <p:txBody>
-          <a:bodyPr wrap="square" lIns="0" tIns="0" rIns="0" bIns="0" rtlCol="0" anchor="ctr"/>
-          <a:lstStyle/>
-          <a:p>
-            <a:pPr indent="0" marL="0">
-              <a:buNone/>
-            </a:pPr>
-            <a:r>
-              <a:rPr lang="en-US" sz="750" dirty="0">
-                <a:solidFill>
-                  <a:srgbClr val="606C38"/>
-                </a:solidFill>
-                <a:latin typeface="Calibri" pitchFamily="34" charset="0"/>
-                <a:ea typeface="Calibri" pitchFamily="34" charset="-122"/>
-                <a:cs typeface="Calibri" pitchFamily="34" charset="-120"/>
-              </a:rPr>
-              <a:t>требуется / обещано / получено / свободно</a:t>
-            </a:r>
-            <a:endParaRPr lang="en-US" sz="750" dirty="0"/>
-          </a:p>
-        </p:txBody>
-      </p:sp>
-      <p:sp>
-        <p:nvSpPr>
-          <p:cNvPr id="23" name="Text 21"/>
-          <p:cNvSpPr/>
-          <p:nvPr/>
-        </p:nvSpPr>
-        <p:spPr>
-          <a:xfrm>
-            <a:off x="1042416" y="4343400"/>
-            <a:ext cx="1536192" cy="274320"/>
-          </a:xfrm>
-          <a:prstGeom prst="rect">
-            <a:avLst/>
-          </a:prstGeom>
-          <a:noFill/>
-          <a:ln/>
-        </p:spPr>
-        <p:txBody>
-          <a:bodyPr wrap="square" lIns="0" tIns="0" rIns="0" bIns="0" rtlCol="0" anchor="ctr"/>
-          <a:lstStyle/>
-          <a:p>
-            <a:pPr indent="0" marL="0">
-              <a:buNone/>
-            </a:pPr>
-            <a:r>
-              <a:rPr lang="en-US" sz="1400" b="1" dirty="0">
-                <a:solidFill>
-                  <a:srgbClr val="283618"/>
-                </a:solidFill>
-                <a:latin typeface="Georgia" pitchFamily="34" charset="0"/>
-                <a:ea typeface="Georgia" pitchFamily="34" charset="-122"/>
-                <a:cs typeface="Georgia" pitchFamily="34" charset="-120"/>
-              </a:rPr>
-              <a:t>20 / 0 / 0 / 20</a:t>
-            </a:r>
-            <a:endParaRPr lang="en-US" sz="1400" dirty="0"/>
-          </a:p>
-        </p:txBody>
-      </p:sp>
-      <p:sp>
-        <p:nvSpPr>
-          <p:cNvPr id="24" name="Shape 22"/>
-          <p:cNvSpPr/>
-          <p:nvPr/>
-        </p:nvSpPr>
-        <p:spPr>
-          <a:xfrm>
-            <a:off x="2834640" y="4114800"/>
-            <a:ext cx="2084832" cy="548640"/>
-          </a:xfrm>
-          <a:prstGeom prst="rect">
-            <a:avLst/>
-          </a:prstGeom>
-          <a:solidFill>
-            <a:srgbClr val="DDA15E"/>
-          </a:solidFill>
-          <a:ln/>
-        </p:spPr>
-      </p:sp>
-      <p:sp>
-        <p:nvSpPr>
-          <p:cNvPr id="25" name="Shape 23"/>
-          <p:cNvSpPr/>
-          <p:nvPr/>
-        </p:nvSpPr>
-        <p:spPr>
-          <a:xfrm>
-            <a:off x="2834640" y="4114800"/>
-            <a:ext cx="402336" cy="548640"/>
-          </a:xfrm>
-          <a:prstGeom prst="rect">
-            <a:avLst/>
-          </a:prstGeom>
-          <a:solidFill>
-            <a:srgbClr val="283618"/>
-          </a:solidFill>
-          <a:ln/>
-        </p:spPr>
-      </p:sp>
-      <p:sp>
-        <p:nvSpPr>
-          <p:cNvPr id="26" name="Text 24"/>
-          <p:cNvSpPr/>
-          <p:nvPr/>
-        </p:nvSpPr>
-        <p:spPr>
-          <a:xfrm>
-            <a:off x="2834640" y="4114800"/>
-            <a:ext cx="402336" cy="548640"/>
-          </a:xfrm>
-          <a:prstGeom prst="rect">
-            <a:avLst/>
-          </a:prstGeom>
-          <a:noFill/>
-          <a:ln/>
-        </p:spPr>
-        <p:txBody>
-          <a:bodyPr wrap="square" lIns="0" tIns="0" rIns="0" bIns="0" rtlCol="0" anchor="ctr"/>
-          <a:lstStyle/>
-          <a:p>
-            <a:pPr algn="ctr" indent="0" marL="0">
-              <a:buNone/>
-            </a:pPr>
-            <a:r>
-              <a:rPr lang="en-US" sz="1300" b="1" dirty="0">
-                <a:solidFill>
-                  <a:srgbClr val="FEFAE0"/>
-                </a:solidFill>
-                <a:latin typeface="Georgia" pitchFamily="34" charset="0"/>
-                <a:ea typeface="Georgia" pitchFamily="34" charset="-122"/>
-                <a:cs typeface="Georgia" pitchFamily="34" charset="-120"/>
-              </a:rPr>
-              <a:t>D1</a:t>
-            </a:r>
-            <a:endParaRPr lang="en-US" sz="1300" dirty="0"/>
-          </a:p>
-        </p:txBody>
-      </p:sp>
-      <p:sp>
-        <p:nvSpPr>
-          <p:cNvPr id="27" name="Text 25"/>
-          <p:cNvSpPr/>
-          <p:nvPr/>
-        </p:nvSpPr>
-        <p:spPr>
-          <a:xfrm>
-            <a:off x="3328416" y="4169664"/>
-            <a:ext cx="1536192" cy="182880"/>
-          </a:xfrm>
-          <a:prstGeom prst="rect">
-            <a:avLst/>
-          </a:prstGeom>
-          <a:noFill/>
-          <a:ln/>
-        </p:spPr>
-        <p:txBody>
-          <a:bodyPr wrap="square" lIns="0" tIns="0" rIns="0" bIns="0" rtlCol="0" anchor="ctr"/>
-          <a:lstStyle/>
-          <a:p>
-            <a:pPr indent="0" marL="0">
-              <a:buNone/>
-            </a:pPr>
-            <a:r>
-              <a:rPr lang="en-US" sz="750" dirty="0">
-                <a:solidFill>
-                  <a:srgbClr val="606C38"/>
-                </a:solidFill>
-                <a:latin typeface="Calibri" pitchFamily="34" charset="0"/>
-                <a:ea typeface="Calibri" pitchFamily="34" charset="-122"/>
-                <a:cs typeface="Calibri" pitchFamily="34" charset="-120"/>
-              </a:rPr>
-              <a:t>требуется / обещано / получено / свободно</a:t>
-            </a:r>
-            <a:endParaRPr lang="en-US" sz="750" dirty="0"/>
-          </a:p>
-        </p:txBody>
-      </p:sp>
-      <p:sp>
-        <p:nvSpPr>
-          <p:cNvPr id="28" name="Text 26"/>
-          <p:cNvSpPr/>
-          <p:nvPr/>
-        </p:nvSpPr>
-        <p:spPr>
-          <a:xfrm>
-            <a:off x="3328416" y="4343400"/>
-            <a:ext cx="1536192" cy="274320"/>
-          </a:xfrm>
-          <a:prstGeom prst="rect">
-            <a:avLst/>
-          </a:prstGeom>
-          <a:noFill/>
-          <a:ln/>
-        </p:spPr>
-        <p:txBody>
-          <a:bodyPr wrap="square" lIns="0" tIns="0" rIns="0" bIns="0" rtlCol="0" anchor="ctr"/>
-          <a:lstStyle/>
-          <a:p>
-            <a:pPr indent="0" marL="0">
-              <a:buNone/>
-            </a:pPr>
-            <a:r>
-              <a:rPr lang="en-US" sz="1400" b="1" dirty="0">
-                <a:solidFill>
-                  <a:srgbClr val="283618"/>
-                </a:solidFill>
-                <a:latin typeface="Georgia" pitchFamily="34" charset="0"/>
-                <a:ea typeface="Georgia" pitchFamily="34" charset="-122"/>
-                <a:cs typeface="Georgia" pitchFamily="34" charset="-120"/>
-              </a:rPr>
-              <a:t>20 / 5 / 0 / 15</a:t>
-            </a:r>
-            <a:endParaRPr lang="en-US" sz="1400" dirty="0"/>
-          </a:p>
-        </p:txBody>
-      </p:sp>
-      <p:sp>
-        <p:nvSpPr>
-          <p:cNvPr id="29" name="Shape 27"/>
-          <p:cNvSpPr/>
-          <p:nvPr/>
-        </p:nvSpPr>
-        <p:spPr>
-          <a:xfrm>
-            <a:off x="5120640" y="4114800"/>
-            <a:ext cx="2084832" cy="548640"/>
-          </a:xfrm>
-          <a:prstGeom prst="rect">
-            <a:avLst/>
-          </a:prstGeom>
-          <a:solidFill>
-            <a:srgbClr val="DDA15E"/>
-          </a:solidFill>
-          <a:ln/>
-        </p:spPr>
-      </p:sp>
-      <p:sp>
-        <p:nvSpPr>
-          <p:cNvPr id="30" name="Shape 28"/>
-          <p:cNvSpPr/>
-          <p:nvPr/>
-        </p:nvSpPr>
-        <p:spPr>
-          <a:xfrm>
-            <a:off x="5120640" y="4114800"/>
-            <a:ext cx="402336" cy="548640"/>
-          </a:xfrm>
-          <a:prstGeom prst="rect">
-            <a:avLst/>
-          </a:prstGeom>
-          <a:solidFill>
-            <a:srgbClr val="283618"/>
-          </a:solidFill>
-          <a:ln/>
-        </p:spPr>
-      </p:sp>
-      <p:sp>
-        <p:nvSpPr>
-          <p:cNvPr id="31" name="Text 29"/>
-          <p:cNvSpPr/>
-          <p:nvPr/>
-        </p:nvSpPr>
-        <p:spPr>
-          <a:xfrm>
-            <a:off x="5120640" y="4114800"/>
-            <a:ext cx="402336" cy="548640"/>
-          </a:xfrm>
-          <a:prstGeom prst="rect">
-            <a:avLst/>
-          </a:prstGeom>
-          <a:noFill/>
-          <a:ln/>
-        </p:spPr>
-        <p:txBody>
-          <a:bodyPr wrap="square" lIns="0" tIns="0" rIns="0" bIns="0" rtlCol="0" anchor="ctr"/>
-          <a:lstStyle/>
-          <a:p>
-            <a:pPr algn="ctr" indent="0" marL="0">
-              <a:buNone/>
-            </a:pPr>
-            <a:r>
-              <a:rPr lang="en-US" sz="1300" b="1" dirty="0">
-                <a:solidFill>
-                  <a:srgbClr val="FEFAE0"/>
-                </a:solidFill>
-                <a:latin typeface="Georgia" pitchFamily="34" charset="0"/>
-                <a:ea typeface="Georgia" pitchFamily="34" charset="-122"/>
-                <a:cs typeface="Georgia" pitchFamily="34" charset="-120"/>
-              </a:rPr>
-              <a:t>D2</a:t>
-            </a:r>
-            <a:endParaRPr lang="en-US" sz="1300" dirty="0"/>
-          </a:p>
-        </p:txBody>
-      </p:sp>
-      <p:sp>
-        <p:nvSpPr>
-          <p:cNvPr id="32" name="Text 30"/>
-          <p:cNvSpPr/>
-          <p:nvPr/>
-        </p:nvSpPr>
-        <p:spPr>
-          <a:xfrm>
-            <a:off x="5614416" y="4169664"/>
-            <a:ext cx="1536192" cy="182880"/>
-          </a:xfrm>
-          <a:prstGeom prst="rect">
-            <a:avLst/>
-          </a:prstGeom>
-          <a:noFill/>
-          <a:ln/>
-        </p:spPr>
-        <p:txBody>
-          <a:bodyPr wrap="square" lIns="0" tIns="0" rIns="0" bIns="0" rtlCol="0" anchor="ctr"/>
-          <a:lstStyle/>
-          <a:p>
-            <a:pPr indent="0" marL="0">
-              <a:buNone/>
-            </a:pPr>
-            <a:r>
-              <a:rPr lang="en-US" sz="750" dirty="0">
-                <a:solidFill>
-                  <a:srgbClr val="606C38"/>
-                </a:solidFill>
-                <a:latin typeface="Calibri" pitchFamily="34" charset="0"/>
-                <a:ea typeface="Calibri" pitchFamily="34" charset="-122"/>
-                <a:cs typeface="Calibri" pitchFamily="34" charset="-120"/>
-              </a:rPr>
-              <a:t>требуется / обещано / получено / свободно</a:t>
-            </a:r>
-            <a:endParaRPr lang="en-US" sz="750" dirty="0"/>
-          </a:p>
-        </p:txBody>
-      </p:sp>
-      <p:sp>
-        <p:nvSpPr>
-          <p:cNvPr id="33" name="Text 31"/>
-          <p:cNvSpPr/>
-          <p:nvPr/>
-        </p:nvSpPr>
-        <p:spPr>
-          <a:xfrm>
-            <a:off x="5614416" y="4343400"/>
-            <a:ext cx="1536192" cy="274320"/>
-          </a:xfrm>
-          <a:prstGeom prst="rect">
-            <a:avLst/>
-          </a:prstGeom>
-          <a:noFill/>
-          <a:ln/>
-        </p:spPr>
-        <p:txBody>
-          <a:bodyPr wrap="square" lIns="0" tIns="0" rIns="0" bIns="0" rtlCol="0" anchor="ctr"/>
-          <a:lstStyle/>
-          <a:p>
-            <a:pPr indent="0" marL="0">
-              <a:buNone/>
-            </a:pPr>
-            <a:r>
-              <a:rPr lang="en-US" sz="1400" b="1" dirty="0">
-                <a:solidFill>
-                  <a:srgbClr val="283618"/>
-                </a:solidFill>
-                <a:latin typeface="Georgia" pitchFamily="34" charset="0"/>
-                <a:ea typeface="Georgia" pitchFamily="34" charset="-122"/>
-                <a:cs typeface="Georgia" pitchFamily="34" charset="-120"/>
-              </a:rPr>
-              <a:t>20 / 0 / 3 / 17</a:t>
-            </a:r>
-            <a:endParaRPr lang="en-US" sz="1400" dirty="0"/>
-          </a:p>
-        </p:txBody>
-      </p:sp>
-      <p:sp>
-        <p:nvSpPr>
-          <p:cNvPr id="34" name="Text 32"/>
-          <p:cNvSpPr/>
-          <p:nvPr/>
-        </p:nvSpPr>
-        <p:spPr>
-          <a:xfrm>
-            <a:off x="7424928" y="4114800"/>
-            <a:ext cx="1170432" cy="548640"/>
-          </a:xfrm>
-          <a:prstGeom prst="rect">
-            <a:avLst/>
-          </a:prstGeom>
-          <a:noFill/>
-          <a:ln/>
-        </p:spPr>
-        <p:txBody>
-          <a:bodyPr wrap="square" lIns="0" tIns="0" rIns="0" bIns="0" rtlCol="0" anchor="ctr"/>
-          <a:lstStyle/>
-          <a:p>
-            <a:pPr indent="0" marL="0">
-              <a:buNone/>
-            </a:pPr>
-            <a:r>
-              <a:rPr lang="en-US" sz="850" dirty="0">
-                <a:solidFill>
-                  <a:srgbClr val="606C38"/>
-                </a:solidFill>
-                <a:latin typeface="Calibri" pitchFamily="34" charset="0"/>
-                <a:ea typeface="Calibri" pitchFamily="34" charset="-122"/>
-                <a:cs typeface="Calibri" pitchFamily="34" charset="-120"/>
-              </a:rPr>
-              <a:t>После D2 обновить публичную страницу -- это доказывает, что данные сохранились.</a:t>
-            </a:r>
-            <a:endParaRPr lang="en-US" sz="850" dirty="0"/>
+              <a:t>После D2 обновить публичную страницу -- это и есть доказательство, что данные сохранились.</a:t>
+            </a:r>
+            <a:endParaRPr lang="en-US" sz="800" dirty="0"/>
           </a:p>
         </p:txBody>
       </p:sp>

--- a/slides/output/lapa-ryadom-pitch.pptx
+++ b/slides/output/lapa-ryadom-pitch.pptx
@@ -4167,7 +4167,7 @@
         </p:nvSpPr>
         <p:spPr>
           <a:xfrm>
-            <a:off x="8503920" y="4663440"/>
+            <a:off x="8503920" y="4736592"/>
             <a:ext cx="384048" cy="274320"/>
           </a:xfrm>
           <a:prstGeom prst="rect">
@@ -4187,7 +4187,7 @@
         </p:nvSpPr>
         <p:spPr>
           <a:xfrm>
-            <a:off x="8503920" y="4663440"/>
+            <a:off x="8503920" y="4736592"/>
             <a:ext cx="384048" cy="274320"/>
           </a:xfrm>
           <a:prstGeom prst="rect">
@@ -4226,8 +4226,8 @@
         </p:nvSpPr>
         <p:spPr>
           <a:xfrm>
-            <a:off x="548640" y="274320"/>
-            <a:ext cx="5486400" cy="475488"/>
+            <a:off x="548640" y="237744"/>
+            <a:ext cx="5486400" cy="457200"/>
           </a:xfrm>
           <a:prstGeom prst="rect">
             <a:avLst/>
@@ -4243,7 +4243,7 @@
               <a:buNone/>
             </a:pPr>
             <a:r>
-              <a:rPr lang="en-US" sz="2800" b="1" dirty="0">
+              <a:rPr lang="en-US" sz="2600" b="1" dirty="0">
                 <a:solidFill>
                   <a:srgbClr val="283618"/>
                 </a:solidFill>
@@ -4253,7 +4253,7 @@
               </a:rPr>
               <a:t>Живая демонстрация</a:t>
             </a:r>
-            <a:endParaRPr lang="en-US" sz="2800" dirty="0"/>
+            <a:endParaRPr lang="en-US" sz="2600" dirty="0"/>
           </a:p>
         </p:txBody>
       </p:sp>
@@ -4265,8 +4265,8 @@
         </p:nvSpPr>
         <p:spPr>
           <a:xfrm>
-            <a:off x="548640" y="768096"/>
-            <a:ext cx="6035040" cy="237744"/>
+            <a:off x="548640" y="713232"/>
+            <a:ext cx="8229600" cy="457200"/>
           </a:xfrm>
           <a:prstGeom prst="rect">
             <a:avLst/>
@@ -4282,7 +4282,7 @@
               <a:buNone/>
             </a:pPr>
             <a:r>
-              <a:rPr lang="en-US" sz="1250" dirty="0">
+              <a:rPr lang="en-US" sz="1200" dirty="0">
                 <a:solidFill>
                   <a:srgbClr val="606C38"/>
                 </a:solidFill>
@@ -4290,9 +4290,9 @@
                 <a:ea typeface="Calibri" pitchFamily="34" charset="-122"/>
                 <a:cs typeface="Calibri" pitchFamily="34" charset="-120"/>
               </a:rPr>
-              <a:t>Публичная часть: без регистрации, счётчики пересчитываются автоматически</a:t>
-            </a:r>
-            <a:endParaRPr lang="en-US" sz="1250" dirty="0"/>
+              <a:t>Четыре кадра одного и того же приложения. Слева направо: исходное состояние D0, каталог после трёх заявок D1, форма приёма на стойке приюта D2, и каталог после приёмки D2.</a:t>
+            </a:r>
+            <a:endParaRPr lang="en-US" sz="1200" dirty="0"/>
           </a:p>
         </p:txBody>
       </p:sp>
@@ -4304,8 +4304,8 @@
         </p:nvSpPr>
         <p:spPr>
           <a:xfrm>
-            <a:off x="566928" y="1170432"/>
-            <a:ext cx="3657600" cy="274320"/>
+            <a:off x="566928" y="1225296"/>
+            <a:ext cx="2066544" cy="237744"/>
           </a:xfrm>
           <a:prstGeom prst="rect">
             <a:avLst/>
@@ -4324,8 +4324,47 @@
         </p:nvSpPr>
         <p:spPr>
           <a:xfrm>
-            <a:off x="676656" y="1170432"/>
-            <a:ext cx="3438144" cy="274320"/>
+            <a:off x="566928" y="1225296"/>
+            <a:ext cx="548640" cy="237744"/>
+          </a:xfrm>
+          <a:prstGeom prst="rect">
+            <a:avLst/>
+          </a:prstGeom>
+          <a:noFill/>
+          <a:ln/>
+        </p:spPr>
+        <p:txBody>
+          <a:bodyPr wrap="square" lIns="0" tIns="0" rIns="0" bIns="0" rtlCol="0" anchor="ctr"/>
+          <a:lstStyle/>
+          <a:p>
+            <a:pPr algn="ctr" indent="0" marL="0">
+              <a:buNone/>
+            </a:pPr>
+            <a:r>
+              <a:rPr lang="en-US" sz="950" b="1" dirty="0">
+                <a:solidFill>
+                  <a:srgbClr val="FEFAE0"/>
+                </a:solidFill>
+                <a:latin typeface="Georgia" pitchFamily="34" charset="0"/>
+                <a:ea typeface="Georgia" pitchFamily="34" charset="-122"/>
+                <a:cs typeface="Georgia" pitchFamily="34" charset="-120"/>
+              </a:rPr>
+              <a:t>D0</a:t>
+            </a:r>
+            <a:endParaRPr lang="en-US" sz="950" dirty="0"/>
+          </a:p>
+        </p:txBody>
+      </p:sp>
+      <p:sp>
+        <p:nvSpPr>
+          <p:cNvPr id="8" name="Text 6"/>
+          <p:cNvSpPr/>
+          <p:nvPr/>
+        </p:nvSpPr>
+        <p:spPr>
+          <a:xfrm>
+            <a:off x="1115568" y="1225296"/>
+            <a:ext cx="1499616" cy="237744"/>
           </a:xfrm>
           <a:prstGeom prst="rect">
             <a:avLst/>
@@ -4341,7 +4380,7 @@
               <a:buNone/>
             </a:pPr>
             <a:r>
-              <a:rPr lang="en-US" sz="900" b="1" spc="60" kern="0" dirty="0">
+              <a:rPr lang="en-US" sz="750" b="1" spc="50" kern="0" dirty="0">
                 <a:solidFill>
                   <a:srgbClr val="FEFAE0"/>
                 </a:solidFill>
@@ -4349,15 +4388,15 @@
                 <a:ea typeface="Calibri" pitchFamily="34" charset="-122"/>
                 <a:cs typeface="Calibri" pitchFamily="34" charset="-120"/>
               </a:rPr>
-              <a:t>ОКНО A -- КАТАЛОГ ПОТРЕБНОСТЕЙ</a:t>
-            </a:r>
-            <a:endParaRPr lang="en-US" sz="900" dirty="0"/>
+              <a:t>КАРТОЧКИ ВНУТРЕННЕЙ ПАНЕЛИ</a:t>
+            </a:r>
+            <a:endParaRPr lang="en-US" sz="750" dirty="0"/>
           </a:p>
         </p:txBody>
       </p:sp>
       <p:pic>
         <p:nvPicPr>
-          <p:cNvPr id="8" name="Image 0" descr="screenshots/needs-catalog.png">    </p:cNvPr>
+          <p:cNvPr id="9" name="Image 0" descr="screenshots/needs-catalog.png">    </p:cNvPr>
           <p:cNvPicPr>
             <a:picLocks noChangeAspect="1"/>
           </p:cNvPicPr>
@@ -4371,8 +4410,8 @@
         </p:blipFill>
         <p:spPr>
           <a:xfrm>
-            <a:off x="630936" y="1463040"/>
-            <a:ext cx="3529584" cy="2481739"/>
+            <a:off x="640080" y="1481328"/>
+            <a:ext cx="1920240" cy="1350169"/>
           </a:xfrm>
           <a:prstGeom prst="rect">
             <a:avLst/>
@@ -4381,14 +4420,14 @@
       </p:pic>
       <p:sp>
         <p:nvSpPr>
-          <p:cNvPr id="9" name="Text 6"/>
-          <p:cNvSpPr/>
-          <p:nvPr/>
-        </p:nvSpPr>
-        <p:spPr>
-          <a:xfrm>
-            <a:off x="585216" y="3981355"/>
-            <a:ext cx="3621024" cy="384048"/>
+          <p:cNvPr id="10" name="Text 7"/>
+          <p:cNvSpPr/>
+          <p:nvPr/>
+        </p:nvSpPr>
+        <p:spPr>
+          <a:xfrm>
+            <a:off x="585216" y="2868073"/>
+            <a:ext cx="2029968" cy="548640"/>
           </a:xfrm>
           <a:prstGeom prst="rect">
             <a:avLst/>
@@ -4404,7 +4443,7 @@
               <a:buNone/>
             </a:pPr>
             <a:r>
-              <a:rPr lang="en-US" sz="800" dirty="0">
+              <a:rPr lang="en-US" sz="750" dirty="0">
                 <a:solidFill>
                   <a:srgbClr val="606C38"/>
                 </a:solidFill>
@@ -4412,22 +4451,22 @@
                 <a:ea typeface="Calibri" pitchFamily="34" charset="-122"/>
                 <a:cs typeface="Calibri" pitchFamily="34" charset="-120"/>
               </a:rPr>
-              <a:t>Фильтры по городу, категории и приоритету; поиск; пагинация. Каждая карточка показывает требуется, обещано, получено и свободно.</a:t>
-            </a:r>
-            <a:endParaRPr lang="en-US" sz="800" dirty="0"/>
-          </a:p>
-        </p:txBody>
-      </p:sp>
-      <p:sp>
-        <p:nvSpPr>
-          <p:cNvPr id="10" name="Shape 7"/>
-          <p:cNvSpPr/>
-          <p:nvPr/>
-        </p:nvSpPr>
-        <p:spPr>
-          <a:xfrm>
-            <a:off x="4919472" y="1170432"/>
-            <a:ext cx="3657600" cy="274320"/>
+              <a:t>Стартовое состояние: 10 потребностей, обнулено reserved и received.</a:t>
+            </a:r>
+            <a:endParaRPr lang="en-US" sz="750" dirty="0"/>
+          </a:p>
+        </p:txBody>
+      </p:sp>
+      <p:sp>
+        <p:nvSpPr>
+          <p:cNvPr id="11" name="Shape 8"/>
+          <p:cNvSpPr/>
+          <p:nvPr/>
+        </p:nvSpPr>
+        <p:spPr>
+          <a:xfrm>
+            <a:off x="2697480" y="1225296"/>
+            <a:ext cx="2066544" cy="237744"/>
           </a:xfrm>
           <a:prstGeom prst="rect">
             <a:avLst/>
@@ -4440,14 +4479,53 @@
       </p:sp>
       <p:sp>
         <p:nvSpPr>
-          <p:cNvPr id="11" name="Text 8"/>
-          <p:cNvSpPr/>
-          <p:nvPr/>
-        </p:nvSpPr>
-        <p:spPr>
-          <a:xfrm>
-            <a:off x="5029200" y="1170432"/>
-            <a:ext cx="3438144" cy="274320"/>
+          <p:cNvPr id="12" name="Text 9"/>
+          <p:cNvSpPr/>
+          <p:nvPr/>
+        </p:nvSpPr>
+        <p:spPr>
+          <a:xfrm>
+            <a:off x="2697480" y="1225296"/>
+            <a:ext cx="548640" cy="237744"/>
+          </a:xfrm>
+          <a:prstGeom prst="rect">
+            <a:avLst/>
+          </a:prstGeom>
+          <a:noFill/>
+          <a:ln/>
+        </p:spPr>
+        <p:txBody>
+          <a:bodyPr wrap="square" lIns="0" tIns="0" rIns="0" bIns="0" rtlCol="0" anchor="ctr"/>
+          <a:lstStyle/>
+          <a:p>
+            <a:pPr algn="ctr" indent="0" marL="0">
+              <a:buNone/>
+            </a:pPr>
+            <a:r>
+              <a:rPr lang="en-US" sz="950" b="1" dirty="0">
+                <a:solidFill>
+                  <a:srgbClr val="FEFAE0"/>
+                </a:solidFill>
+                <a:latin typeface="Georgia" pitchFamily="34" charset="0"/>
+                <a:ea typeface="Georgia" pitchFamily="34" charset="-122"/>
+                <a:cs typeface="Georgia" pitchFamily="34" charset="-120"/>
+              </a:rPr>
+              <a:t>D1</a:t>
+            </a:r>
+            <a:endParaRPr lang="en-US" sz="950" dirty="0"/>
+          </a:p>
+        </p:txBody>
+      </p:sp>
+      <p:sp>
+        <p:nvSpPr>
+          <p:cNvPr id="13" name="Text 10"/>
+          <p:cNvSpPr/>
+          <p:nvPr/>
+        </p:nvSpPr>
+        <p:spPr>
+          <a:xfrm>
+            <a:off x="3246120" y="1225296"/>
+            <a:ext cx="1499616" cy="237744"/>
           </a:xfrm>
           <a:prstGeom prst="rect">
             <a:avLst/>
@@ -4463,7 +4541,7 @@
               <a:buNone/>
             </a:pPr>
             <a:r>
-              <a:rPr lang="en-US" sz="900" b="1" spc="60" kern="0" dirty="0">
+              <a:rPr lang="en-US" sz="750" b="1" spc="50" kern="0" dirty="0">
                 <a:solidFill>
                   <a:srgbClr val="FEFAE0"/>
                 </a:solidFill>
@@ -4471,15 +4549,15 @@
                 <a:ea typeface="Calibri" pitchFamily="34" charset="-122"/>
                 <a:cs typeface="Calibri" pitchFamily="34" charset="-120"/>
               </a:rPr>
-              <a:t>КАРТОЧКА ПОТРЕБНОСТИ</a:t>
-            </a:r>
-            <a:endParaRPr lang="en-US" sz="900" dirty="0"/>
+              <a:t>КАТАЛОГ ПОСЛЕ 3 ЗАЯВОК</a:t>
+            </a:r>
+            <a:endParaRPr lang="en-US" sz="750" dirty="0"/>
           </a:p>
         </p:txBody>
       </p:sp>
       <p:pic>
         <p:nvPicPr>
-          <p:cNvPr id="12" name="Image 1" descr="screenshots/need-detail.png">    </p:cNvPr>
+          <p:cNvPr id="14" name="Image 1" descr="screenshots/needs-catalog-d1.png">    </p:cNvPr>
           <p:cNvPicPr>
             <a:picLocks noChangeAspect="1"/>
           </p:cNvPicPr>
@@ -4493,8 +4571,8 @@
         </p:blipFill>
         <p:spPr>
           <a:xfrm>
-            <a:off x="4983480" y="1463040"/>
-            <a:ext cx="3529584" cy="2481739"/>
+            <a:off x="2770632" y="1481328"/>
+            <a:ext cx="1920240" cy="1350169"/>
           </a:xfrm>
           <a:prstGeom prst="rect">
             <a:avLst/>
@@ -4503,14 +4581,14 @@
       </p:pic>
       <p:sp>
         <p:nvSpPr>
-          <p:cNvPr id="13" name="Text 9"/>
-          <p:cNvSpPr/>
-          <p:nvPr/>
-        </p:nvSpPr>
-        <p:spPr>
-          <a:xfrm>
-            <a:off x="4937760" y="3981355"/>
-            <a:ext cx="3621024" cy="384048"/>
+          <p:cNvPr id="15" name="Text 11"/>
+          <p:cNvSpPr/>
+          <p:nvPr/>
+        </p:nvSpPr>
+        <p:spPr>
+          <a:xfrm>
+            <a:off x="2715768" y="2868073"/>
+            <a:ext cx="2029968" cy="548640"/>
           </a:xfrm>
           <a:prstGeom prst="rect">
             <a:avLst/>
@@ -4526,7 +4604,7 @@
               <a:buNone/>
             </a:pPr>
             <a:r>
-              <a:rPr lang="en-US" sz="800" dirty="0">
+              <a:rPr lang="en-US" sz="750" dirty="0">
                 <a:solidFill>
                   <a:srgbClr val="606C38"/>
                 </a:solidFill>
@@ -4534,22 +4612,81 @@
                 <a:ea typeface="Calibri" pitchFamily="34" charset="-122"/>
                 <a:cs typeface="Calibri" pitchFamily="34" charset="-120"/>
               </a:rPr>
-              <a:t>Адрес и часы приёма. Посетитель называет посильное количество и получает одноразовый код -- без аккаунта и телефона.</a:t>
-            </a:r>
-            <a:endParaRPr lang="en-US" sz="800" dirty="0"/>
-          </a:p>
-        </p:txBody>
-      </p:sp>
-      <p:sp>
-        <p:nvSpPr>
-          <p:cNvPr id="14" name="Text 10"/>
-          <p:cNvSpPr/>
-          <p:nvPr/>
-        </p:nvSpPr>
-        <p:spPr>
-          <a:xfrm>
-            <a:off x="566928" y="3963067"/>
-            <a:ext cx="3657600" cy="914"/>
+              <a:t>Двое дарителей сделали выбор. Счётчик «обещано» вырос, «получено» нет.</a:t>
+            </a:r>
+            <a:endParaRPr lang="en-US" sz="750" dirty="0"/>
+          </a:p>
+        </p:txBody>
+      </p:sp>
+      <p:sp>
+        <p:nvSpPr>
+          <p:cNvPr id="16" name="Shape 12"/>
+          <p:cNvSpPr/>
+          <p:nvPr/>
+        </p:nvSpPr>
+        <p:spPr>
+          <a:xfrm>
+            <a:off x="4828032" y="1225296"/>
+            <a:ext cx="2066544" cy="237744"/>
+          </a:xfrm>
+          <a:prstGeom prst="rect">
+            <a:avLst/>
+          </a:prstGeom>
+          <a:solidFill>
+            <a:srgbClr val="606C38"/>
+          </a:solidFill>
+          <a:ln/>
+        </p:spPr>
+      </p:sp>
+      <p:sp>
+        <p:nvSpPr>
+          <p:cNvPr id="17" name="Text 13"/>
+          <p:cNvSpPr/>
+          <p:nvPr/>
+        </p:nvSpPr>
+        <p:spPr>
+          <a:xfrm>
+            <a:off x="4828032" y="1225296"/>
+            <a:ext cx="548640" cy="237744"/>
+          </a:xfrm>
+          <a:prstGeom prst="rect">
+            <a:avLst/>
+          </a:prstGeom>
+          <a:noFill/>
+          <a:ln/>
+        </p:spPr>
+        <p:txBody>
+          <a:bodyPr wrap="square" lIns="0" tIns="0" rIns="0" bIns="0" rtlCol="0" anchor="ctr"/>
+          <a:lstStyle/>
+          <a:p>
+            <a:pPr algn="ctr" indent="0" marL="0">
+              <a:buNone/>
+            </a:pPr>
+            <a:r>
+              <a:rPr lang="en-US" sz="950" b="1" dirty="0">
+                <a:solidFill>
+                  <a:srgbClr val="FEFAE0"/>
+                </a:solidFill>
+                <a:latin typeface="Georgia" pitchFamily="34" charset="0"/>
+                <a:ea typeface="Georgia" pitchFamily="34" charset="-122"/>
+                <a:cs typeface="Georgia" pitchFamily="34" charset="-120"/>
+              </a:rPr>
+              <a:t>D2</a:t>
+            </a:r>
+            <a:endParaRPr lang="en-US" sz="950" dirty="0"/>
+          </a:p>
+        </p:txBody>
+      </p:sp>
+      <p:sp>
+        <p:nvSpPr>
+          <p:cNvPr id="18" name="Text 14"/>
+          <p:cNvSpPr/>
+          <p:nvPr/>
+        </p:nvSpPr>
+        <p:spPr>
+          <a:xfrm>
+            <a:off x="5376672" y="1225296"/>
+            <a:ext cx="1499616" cy="237744"/>
           </a:xfrm>
           <a:prstGeom prst="rect">
             <a:avLst/>
@@ -4564,72 +4701,138 @@
             <a:pPr indent="0" marL="0">
               <a:buNone/>
             </a:pPr>
-            <a:endParaRPr lang="en-US" dirty="0"/>
-          </a:p>
-        </p:txBody>
-      </p:sp>
-      <p:sp>
-        <p:nvSpPr>
-          <p:cNvPr id="15" name="Text 11"/>
-          <p:cNvSpPr/>
-          <p:nvPr/>
-        </p:nvSpPr>
-        <p:spPr>
-          <a:xfrm>
-            <a:off x="4919472" y="3963067"/>
-            <a:ext cx="3657600" cy="914"/>
-          </a:xfrm>
-          <a:prstGeom prst="rect">
-            <a:avLst/>
-          </a:prstGeom>
-          <a:noFill/>
-          <a:ln/>
-        </p:spPr>
-        <p:txBody>
-          <a:bodyPr wrap="square" lIns="0" tIns="0" rIns="0" bIns="0" rtlCol="0" anchor="ctr"/>
-          <a:lstStyle/>
-          <a:p>
-            <a:pPr indent="0" marL="0">
-              <a:buNone/>
-            </a:pPr>
-            <a:endParaRPr lang="en-US" dirty="0"/>
-          </a:p>
-        </p:txBody>
-      </p:sp>
-      <p:sp>
-        <p:nvSpPr>
-          <p:cNvPr id="16" name="Text 12"/>
-          <p:cNvSpPr/>
-          <p:nvPr/>
-        </p:nvSpPr>
-        <p:spPr>
-          <a:xfrm>
-            <a:off x="566928" y="4036219"/>
-            <a:ext cx="4572000" cy="219456"/>
-          </a:xfrm>
-          <a:prstGeom prst="rect">
-            <a:avLst/>
-          </a:prstGeom>
-          <a:noFill/>
-          <a:ln/>
-        </p:spPr>
-        <p:txBody>
-          <a:bodyPr wrap="square" lIns="0" tIns="0" rIns="0" bIns="0" rtlCol="0" anchor="ctr"/>
-          <a:lstStyle/>
-          <a:p>
-            <a:pPr indent="0" marL="0">
-              <a:buNone/>
-            </a:pPr>
-            <a:r>
-              <a:rPr lang="en-US" sz="950" b="1" spc="120" kern="0" dirty="0">
-                <a:solidFill>
-                  <a:srgbClr val="283618"/>
+            <a:r>
+              <a:rPr lang="en-US" sz="750" b="1" spc="50" kern="0" dirty="0">
+                <a:solidFill>
+                  <a:srgbClr val="FEFAE0"/>
                 </a:solidFill>
                 <a:latin typeface="Calibri" pitchFamily="34" charset="0"/>
                 <a:ea typeface="Calibri" pitchFamily="34" charset="-122"/>
                 <a:cs typeface="Calibri" pitchFamily="34" charset="-120"/>
               </a:rPr>
-              <a:t>КОНТРОЛЬНЫЕ ТОЧКИ НА ЭКРАНЕ</a:t>
+              <a:t>ФОРМА ПРИЁМА (СТОЙКА)</a:t>
+            </a:r>
+            <a:endParaRPr lang="en-US" sz="750" dirty="0"/>
+          </a:p>
+        </p:txBody>
+      </p:sp>
+      <p:pic>
+        <p:nvPicPr>
+          <p:cNvPr id="19" name="Image 2" descr="screenshots/shelter-receive-empty.png">    </p:cNvPr>
+          <p:cNvPicPr>
+            <a:picLocks noChangeAspect="1"/>
+          </p:cNvPicPr>
+          <p:nvPr/>
+        </p:nvPicPr>
+        <p:blipFill>
+          <a:blip r:embed="rId3"/>
+          <a:stretch>
+            <a:fillRect/>
+          </a:stretch>
+        </p:blipFill>
+        <p:spPr>
+          <a:xfrm>
+            <a:off x="4901184" y="1481328"/>
+            <a:ext cx="1920240" cy="1350169"/>
+          </a:xfrm>
+          <a:prstGeom prst="rect">
+            <a:avLst/>
+          </a:prstGeom>
+        </p:spPr>
+      </p:pic>
+      <p:sp>
+        <p:nvSpPr>
+          <p:cNvPr id="20" name="Text 15"/>
+          <p:cNvSpPr/>
+          <p:nvPr/>
+        </p:nvSpPr>
+        <p:spPr>
+          <a:xfrm>
+            <a:off x="4846320" y="2868073"/>
+            <a:ext cx="2029968" cy="548640"/>
+          </a:xfrm>
+          <a:prstGeom prst="rect">
+            <a:avLst/>
+          </a:prstGeom>
+          <a:noFill/>
+          <a:ln/>
+        </p:spPr>
+        <p:txBody>
+          <a:bodyPr wrap="square" lIns="0" tIns="0" rIns="0" bIns="0" rtlCol="0" anchor="ctr"/>
+          <a:lstStyle/>
+          <a:p>
+            <a:pPr indent="0" marL="0">
+              <a:buNone/>
+            </a:pPr>
+            <a:r>
+              <a:rPr lang="en-US" sz="750" dirty="0">
+                <a:solidFill>
+                  <a:srgbClr val="606C38"/>
+                </a:solidFill>
+                <a:latin typeface="Calibri" pitchFamily="34" charset="0"/>
+                <a:ea typeface="Calibri" pitchFamily="34" charset="-122"/>
+                <a:cs typeface="Calibri" pitchFamily="34" charset="-120"/>
+              </a:rPr>
+              <a:t>Представитель приюта выбирает себя, вводит код и фактически доставленное количество.</a:t>
+            </a:r>
+            <a:endParaRPr lang="en-US" sz="750" dirty="0"/>
+          </a:p>
+        </p:txBody>
+      </p:sp>
+      <p:sp>
+        <p:nvSpPr>
+          <p:cNvPr id="21" name="Shape 16"/>
+          <p:cNvSpPr/>
+          <p:nvPr/>
+        </p:nvSpPr>
+        <p:spPr>
+          <a:xfrm>
+            <a:off x="6958584" y="1225296"/>
+            <a:ext cx="2066544" cy="237744"/>
+          </a:xfrm>
+          <a:prstGeom prst="rect">
+            <a:avLst/>
+          </a:prstGeom>
+          <a:solidFill>
+            <a:srgbClr val="606C38"/>
+          </a:solidFill>
+          <a:ln/>
+        </p:spPr>
+      </p:sp>
+      <p:sp>
+        <p:nvSpPr>
+          <p:cNvPr id="22" name="Text 17"/>
+          <p:cNvSpPr/>
+          <p:nvPr/>
+        </p:nvSpPr>
+        <p:spPr>
+          <a:xfrm>
+            <a:off x="6958584" y="1225296"/>
+            <a:ext cx="548640" cy="237744"/>
+          </a:xfrm>
+          <a:prstGeom prst="rect">
+            <a:avLst/>
+          </a:prstGeom>
+          <a:noFill/>
+          <a:ln/>
+        </p:spPr>
+        <p:txBody>
+          <a:bodyPr wrap="square" lIns="0" tIns="0" rIns="0" bIns="0" rtlCol="0" anchor="ctr"/>
+          <a:lstStyle/>
+          <a:p>
+            <a:pPr algn="ctr" indent="0" marL="0">
+              <a:buNone/>
+            </a:pPr>
+            <a:r>
+              <a:rPr lang="en-US" sz="950" b="1" dirty="0">
+                <a:solidFill>
+                  <a:srgbClr val="FEFAE0"/>
+                </a:solidFill>
+                <a:latin typeface="Georgia" pitchFamily="34" charset="0"/>
+                <a:ea typeface="Georgia" pitchFamily="34" charset="-122"/>
+                <a:cs typeface="Georgia" pitchFamily="34" charset="-120"/>
+              </a:rPr>
+              <a:t>D2</a:t>
             </a:r>
             <a:endParaRPr lang="en-US" sz="950" dirty="0"/>
           </a:p>
@@ -4637,14 +4840,194 @@
       </p:sp>
       <p:sp>
         <p:nvSpPr>
-          <p:cNvPr id="17" name="Shape 13"/>
-          <p:cNvSpPr/>
-          <p:nvPr/>
-        </p:nvSpPr>
-        <p:spPr>
-          <a:xfrm>
-            <a:off x="566928" y="4292251"/>
-            <a:ext cx="2066544" cy="530352"/>
+          <p:cNvPr id="23" name="Text 18"/>
+          <p:cNvSpPr/>
+          <p:nvPr/>
+        </p:nvSpPr>
+        <p:spPr>
+          <a:xfrm>
+            <a:off x="7507224" y="1225296"/>
+            <a:ext cx="1499616" cy="237744"/>
+          </a:xfrm>
+          <a:prstGeom prst="rect">
+            <a:avLst/>
+          </a:prstGeom>
+          <a:noFill/>
+          <a:ln/>
+        </p:spPr>
+        <p:txBody>
+          <a:bodyPr wrap="square" lIns="0" tIns="0" rIns="0" bIns="0" rtlCol="0" anchor="ctr"/>
+          <a:lstStyle/>
+          <a:p>
+            <a:pPr indent="0" marL="0">
+              <a:buNone/>
+            </a:pPr>
+            <a:r>
+              <a:rPr lang="en-US" sz="750" b="1" spc="50" kern="0" dirty="0">
+                <a:solidFill>
+                  <a:srgbClr val="FEFAE0"/>
+                </a:solidFill>
+                <a:latin typeface="Calibri" pitchFamily="34" charset="0"/>
+                <a:ea typeface="Calibri" pitchFamily="34" charset="-122"/>
+                <a:cs typeface="Calibri" pitchFamily="34" charset="-120"/>
+              </a:rPr>
+              <a:t>КАТАЛОГ ПОСЛЕ ПРИЁМКИ</a:t>
+            </a:r>
+            <a:endParaRPr lang="en-US" sz="750" dirty="0"/>
+          </a:p>
+        </p:txBody>
+      </p:sp>
+      <p:pic>
+        <p:nvPicPr>
+          <p:cNvPr id="24" name="Image 3" descr="screenshots/needs-catalog-d2.png">    </p:cNvPr>
+          <p:cNvPicPr>
+            <a:picLocks noChangeAspect="1"/>
+          </p:cNvPicPr>
+          <p:nvPr/>
+        </p:nvPicPr>
+        <p:blipFill>
+          <a:blip r:embed="rId4"/>
+          <a:stretch>
+            <a:fillRect/>
+          </a:stretch>
+        </p:blipFill>
+        <p:spPr>
+          <a:xfrm>
+            <a:off x="7031736" y="1481328"/>
+            <a:ext cx="1920240" cy="1350169"/>
+          </a:xfrm>
+          <a:prstGeom prst="rect">
+            <a:avLst/>
+          </a:prstGeom>
+        </p:spPr>
+      </p:pic>
+      <p:sp>
+        <p:nvSpPr>
+          <p:cNvPr id="25" name="Text 19"/>
+          <p:cNvSpPr/>
+          <p:nvPr/>
+        </p:nvSpPr>
+        <p:spPr>
+          <a:xfrm>
+            <a:off x="6976872" y="2868073"/>
+            <a:ext cx="2029968" cy="548640"/>
+          </a:xfrm>
+          <a:prstGeom prst="rect">
+            <a:avLst/>
+          </a:prstGeom>
+          <a:noFill/>
+          <a:ln/>
+        </p:spPr>
+        <p:txBody>
+          <a:bodyPr wrap="square" lIns="0" tIns="0" rIns="0" bIns="0" rtlCol="0" anchor="ctr"/>
+          <a:lstStyle/>
+          <a:p>
+            <a:pPr indent="0" marL="0">
+              <a:buNone/>
+            </a:pPr>
+            <a:r>
+              <a:rPr lang="en-US" sz="750" dirty="0">
+                <a:solidFill>
+                  <a:srgbClr val="606C38"/>
+                </a:solidFill>
+                <a:latin typeface="Calibri" pitchFamily="34" charset="0"/>
+                <a:ea typeface="Calibri" pitchFamily="34" charset="-122"/>
+                <a:cs typeface="Calibri" pitchFamily="34" charset="-120"/>
+              </a:rPr>
+              <a:t>Первая заявка перешла из «обещано» в «получено». Балансы пересчитаны.</a:t>
+            </a:r>
+            <a:endParaRPr lang="en-US" sz="750" dirty="0"/>
+          </a:p>
+        </p:txBody>
+      </p:sp>
+      <p:sp>
+        <p:nvSpPr>
+          <p:cNvPr id="26" name="Text 20"/>
+          <p:cNvSpPr/>
+          <p:nvPr/>
+        </p:nvSpPr>
+        <p:spPr>
+          <a:xfrm>
+            <a:off x="566928" y="3822192"/>
+            <a:ext cx="7315200" cy="219456"/>
+          </a:xfrm>
+          <a:prstGeom prst="rect">
+            <a:avLst/>
+          </a:prstGeom>
+          <a:noFill/>
+          <a:ln/>
+        </p:spPr>
+        <p:txBody>
+          <a:bodyPr wrap="square" lIns="0" tIns="0" rIns="0" bIns="0" rtlCol="0" anchor="ctr"/>
+          <a:lstStyle/>
+          <a:p>
+            <a:pPr indent="0" marL="0">
+              <a:buNone/>
+            </a:pPr>
+            <a:r>
+              <a:rPr lang="en-US" sz="950" b="1" spc="110" kern="0" dirty="0">
+                <a:solidFill>
+                  <a:srgbClr val="283618"/>
+                </a:solidFill>
+                <a:latin typeface="Calibri" pitchFamily="34" charset="0"/>
+                <a:ea typeface="Calibri" pitchFamily="34" charset="-122"/>
+                <a:cs typeface="Calibri" pitchFamily="34" charset="-120"/>
+              </a:rPr>
+              <a:t>КОНТРОЛЬНЫЕ ТОЧКИ ДЛЯ ПЕРВОЙ ПОТРЕБНОСТИ «СУХОЙ КОРМ ДЛЯ ВЗРОСЛЫХ СОБАК»</a:t>
+            </a:r>
+            <a:endParaRPr lang="en-US" sz="950" dirty="0"/>
+          </a:p>
+        </p:txBody>
+      </p:sp>
+      <p:sp>
+        <p:nvSpPr>
+          <p:cNvPr id="27" name="Text 21"/>
+          <p:cNvSpPr/>
+          <p:nvPr/>
+        </p:nvSpPr>
+        <p:spPr>
+          <a:xfrm>
+            <a:off x="566928" y="4078224"/>
+            <a:ext cx="3657600" cy="164592"/>
+          </a:xfrm>
+          <a:prstGeom prst="rect">
+            <a:avLst/>
+          </a:prstGeom>
+          <a:noFill/>
+          <a:ln/>
+        </p:spPr>
+        <p:txBody>
+          <a:bodyPr wrap="square" lIns="0" tIns="0" rIns="0" bIns="0" rtlCol="0" anchor="ctr"/>
+          <a:lstStyle/>
+          <a:p>
+            <a:pPr indent="0" marL="0">
+              <a:buNone/>
+            </a:pPr>
+            <a:r>
+              <a:rPr lang="en-US" sz="800" i="1" dirty="0">
+                <a:solidFill>
+                  <a:srgbClr val="606C38"/>
+                </a:solidFill>
+                <a:latin typeface="Calibri" pitchFamily="34" charset="0"/>
+                <a:ea typeface="Calibri" pitchFamily="34" charset="-122"/>
+                <a:cs typeface="Calibri" pitchFamily="34" charset="-120"/>
+              </a:rPr>
+              <a:t>требуется / обещано / получено / свободно</a:t>
+            </a:r>
+            <a:endParaRPr lang="en-US" sz="800" dirty="0"/>
+          </a:p>
+        </p:txBody>
+      </p:sp>
+      <p:sp>
+        <p:nvSpPr>
+          <p:cNvPr id="28" name="Shape 22"/>
+          <p:cNvSpPr/>
+          <p:nvPr/>
+        </p:nvSpPr>
+        <p:spPr>
+          <a:xfrm>
+            <a:off x="566928" y="4279392"/>
+            <a:ext cx="2066544" cy="384048"/>
           </a:xfrm>
           <a:prstGeom prst="rect">
             <a:avLst/>
@@ -4657,14 +5040,14 @@
       </p:sp>
       <p:sp>
         <p:nvSpPr>
-          <p:cNvPr id="18" name="Shape 14"/>
-          <p:cNvSpPr/>
-          <p:nvPr/>
-        </p:nvSpPr>
-        <p:spPr>
-          <a:xfrm>
-            <a:off x="566928" y="4292251"/>
-            <a:ext cx="402336" cy="530352"/>
+          <p:cNvPr id="29" name="Shape 23"/>
+          <p:cNvSpPr/>
+          <p:nvPr/>
+        </p:nvSpPr>
+        <p:spPr>
+          <a:xfrm>
+            <a:off x="566928" y="4279392"/>
+            <a:ext cx="402336" cy="384048"/>
           </a:xfrm>
           <a:prstGeom prst="rect">
             <a:avLst/>
@@ -4677,14 +5060,14 @@
       </p:sp>
       <p:sp>
         <p:nvSpPr>
-          <p:cNvPr id="19" name="Text 15"/>
-          <p:cNvSpPr/>
-          <p:nvPr/>
-        </p:nvSpPr>
-        <p:spPr>
-          <a:xfrm>
-            <a:off x="566928" y="4292251"/>
-            <a:ext cx="402336" cy="530352"/>
+          <p:cNvPr id="30" name="Text 24"/>
+          <p:cNvSpPr/>
+          <p:nvPr/>
+        </p:nvSpPr>
+        <p:spPr>
+          <a:xfrm>
+            <a:off x="566928" y="4279392"/>
+            <a:ext cx="402336" cy="384048"/>
           </a:xfrm>
           <a:prstGeom prst="rect">
             <a:avLst/>
@@ -4700,7 +5083,7 @@
               <a:buNone/>
             </a:pPr>
             <a:r>
-              <a:rPr lang="en-US" sz="1300" b="1" dirty="0">
+              <a:rPr lang="en-US" sz="1400" b="1" dirty="0">
                 <a:solidFill>
                   <a:srgbClr val="FEFAE0"/>
                 </a:solidFill>
@@ -4710,20 +5093,20 @@
               </a:rPr>
               <a:t>D0</a:t>
             </a:r>
-            <a:endParaRPr lang="en-US" sz="1300" dirty="0"/>
-          </a:p>
-        </p:txBody>
-      </p:sp>
-      <p:sp>
-        <p:nvSpPr>
-          <p:cNvPr id="20" name="Text 16"/>
-          <p:cNvSpPr/>
-          <p:nvPr/>
-        </p:nvSpPr>
-        <p:spPr>
-          <a:xfrm>
-            <a:off x="1042416" y="4337971"/>
-            <a:ext cx="1554480" cy="164592"/>
+            <a:endParaRPr lang="en-US" sz="1400" dirty="0"/>
+          </a:p>
+        </p:txBody>
+      </p:sp>
+      <p:sp>
+        <p:nvSpPr>
+          <p:cNvPr id="31" name="Text 25"/>
+          <p:cNvSpPr/>
+          <p:nvPr/>
+        </p:nvSpPr>
+        <p:spPr>
+          <a:xfrm>
+            <a:off x="1042416" y="4325112"/>
+            <a:ext cx="1554480" cy="292608"/>
           </a:xfrm>
           <a:prstGeom prst="rect">
             <a:avLst/>
@@ -4739,7 +5122,282 @@
               <a:buNone/>
             </a:pPr>
             <a:r>
-              <a:rPr lang="en-US" sz="700" dirty="0">
+              <a:rPr lang="en-US" sz="1350" b="1" dirty="0">
+                <a:solidFill>
+                  <a:srgbClr val="283618"/>
+                </a:solidFill>
+                <a:latin typeface="Georgia" pitchFamily="34" charset="0"/>
+                <a:ea typeface="Georgia" pitchFamily="34" charset="-122"/>
+                <a:cs typeface="Georgia" pitchFamily="34" charset="-120"/>
+              </a:rPr>
+              <a:t>50 / 0 / 0 / 50</a:t>
+            </a:r>
+            <a:endParaRPr lang="en-US" sz="1350" dirty="0"/>
+          </a:p>
+        </p:txBody>
+      </p:sp>
+      <p:sp>
+        <p:nvSpPr>
+          <p:cNvPr id="32" name="Shape 26"/>
+          <p:cNvSpPr/>
+          <p:nvPr/>
+        </p:nvSpPr>
+        <p:spPr>
+          <a:xfrm>
+            <a:off x="2816352" y="4279392"/>
+            <a:ext cx="2066544" cy="384048"/>
+          </a:xfrm>
+          <a:prstGeom prst="rect">
+            <a:avLst/>
+          </a:prstGeom>
+          <a:solidFill>
+            <a:srgbClr val="DDA15E"/>
+          </a:solidFill>
+          <a:ln/>
+        </p:spPr>
+      </p:sp>
+      <p:sp>
+        <p:nvSpPr>
+          <p:cNvPr id="33" name="Shape 27"/>
+          <p:cNvSpPr/>
+          <p:nvPr/>
+        </p:nvSpPr>
+        <p:spPr>
+          <a:xfrm>
+            <a:off x="2816352" y="4279392"/>
+            <a:ext cx="402336" cy="384048"/>
+          </a:xfrm>
+          <a:prstGeom prst="rect">
+            <a:avLst/>
+          </a:prstGeom>
+          <a:solidFill>
+            <a:srgbClr val="283618"/>
+          </a:solidFill>
+          <a:ln/>
+        </p:spPr>
+      </p:sp>
+      <p:sp>
+        <p:nvSpPr>
+          <p:cNvPr id="34" name="Text 28"/>
+          <p:cNvSpPr/>
+          <p:nvPr/>
+        </p:nvSpPr>
+        <p:spPr>
+          <a:xfrm>
+            <a:off x="2816352" y="4279392"/>
+            <a:ext cx="402336" cy="384048"/>
+          </a:xfrm>
+          <a:prstGeom prst="rect">
+            <a:avLst/>
+          </a:prstGeom>
+          <a:noFill/>
+          <a:ln/>
+        </p:spPr>
+        <p:txBody>
+          <a:bodyPr wrap="square" lIns="0" tIns="0" rIns="0" bIns="0" rtlCol="0" anchor="ctr"/>
+          <a:lstStyle/>
+          <a:p>
+            <a:pPr algn="ctr" indent="0" marL="0">
+              <a:buNone/>
+            </a:pPr>
+            <a:r>
+              <a:rPr lang="en-US" sz="1400" b="1" dirty="0">
+                <a:solidFill>
+                  <a:srgbClr val="FEFAE0"/>
+                </a:solidFill>
+                <a:latin typeface="Georgia" pitchFamily="34" charset="0"/>
+                <a:ea typeface="Georgia" pitchFamily="34" charset="-122"/>
+                <a:cs typeface="Georgia" pitchFamily="34" charset="-120"/>
+              </a:rPr>
+              <a:t>D1</a:t>
+            </a:r>
+            <a:endParaRPr lang="en-US" sz="1400" dirty="0"/>
+          </a:p>
+        </p:txBody>
+      </p:sp>
+      <p:sp>
+        <p:nvSpPr>
+          <p:cNvPr id="35" name="Text 29"/>
+          <p:cNvSpPr/>
+          <p:nvPr/>
+        </p:nvSpPr>
+        <p:spPr>
+          <a:xfrm>
+            <a:off x="3291840" y="4325112"/>
+            <a:ext cx="1554480" cy="292608"/>
+          </a:xfrm>
+          <a:prstGeom prst="rect">
+            <a:avLst/>
+          </a:prstGeom>
+          <a:noFill/>
+          <a:ln/>
+        </p:spPr>
+        <p:txBody>
+          <a:bodyPr wrap="square" lIns="0" tIns="0" rIns="0" bIns="0" rtlCol="0" anchor="ctr"/>
+          <a:lstStyle/>
+          <a:p>
+            <a:pPr indent="0" marL="0">
+              <a:buNone/>
+            </a:pPr>
+            <a:r>
+              <a:rPr lang="en-US" sz="1350" b="1" dirty="0">
+                <a:solidFill>
+                  <a:srgbClr val="283618"/>
+                </a:solidFill>
+                <a:latin typeface="Georgia" pitchFamily="34" charset="0"/>
+                <a:ea typeface="Georgia" pitchFamily="34" charset="-122"/>
+                <a:cs typeface="Georgia" pitchFamily="34" charset="-120"/>
+              </a:rPr>
+              <a:t>50 / 5 / 0 / 45</a:t>
+            </a:r>
+            <a:endParaRPr lang="en-US" sz="1350" dirty="0"/>
+          </a:p>
+        </p:txBody>
+      </p:sp>
+      <p:sp>
+        <p:nvSpPr>
+          <p:cNvPr id="36" name="Shape 30"/>
+          <p:cNvSpPr/>
+          <p:nvPr/>
+        </p:nvSpPr>
+        <p:spPr>
+          <a:xfrm>
+            <a:off x="5065776" y="4279392"/>
+            <a:ext cx="2066544" cy="384048"/>
+          </a:xfrm>
+          <a:prstGeom prst="rect">
+            <a:avLst/>
+          </a:prstGeom>
+          <a:solidFill>
+            <a:srgbClr val="DDA15E"/>
+          </a:solidFill>
+          <a:ln/>
+        </p:spPr>
+      </p:sp>
+      <p:sp>
+        <p:nvSpPr>
+          <p:cNvPr id="37" name="Shape 31"/>
+          <p:cNvSpPr/>
+          <p:nvPr/>
+        </p:nvSpPr>
+        <p:spPr>
+          <a:xfrm>
+            <a:off x="5065776" y="4279392"/>
+            <a:ext cx="402336" cy="384048"/>
+          </a:xfrm>
+          <a:prstGeom prst="rect">
+            <a:avLst/>
+          </a:prstGeom>
+          <a:solidFill>
+            <a:srgbClr val="283618"/>
+          </a:solidFill>
+          <a:ln/>
+        </p:spPr>
+      </p:sp>
+      <p:sp>
+        <p:nvSpPr>
+          <p:cNvPr id="38" name="Text 32"/>
+          <p:cNvSpPr/>
+          <p:nvPr/>
+        </p:nvSpPr>
+        <p:spPr>
+          <a:xfrm>
+            <a:off x="5065776" y="4279392"/>
+            <a:ext cx="402336" cy="384048"/>
+          </a:xfrm>
+          <a:prstGeom prst="rect">
+            <a:avLst/>
+          </a:prstGeom>
+          <a:noFill/>
+          <a:ln/>
+        </p:spPr>
+        <p:txBody>
+          <a:bodyPr wrap="square" lIns="0" tIns="0" rIns="0" bIns="0" rtlCol="0" anchor="ctr"/>
+          <a:lstStyle/>
+          <a:p>
+            <a:pPr algn="ctr" indent="0" marL="0">
+              <a:buNone/>
+            </a:pPr>
+            <a:r>
+              <a:rPr lang="en-US" sz="1400" b="1" dirty="0">
+                <a:solidFill>
+                  <a:srgbClr val="FEFAE0"/>
+                </a:solidFill>
+                <a:latin typeface="Georgia" pitchFamily="34" charset="0"/>
+                <a:ea typeface="Georgia" pitchFamily="34" charset="-122"/>
+                <a:cs typeface="Georgia" pitchFamily="34" charset="-120"/>
+              </a:rPr>
+              <a:t>D2</a:t>
+            </a:r>
+            <a:endParaRPr lang="en-US" sz="1400" dirty="0"/>
+          </a:p>
+        </p:txBody>
+      </p:sp>
+      <p:sp>
+        <p:nvSpPr>
+          <p:cNvPr id="39" name="Text 33"/>
+          <p:cNvSpPr/>
+          <p:nvPr/>
+        </p:nvSpPr>
+        <p:spPr>
+          <a:xfrm>
+            <a:off x="5541264" y="4325112"/>
+            <a:ext cx="1554480" cy="292608"/>
+          </a:xfrm>
+          <a:prstGeom prst="rect">
+            <a:avLst/>
+          </a:prstGeom>
+          <a:noFill/>
+          <a:ln/>
+        </p:spPr>
+        <p:txBody>
+          <a:bodyPr wrap="square" lIns="0" tIns="0" rIns="0" bIns="0" rtlCol="0" anchor="ctr"/>
+          <a:lstStyle/>
+          <a:p>
+            <a:pPr indent="0" marL="0">
+              <a:buNone/>
+            </a:pPr>
+            <a:r>
+              <a:rPr lang="en-US" sz="1350" b="1" dirty="0">
+                <a:solidFill>
+                  <a:srgbClr val="283618"/>
+                </a:solidFill>
+                <a:latin typeface="Georgia" pitchFamily="34" charset="0"/>
+                <a:ea typeface="Georgia" pitchFamily="34" charset="-122"/>
+                <a:cs typeface="Georgia" pitchFamily="34" charset="-120"/>
+              </a:rPr>
+              <a:t>50 / 0 / 5 / 45</a:t>
+            </a:r>
+            <a:endParaRPr lang="en-US" sz="1350" dirty="0"/>
+          </a:p>
+        </p:txBody>
+      </p:sp>
+      <p:sp>
+        <p:nvSpPr>
+          <p:cNvPr id="40" name="Text 34"/>
+          <p:cNvSpPr/>
+          <p:nvPr/>
+        </p:nvSpPr>
+        <p:spPr>
+          <a:xfrm>
+            <a:off x="7315200" y="4279392"/>
+            <a:ext cx="1700784" cy="548640"/>
+          </a:xfrm>
+          <a:prstGeom prst="rect">
+            <a:avLst/>
+          </a:prstGeom>
+          <a:noFill/>
+          <a:ln/>
+        </p:spPr>
+        <p:txBody>
+          <a:bodyPr wrap="square" lIns="0" tIns="0" rIns="0" bIns="0" rtlCol="0" anchor="ctr"/>
+          <a:lstStyle/>
+          <a:p>
+            <a:pPr indent="0" marL="0">
+              <a:buNone/>
+            </a:pPr>
+            <a:r>
+              <a:rPr lang="en-US" sz="850" i="1" dirty="0">
                 <a:solidFill>
                   <a:srgbClr val="606C38"/>
                 </a:solidFill>
@@ -4747,401 +5405,9 @@
                 <a:ea typeface="Calibri" pitchFamily="34" charset="-122"/>
                 <a:cs typeface="Calibri" pitchFamily="34" charset="-120"/>
               </a:rPr>
-              <a:t>требуется / обещано / получено / свободно</a:t>
-            </a:r>
-            <a:endParaRPr lang="en-US" sz="700" dirty="0"/>
-          </a:p>
-        </p:txBody>
-      </p:sp>
-      <p:sp>
-        <p:nvSpPr>
-          <p:cNvPr id="21" name="Text 17"/>
-          <p:cNvSpPr/>
-          <p:nvPr/>
-        </p:nvSpPr>
-        <p:spPr>
-          <a:xfrm>
-            <a:off x="1042416" y="4502563"/>
-            <a:ext cx="1554480" cy="274320"/>
-          </a:xfrm>
-          <a:prstGeom prst="rect">
-            <a:avLst/>
-          </a:prstGeom>
-          <a:noFill/>
-          <a:ln/>
-        </p:spPr>
-        <p:txBody>
-          <a:bodyPr wrap="square" lIns="0" tIns="0" rIns="0" bIns="0" rtlCol="0" anchor="ctr"/>
-          <a:lstStyle/>
-          <a:p>
-            <a:pPr indent="0" marL="0">
-              <a:buNone/>
-            </a:pPr>
-            <a:r>
-              <a:rPr lang="en-US" sz="1350" b="1" dirty="0">
-                <a:solidFill>
-                  <a:srgbClr val="283618"/>
-                </a:solidFill>
-                <a:latin typeface="Georgia" pitchFamily="34" charset="0"/>
-                <a:ea typeface="Georgia" pitchFamily="34" charset="-122"/>
-                <a:cs typeface="Georgia" pitchFamily="34" charset="-120"/>
-              </a:rPr>
-              <a:t>20 / 0 / 0 / 20</a:t>
-            </a:r>
-            <a:endParaRPr lang="en-US" sz="1350" dirty="0"/>
-          </a:p>
-        </p:txBody>
-      </p:sp>
-      <p:sp>
-        <p:nvSpPr>
-          <p:cNvPr id="22" name="Shape 18"/>
-          <p:cNvSpPr/>
-          <p:nvPr/>
-        </p:nvSpPr>
-        <p:spPr>
-          <a:xfrm>
-            <a:off x="2816352" y="4292251"/>
-            <a:ext cx="2066544" cy="530352"/>
-          </a:xfrm>
-          <a:prstGeom prst="rect">
-            <a:avLst/>
-          </a:prstGeom>
-          <a:solidFill>
-            <a:srgbClr val="DDA15E"/>
-          </a:solidFill>
-          <a:ln/>
-        </p:spPr>
-      </p:sp>
-      <p:sp>
-        <p:nvSpPr>
-          <p:cNvPr id="23" name="Shape 19"/>
-          <p:cNvSpPr/>
-          <p:nvPr/>
-        </p:nvSpPr>
-        <p:spPr>
-          <a:xfrm>
-            <a:off x="2816352" y="4292251"/>
-            <a:ext cx="402336" cy="530352"/>
-          </a:xfrm>
-          <a:prstGeom prst="rect">
-            <a:avLst/>
-          </a:prstGeom>
-          <a:solidFill>
-            <a:srgbClr val="283618"/>
-          </a:solidFill>
-          <a:ln/>
-        </p:spPr>
-      </p:sp>
-      <p:sp>
-        <p:nvSpPr>
-          <p:cNvPr id="24" name="Text 20"/>
-          <p:cNvSpPr/>
-          <p:nvPr/>
-        </p:nvSpPr>
-        <p:spPr>
-          <a:xfrm>
-            <a:off x="2816352" y="4292251"/>
-            <a:ext cx="402336" cy="530352"/>
-          </a:xfrm>
-          <a:prstGeom prst="rect">
-            <a:avLst/>
-          </a:prstGeom>
-          <a:noFill/>
-          <a:ln/>
-        </p:spPr>
-        <p:txBody>
-          <a:bodyPr wrap="square" lIns="0" tIns="0" rIns="0" bIns="0" rtlCol="0" anchor="ctr"/>
-          <a:lstStyle/>
-          <a:p>
-            <a:pPr algn="ctr" indent="0" marL="0">
-              <a:buNone/>
-            </a:pPr>
-            <a:r>
-              <a:rPr lang="en-US" sz="1300" b="1" dirty="0">
-                <a:solidFill>
-                  <a:srgbClr val="FEFAE0"/>
-                </a:solidFill>
-                <a:latin typeface="Georgia" pitchFamily="34" charset="0"/>
-                <a:ea typeface="Georgia" pitchFamily="34" charset="-122"/>
-                <a:cs typeface="Georgia" pitchFamily="34" charset="-120"/>
-              </a:rPr>
-              <a:t>D1</a:t>
-            </a:r>
-            <a:endParaRPr lang="en-US" sz="1300" dirty="0"/>
-          </a:p>
-        </p:txBody>
-      </p:sp>
-      <p:sp>
-        <p:nvSpPr>
-          <p:cNvPr id="25" name="Text 21"/>
-          <p:cNvSpPr/>
-          <p:nvPr/>
-        </p:nvSpPr>
-        <p:spPr>
-          <a:xfrm>
-            <a:off x="3291840" y="4337971"/>
-            <a:ext cx="1554480" cy="164592"/>
-          </a:xfrm>
-          <a:prstGeom prst="rect">
-            <a:avLst/>
-          </a:prstGeom>
-          <a:noFill/>
-          <a:ln/>
-        </p:spPr>
-        <p:txBody>
-          <a:bodyPr wrap="square" lIns="0" tIns="0" rIns="0" bIns="0" rtlCol="0" anchor="ctr"/>
-          <a:lstStyle/>
-          <a:p>
-            <a:pPr indent="0" marL="0">
-              <a:buNone/>
-            </a:pPr>
-            <a:r>
-              <a:rPr lang="en-US" sz="700" dirty="0">
-                <a:solidFill>
-                  <a:srgbClr val="606C38"/>
-                </a:solidFill>
-                <a:latin typeface="Calibri" pitchFamily="34" charset="0"/>
-                <a:ea typeface="Calibri" pitchFamily="34" charset="-122"/>
-                <a:cs typeface="Calibri" pitchFamily="34" charset="-120"/>
-              </a:rPr>
-              <a:t>требуется / обещано / получено / свободно</a:t>
-            </a:r>
-            <a:endParaRPr lang="en-US" sz="700" dirty="0"/>
-          </a:p>
-        </p:txBody>
-      </p:sp>
-      <p:sp>
-        <p:nvSpPr>
-          <p:cNvPr id="26" name="Text 22"/>
-          <p:cNvSpPr/>
-          <p:nvPr/>
-        </p:nvSpPr>
-        <p:spPr>
-          <a:xfrm>
-            <a:off x="3291840" y="4502563"/>
-            <a:ext cx="1554480" cy="274320"/>
-          </a:xfrm>
-          <a:prstGeom prst="rect">
-            <a:avLst/>
-          </a:prstGeom>
-          <a:noFill/>
-          <a:ln/>
-        </p:spPr>
-        <p:txBody>
-          <a:bodyPr wrap="square" lIns="0" tIns="0" rIns="0" bIns="0" rtlCol="0" anchor="ctr"/>
-          <a:lstStyle/>
-          <a:p>
-            <a:pPr indent="0" marL="0">
-              <a:buNone/>
-            </a:pPr>
-            <a:r>
-              <a:rPr lang="en-US" sz="1350" b="1" dirty="0">
-                <a:solidFill>
-                  <a:srgbClr val="283618"/>
-                </a:solidFill>
-                <a:latin typeface="Georgia" pitchFamily="34" charset="0"/>
-                <a:ea typeface="Georgia" pitchFamily="34" charset="-122"/>
-                <a:cs typeface="Georgia" pitchFamily="34" charset="-120"/>
-              </a:rPr>
-              <a:t>20 / 5 / 0 / 15</a:t>
-            </a:r>
-            <a:endParaRPr lang="en-US" sz="1350" dirty="0"/>
-          </a:p>
-        </p:txBody>
-      </p:sp>
-      <p:sp>
-        <p:nvSpPr>
-          <p:cNvPr id="27" name="Shape 23"/>
-          <p:cNvSpPr/>
-          <p:nvPr/>
-        </p:nvSpPr>
-        <p:spPr>
-          <a:xfrm>
-            <a:off x="5065776" y="4292251"/>
-            <a:ext cx="2066544" cy="530352"/>
-          </a:xfrm>
-          <a:prstGeom prst="rect">
-            <a:avLst/>
-          </a:prstGeom>
-          <a:solidFill>
-            <a:srgbClr val="DDA15E"/>
-          </a:solidFill>
-          <a:ln/>
-        </p:spPr>
-      </p:sp>
-      <p:sp>
-        <p:nvSpPr>
-          <p:cNvPr id="28" name="Shape 24"/>
-          <p:cNvSpPr/>
-          <p:nvPr/>
-        </p:nvSpPr>
-        <p:spPr>
-          <a:xfrm>
-            <a:off x="5065776" y="4292251"/>
-            <a:ext cx="402336" cy="530352"/>
-          </a:xfrm>
-          <a:prstGeom prst="rect">
-            <a:avLst/>
-          </a:prstGeom>
-          <a:solidFill>
-            <a:srgbClr val="283618"/>
-          </a:solidFill>
-          <a:ln/>
-        </p:spPr>
-      </p:sp>
-      <p:sp>
-        <p:nvSpPr>
-          <p:cNvPr id="29" name="Text 25"/>
-          <p:cNvSpPr/>
-          <p:nvPr/>
-        </p:nvSpPr>
-        <p:spPr>
-          <a:xfrm>
-            <a:off x="5065776" y="4292251"/>
-            <a:ext cx="402336" cy="530352"/>
-          </a:xfrm>
-          <a:prstGeom prst="rect">
-            <a:avLst/>
-          </a:prstGeom>
-          <a:noFill/>
-          <a:ln/>
-        </p:spPr>
-        <p:txBody>
-          <a:bodyPr wrap="square" lIns="0" tIns="0" rIns="0" bIns="0" rtlCol="0" anchor="ctr"/>
-          <a:lstStyle/>
-          <a:p>
-            <a:pPr algn="ctr" indent="0" marL="0">
-              <a:buNone/>
-            </a:pPr>
-            <a:r>
-              <a:rPr lang="en-US" sz="1300" b="1" dirty="0">
-                <a:solidFill>
-                  <a:srgbClr val="FEFAE0"/>
-                </a:solidFill>
-                <a:latin typeface="Georgia" pitchFamily="34" charset="0"/>
-                <a:ea typeface="Georgia" pitchFamily="34" charset="-122"/>
-                <a:cs typeface="Georgia" pitchFamily="34" charset="-120"/>
-              </a:rPr>
-              <a:t>D2</a:t>
-            </a:r>
-            <a:endParaRPr lang="en-US" sz="1300" dirty="0"/>
-          </a:p>
-        </p:txBody>
-      </p:sp>
-      <p:sp>
-        <p:nvSpPr>
-          <p:cNvPr id="30" name="Text 26"/>
-          <p:cNvSpPr/>
-          <p:nvPr/>
-        </p:nvSpPr>
-        <p:spPr>
-          <a:xfrm>
-            <a:off x="5541264" y="4337971"/>
-            <a:ext cx="1554480" cy="164592"/>
-          </a:xfrm>
-          <a:prstGeom prst="rect">
-            <a:avLst/>
-          </a:prstGeom>
-          <a:noFill/>
-          <a:ln/>
-        </p:spPr>
-        <p:txBody>
-          <a:bodyPr wrap="square" lIns="0" tIns="0" rIns="0" bIns="0" rtlCol="0" anchor="ctr"/>
-          <a:lstStyle/>
-          <a:p>
-            <a:pPr indent="0" marL="0">
-              <a:buNone/>
-            </a:pPr>
-            <a:r>
-              <a:rPr lang="en-US" sz="700" dirty="0">
-                <a:solidFill>
-                  <a:srgbClr val="606C38"/>
-                </a:solidFill>
-                <a:latin typeface="Calibri" pitchFamily="34" charset="0"/>
-                <a:ea typeface="Calibri" pitchFamily="34" charset="-122"/>
-                <a:cs typeface="Calibri" pitchFamily="34" charset="-120"/>
-              </a:rPr>
-              <a:t>требуется / обещано / получено / свободно</a:t>
-            </a:r>
-            <a:endParaRPr lang="en-US" sz="700" dirty="0"/>
-          </a:p>
-        </p:txBody>
-      </p:sp>
-      <p:sp>
-        <p:nvSpPr>
-          <p:cNvPr id="31" name="Text 27"/>
-          <p:cNvSpPr/>
-          <p:nvPr/>
-        </p:nvSpPr>
-        <p:spPr>
-          <a:xfrm>
-            <a:off x="5541264" y="4502563"/>
-            <a:ext cx="1554480" cy="274320"/>
-          </a:xfrm>
-          <a:prstGeom prst="rect">
-            <a:avLst/>
-          </a:prstGeom>
-          <a:noFill/>
-          <a:ln/>
-        </p:spPr>
-        <p:txBody>
-          <a:bodyPr wrap="square" lIns="0" tIns="0" rIns="0" bIns="0" rtlCol="0" anchor="ctr"/>
-          <a:lstStyle/>
-          <a:p>
-            <a:pPr indent="0" marL="0">
-              <a:buNone/>
-            </a:pPr>
-            <a:r>
-              <a:rPr lang="en-US" sz="1350" b="1" dirty="0">
-                <a:solidFill>
-                  <a:srgbClr val="283618"/>
-                </a:solidFill>
-                <a:latin typeface="Georgia" pitchFamily="34" charset="0"/>
-                <a:ea typeface="Georgia" pitchFamily="34" charset="-122"/>
-                <a:cs typeface="Georgia" pitchFamily="34" charset="-120"/>
-              </a:rPr>
-              <a:t>20 / 0 / 3 / 17</a:t>
-            </a:r>
-            <a:endParaRPr lang="en-US" sz="1350" dirty="0"/>
-          </a:p>
-        </p:txBody>
-      </p:sp>
-      <p:sp>
-        <p:nvSpPr>
-          <p:cNvPr id="32" name="Text 28"/>
-          <p:cNvSpPr/>
-          <p:nvPr/>
-        </p:nvSpPr>
-        <p:spPr>
-          <a:xfrm>
-            <a:off x="7315200" y="4292251"/>
-            <a:ext cx="1280160" cy="530352"/>
-          </a:xfrm>
-          <a:prstGeom prst="rect">
-            <a:avLst/>
-          </a:prstGeom>
-          <a:noFill/>
-          <a:ln/>
-        </p:spPr>
-        <p:txBody>
-          <a:bodyPr wrap="square" lIns="0" tIns="0" rIns="0" bIns="0" rtlCol="0" anchor="ctr"/>
-          <a:lstStyle/>
-          <a:p>
-            <a:pPr indent="0" marL="0">
-              <a:buNone/>
-            </a:pPr>
-            <a:r>
-              <a:rPr lang="en-US" sz="800" dirty="0">
-                <a:solidFill>
-                  <a:srgbClr val="606C38"/>
-                </a:solidFill>
-                <a:latin typeface="Calibri" pitchFamily="34" charset="0"/>
-                <a:ea typeface="Calibri" pitchFamily="34" charset="-122"/>
-                <a:cs typeface="Calibri" pitchFamily="34" charset="-120"/>
-              </a:rPr>
-              <a:t>После D2 обновить публичную страницу -- это и есть доказательство, что данные сохранились.</a:t>
-            </a:r>
-            <a:endParaRPr lang="en-US" sz="800" dirty="0"/>
+              <a:t>Числа в полосе получены из `need_balances` — таблица не хранит счётчики, она их каждый раз считает.</a:t>
+            </a:r>
+            <a:endParaRPr lang="en-US" sz="850" dirty="0"/>
           </a:p>
         </p:txBody>
       </p:sp>

--- a/slides/output/lapa-ryadom-pitch.pptx
+++ b/slides/output/lapa-ryadom-pitch.pptx
@@ -4290,7 +4290,7 @@
                 <a:ea typeface="Calibri" pitchFamily="34" charset="-122"/>
                 <a:cs typeface="Calibri" pitchFamily="34" charset="-120"/>
               </a:rPr>
-              <a:t>Четыре кадра одного и того же приложения. Слева направо: исходное состояние D0, каталог после трёх заявок D1, форма приёма на стойке приюта D2, и каталог после приёмки D2.</a:t>
+              <a:t>Четыре кадра одного и того же приложения. Слева направо: исходное состояние D0, каталог после трёх заявок D1, вход на стойку приюта D2, и каталог после приёмки D2.</a:t>
             </a:r>
             <a:endParaRPr lang="en-US" sz="1200" dirty="0"/>
           </a:p>
@@ -4710,7 +4710,7 @@
                 <a:ea typeface="Calibri" pitchFamily="34" charset="-122"/>
                 <a:cs typeface="Calibri" pitchFamily="34" charset="-120"/>
               </a:rPr>
-              <a:t>ФОРМА ПРИЁМА (СТОЙКА)</a:t>
+              <a:t>СТОЙКА ПРИЮТА — ВХОД ПО ЛОГИНУ</a:t>
             </a:r>
             <a:endParaRPr lang="en-US" sz="750" dirty="0"/>
           </a:p>
@@ -4718,7 +4718,7 @@
       </p:sp>
       <p:pic>
         <p:nvPicPr>
-          <p:cNvPr id="19" name="Image 2" descr="screenshots/shelter-receive-empty.png">    </p:cNvPr>
+          <p:cNvPr id="19" name="Image 2" descr="screenshots/login-page.png">    </p:cNvPr>
           <p:cNvPicPr>
             <a:picLocks noChangeAspect="1"/>
           </p:cNvPicPr>
@@ -4773,7 +4773,7 @@
                 <a:ea typeface="Calibri" pitchFamily="34" charset="-122"/>
                 <a:cs typeface="Calibri" pitchFamily="34" charset="-120"/>
               </a:rPr>
-              <a:t>Представитель приюта выбирает себя, вводит код и фактически доставленное количество.</a:t>
+              <a:t>Стойка приюта: только представитель приюта заходит (логин + пароль). Дарители делают заявки без регистрации.</a:t>
             </a:r>
             <a:endParaRPr lang="en-US" sz="750" dirty="0"/>
           </a:p>

--- a/slides/output/lapa-ryadom-pitch.pptx
+++ b/slides/output/lapa-ryadom-pitch.pptx
@@ -4251,7 +4251,7 @@
                 <a:ea typeface="Georgia" pitchFamily="34" charset="-122"/>
                 <a:cs typeface="Georgia" pitchFamily="34" charset="-120"/>
               </a:rPr>
-              <a:t>Живая демонстрация</a:t>
+              <a:t>От заявки до приёмки</a:t>
             </a:r>
             <a:endParaRPr lang="en-US" sz="2600" dirty="0"/>
           </a:p>
@@ -4388,7 +4388,7 @@
                 <a:ea typeface="Calibri" pitchFamily="34" charset="-122"/>
                 <a:cs typeface="Calibri" pitchFamily="34" charset="-120"/>
               </a:rPr>
-              <a:t>КАРТОЧКИ ВНУТРЕННЕЙ ПАНЕЛИ</a:t>
+              <a:t>КАТАЛОГ — СТАРТОВОЕ СОСТОЯНИЕ</a:t>
             </a:r>
             <a:endParaRPr lang="en-US" sz="750" dirty="0"/>
           </a:p>
@@ -4934,7 +4934,7 @@
                 <a:ea typeface="Calibri" pitchFamily="34" charset="-122"/>
                 <a:cs typeface="Calibri" pitchFamily="34" charset="-120"/>
               </a:rPr>
-              <a:t>Первая заявка перешла из «обещано» в «получено». Балансы пересчитаны.</a:t>
+              <a:t>Принято 3 из 5. Две непривезённые упаковки сразу вернулись в свободный остаток.</a:t>
             </a:r>
             <a:endParaRPr lang="en-US" sz="750" dirty="0"/>
           </a:p>
@@ -4942,30 +4942,50 @@
       </p:sp>
       <p:sp>
         <p:nvSpPr>
-          <p:cNvPr id="26" name="Text 20"/>
-          <p:cNvSpPr/>
-          <p:nvPr/>
-        </p:nvSpPr>
-        <p:spPr>
-          <a:xfrm>
-            <a:off x="566928" y="3822192"/>
-            <a:ext cx="7315200" cy="219456"/>
-          </a:xfrm>
-          <a:prstGeom prst="rect">
-            <a:avLst/>
-          </a:prstGeom>
-          <a:noFill/>
-          <a:ln/>
-        </p:spPr>
-        <p:txBody>
-          <a:bodyPr wrap="square" lIns="0" tIns="0" rIns="0" bIns="0" rtlCol="0" anchor="ctr"/>
-          <a:lstStyle/>
-          <a:p>
-            <a:pPr indent="0" marL="0">
-              <a:buNone/>
-            </a:pPr>
-            <a:r>
-              <a:rPr lang="en-US" sz="950" b="1" spc="110" kern="0" dirty="0">
+          <p:cNvPr id="26" name="Shape 20"/>
+          <p:cNvSpPr/>
+          <p:nvPr/>
+        </p:nvSpPr>
+        <p:spPr>
+          <a:xfrm>
+            <a:off x="566928" y="3438144"/>
+            <a:ext cx="54864" cy="310896"/>
+          </a:xfrm>
+          <a:prstGeom prst="rect">
+            <a:avLst/>
+          </a:prstGeom>
+          <a:solidFill>
+            <a:srgbClr val="BC6C25"/>
+          </a:solidFill>
+          <a:ln/>
+        </p:spPr>
+      </p:sp>
+      <p:sp>
+        <p:nvSpPr>
+          <p:cNvPr id="27" name="Text 21"/>
+          <p:cNvSpPr/>
+          <p:nvPr/>
+        </p:nvSpPr>
+        <p:spPr>
+          <a:xfrm>
+            <a:off x="731520" y="3438144"/>
+            <a:ext cx="7680960" cy="310896"/>
+          </a:xfrm>
+          <a:prstGeom prst="rect">
+            <a:avLst/>
+          </a:prstGeom>
+          <a:noFill/>
+          <a:ln/>
+        </p:spPr>
+        <p:txBody>
+          <a:bodyPr wrap="square" lIns="0" tIns="0" rIns="0" bIns="0" rtlCol="0" anchor="ctr"/>
+          <a:lstStyle/>
+          <a:p>
+            <a:pPr indent="0" marL="0">
+              <a:buNone/>
+            </a:pPr>
+            <a:r>
+              <a:rPr lang="en-US" sz="1100" b="1" dirty="0">
                 <a:solidFill>
                   <a:srgbClr val="283618"/>
                 </a:solidFill>
@@ -4973,45 +4993,84 @@
                 <a:ea typeface="Calibri" pitchFamily="34" charset="-122"/>
                 <a:cs typeface="Calibri" pitchFamily="34" charset="-120"/>
               </a:rPr>
-              <a:t>КОНТРОЛЬНЫЕ ТОЧКИ ДЛЯ ПЕРВОЙ ПОТРЕБНОСТИ «СУХОЙ КОРМ ДЛЯ ВЗРОСЛЫХ СОБАК»</a:t>
-            </a:r>
-            <a:endParaRPr lang="en-US" sz="950" dirty="0"/>
-          </a:p>
-        </p:txBody>
-      </p:sp>
-      <p:sp>
-        <p:nvSpPr>
-          <p:cNvPr id="27" name="Text 21"/>
-          <p:cNvSpPr/>
-          <p:nvPr/>
-        </p:nvSpPr>
-        <p:spPr>
-          <a:xfrm>
-            <a:off x="566928" y="4078224"/>
-            <a:ext cx="3657600" cy="164592"/>
-          </a:xfrm>
-          <a:prstGeom prst="rect">
-            <a:avLst/>
-          </a:prstGeom>
-          <a:noFill/>
-          <a:ln/>
-        </p:spPr>
-        <p:txBody>
-          <a:bodyPr wrap="square" lIns="0" tIns="0" rIns="0" bIns="0" rtlCol="0" anchor="ctr"/>
-          <a:lstStyle/>
-          <a:p>
-            <a:pPr indent="0" marL="0">
-              <a:buNone/>
-            </a:pPr>
-            <a:r>
-              <a:rPr lang="en-US" sz="800" i="1" dirty="0">
-                <a:solidFill>
-                  <a:srgbClr val="606C38"/>
+              <a:t>Все четыре кадра сняты с работающего приложения на Digital Q.DataBase 18.2 — на той самой базе, куда выполнен перенос.</a:t>
+            </a:r>
+            <a:endParaRPr lang="en-US" sz="1100" dirty="0"/>
+          </a:p>
+        </p:txBody>
+      </p:sp>
+      <p:sp>
+        <p:nvSpPr>
+          <p:cNvPr id="28" name="Text 22"/>
+          <p:cNvSpPr/>
+          <p:nvPr/>
+        </p:nvSpPr>
+        <p:spPr>
+          <a:xfrm>
+            <a:off x="566928" y="3822192"/>
+            <a:ext cx="7315200" cy="219456"/>
+          </a:xfrm>
+          <a:prstGeom prst="rect">
+            <a:avLst/>
+          </a:prstGeom>
+          <a:noFill/>
+          <a:ln/>
+        </p:spPr>
+        <p:txBody>
+          <a:bodyPr wrap="square" lIns="0" tIns="0" rIns="0" bIns="0" rtlCol="0" anchor="ctr"/>
+          <a:lstStyle/>
+          <a:p>
+            <a:pPr indent="0" marL="0">
+              <a:buNone/>
+            </a:pPr>
+            <a:r>
+              <a:rPr lang="en-US" sz="950" b="1" spc="110" kern="0" dirty="0">
+                <a:solidFill>
+                  <a:srgbClr val="283618"/>
                 </a:solidFill>
                 <a:latin typeface="Calibri" pitchFamily="34" charset="0"/>
                 <a:ea typeface="Calibri" pitchFamily="34" charset="-122"/>
                 <a:cs typeface="Calibri" pitchFamily="34" charset="-120"/>
               </a:rPr>
+              <a:t>КОНТРОЛЬНЫЕ ТОЧКИ ДЛЯ ПЕРВОЙ ПОТРЕБНОСТИ «СУХОЙ КОРМ ДЛЯ ВЗРОСЛЫХ СОБАК»</a:t>
+            </a:r>
+            <a:endParaRPr lang="en-US" sz="950" dirty="0"/>
+          </a:p>
+        </p:txBody>
+      </p:sp>
+      <p:sp>
+        <p:nvSpPr>
+          <p:cNvPr id="29" name="Text 23"/>
+          <p:cNvSpPr/>
+          <p:nvPr/>
+        </p:nvSpPr>
+        <p:spPr>
+          <a:xfrm>
+            <a:off x="566928" y="4078224"/>
+            <a:ext cx="3657600" cy="164592"/>
+          </a:xfrm>
+          <a:prstGeom prst="rect">
+            <a:avLst/>
+          </a:prstGeom>
+          <a:noFill/>
+          <a:ln/>
+        </p:spPr>
+        <p:txBody>
+          <a:bodyPr wrap="square" lIns="0" tIns="0" rIns="0" bIns="0" rtlCol="0" anchor="ctr"/>
+          <a:lstStyle/>
+          <a:p>
+            <a:pPr indent="0" marL="0">
+              <a:buNone/>
+            </a:pPr>
+            <a:r>
+              <a:rPr lang="en-US" sz="800" i="1" dirty="0">
+                <a:solidFill>
+                  <a:srgbClr val="606C38"/>
+                </a:solidFill>
+                <a:latin typeface="Calibri" pitchFamily="34" charset="0"/>
+                <a:ea typeface="Calibri" pitchFamily="34" charset="-122"/>
+                <a:cs typeface="Calibri" pitchFamily="34" charset="-120"/>
+              </a:rPr>
               <a:t>требуется / обещано / получено / свободно</a:t>
             </a:r>
             <a:endParaRPr lang="en-US" sz="800" dirty="0"/>
@@ -5020,7 +5079,7 @@
       </p:sp>
       <p:sp>
         <p:nvSpPr>
-          <p:cNvPr id="28" name="Shape 22"/>
+          <p:cNvPr id="30" name="Shape 24"/>
           <p:cNvSpPr/>
           <p:nvPr/>
         </p:nvSpPr>
@@ -5040,7 +5099,7 @@
       </p:sp>
       <p:sp>
         <p:nvSpPr>
-          <p:cNvPr id="29" name="Shape 23"/>
+          <p:cNvPr id="31" name="Shape 25"/>
           <p:cNvSpPr/>
           <p:nvPr/>
         </p:nvSpPr>
@@ -5060,7 +5119,7 @@
       </p:sp>
       <p:sp>
         <p:nvSpPr>
-          <p:cNvPr id="30" name="Text 24"/>
+          <p:cNvPr id="32" name="Text 26"/>
           <p:cNvSpPr/>
           <p:nvPr/>
         </p:nvSpPr>
@@ -5099,7 +5158,7 @@
       </p:sp>
       <p:sp>
         <p:nvSpPr>
-          <p:cNvPr id="31" name="Text 25"/>
+          <p:cNvPr id="33" name="Text 27"/>
           <p:cNvSpPr/>
           <p:nvPr/>
         </p:nvSpPr>
@@ -5138,7 +5197,7 @@
       </p:sp>
       <p:sp>
         <p:nvSpPr>
-          <p:cNvPr id="32" name="Shape 26"/>
+          <p:cNvPr id="34" name="Shape 28"/>
           <p:cNvSpPr/>
           <p:nvPr/>
         </p:nvSpPr>
@@ -5158,7 +5217,7 @@
       </p:sp>
       <p:sp>
         <p:nvSpPr>
-          <p:cNvPr id="33" name="Shape 27"/>
+          <p:cNvPr id="35" name="Shape 29"/>
           <p:cNvSpPr/>
           <p:nvPr/>
         </p:nvSpPr>
@@ -5178,7 +5237,7 @@
       </p:sp>
       <p:sp>
         <p:nvSpPr>
-          <p:cNvPr id="34" name="Text 28"/>
+          <p:cNvPr id="36" name="Text 30"/>
           <p:cNvSpPr/>
           <p:nvPr/>
         </p:nvSpPr>
@@ -5217,7 +5276,7 @@
       </p:sp>
       <p:sp>
         <p:nvSpPr>
-          <p:cNvPr id="35" name="Text 29"/>
+          <p:cNvPr id="37" name="Text 31"/>
           <p:cNvSpPr/>
           <p:nvPr/>
         </p:nvSpPr>
@@ -5256,7 +5315,7 @@
       </p:sp>
       <p:sp>
         <p:nvSpPr>
-          <p:cNvPr id="36" name="Shape 30"/>
+          <p:cNvPr id="38" name="Shape 32"/>
           <p:cNvSpPr/>
           <p:nvPr/>
         </p:nvSpPr>
@@ -5276,7 +5335,7 @@
       </p:sp>
       <p:sp>
         <p:nvSpPr>
-          <p:cNvPr id="37" name="Shape 31"/>
+          <p:cNvPr id="39" name="Shape 33"/>
           <p:cNvSpPr/>
           <p:nvPr/>
         </p:nvSpPr>
@@ -5296,7 +5355,7 @@
       </p:sp>
       <p:sp>
         <p:nvSpPr>
-          <p:cNvPr id="38" name="Text 32"/>
+          <p:cNvPr id="40" name="Text 34"/>
           <p:cNvSpPr/>
           <p:nvPr/>
         </p:nvSpPr>
@@ -5335,7 +5394,7 @@
       </p:sp>
       <p:sp>
         <p:nvSpPr>
-          <p:cNvPr id="39" name="Text 33"/>
+          <p:cNvPr id="41" name="Text 35"/>
           <p:cNvSpPr/>
           <p:nvPr/>
         </p:nvSpPr>
@@ -5366,7 +5425,7 @@
                 <a:ea typeface="Georgia" pitchFamily="34" charset="-122"/>
                 <a:cs typeface="Georgia" pitchFamily="34" charset="-120"/>
               </a:rPr>
-              <a:t>50 / 0 / 5 / 45</a:t>
+              <a:t>50 / 0 / 3 / 47</a:t>
             </a:r>
             <a:endParaRPr lang="en-US" sz="1350" dirty="0"/>
           </a:p>
@@ -5374,7 +5433,7 @@
       </p:sp>
       <p:sp>
         <p:nvSpPr>
-          <p:cNvPr id="40" name="Text 34"/>
+          <p:cNvPr id="42" name="Text 36"/>
           <p:cNvSpPr/>
           <p:nvPr/>
         </p:nvSpPr>
@@ -6550,7 +6609,7 @@
               <a:buNone/>
             </a:pPr>
             <a:r>
-              <a:rPr lang="en-US" sz="1000" b="1" spc="120" kern="0" dirty="0">
+              <a:rPr lang="en-US" sz="850" b="1" spc="80" kern="0" dirty="0">
                 <a:solidFill>
                   <a:srgbClr val="283618"/>
                 </a:solidFill>
@@ -6558,9 +6617,9 @@
                 <a:ea typeface="Calibri" pitchFamily="34" charset="-122"/>
                 <a:cs typeface="Calibri" pitchFamily="34" charset="-120"/>
               </a:rPr>
-              <a:t>СЧЁТЧИКИ НА ЭКРАНЕ</a:t>
-            </a:r>
-            <a:endParaRPr lang="en-US" sz="1000" dirty="0"/>
+              <a:t>СЧЁТЧИКИ НА ЭКРАНЕ — «СУХОЙ КОРМ ДЛЯ ВЗРОСЛЫХ СОБАК»</a:t>
+            </a:r>
+            <a:endParaRPr lang="en-US" sz="850" dirty="0"/>
           </a:p>
         </p:txBody>
       </p:sp>
@@ -7021,7 +7080,7 @@
                           <a:ea typeface="Calibri" pitchFamily="34" charset="-122"/>
                           <a:cs typeface="Calibri" pitchFamily="34" charset="-120"/>
                         </a:rPr>
-                        <a:t>20</a:t>
+                        <a:t>50</a:t>
                       </a:r>
                       <a:endParaRPr lang="en-US" sz="1200" dirty="0">
                         <a:latin typeface="Calibri" charset="0"/>
@@ -7225,7 +7284,7 @@
                           <a:ea typeface="Calibri" pitchFamily="34" charset="-122"/>
                           <a:cs typeface="Calibri" pitchFamily="34" charset="-120"/>
                         </a:rPr>
-                        <a:t>20</a:t>
+                        <a:t>50</a:t>
                       </a:r>
                       <a:endParaRPr lang="en-US" sz="1200" dirty="0">
                         <a:latin typeface="Calibri" charset="0"/>
@@ -7363,7 +7422,7 @@
                           <a:ea typeface="Calibri" pitchFamily="34" charset="-122"/>
                           <a:cs typeface="Calibri" pitchFamily="34" charset="-120"/>
                         </a:rPr>
-                        <a:t>20</a:t>
+                        <a:t>50</a:t>
                       </a:r>
                       <a:endParaRPr lang="en-US" sz="1200" dirty="0">
                         <a:latin typeface="Calibri" charset="0"/>
@@ -7567,7 +7626,7 @@
                           <a:ea typeface="Calibri" pitchFamily="34" charset="-122"/>
                           <a:cs typeface="Calibri" pitchFamily="34" charset="-120"/>
                         </a:rPr>
-                        <a:t>15</a:t>
+                        <a:t>45</a:t>
                       </a:r>
                       <a:endParaRPr lang="en-US" sz="1200" dirty="0">
                         <a:latin typeface="Calibri" charset="0"/>
@@ -7705,7 +7764,7 @@
                           <a:ea typeface="Calibri" pitchFamily="34" charset="-122"/>
                           <a:cs typeface="Calibri" pitchFamily="34" charset="-120"/>
                         </a:rPr>
-                        <a:t>20</a:t>
+                        <a:t>50</a:t>
                       </a:r>
                       <a:endParaRPr lang="en-US" sz="1200" dirty="0">
                         <a:latin typeface="Calibri" charset="0"/>
@@ -7909,7 +7968,7 @@
                           <a:ea typeface="Calibri" pitchFamily="34" charset="-122"/>
                           <a:cs typeface="Calibri" pitchFamily="34" charset="-120"/>
                         </a:rPr>
-                        <a:t>17</a:t>
+                        <a:t>47</a:t>
                       </a:r>
                       <a:endParaRPr lang="en-US" sz="1200" dirty="0">
                         <a:latin typeface="Calibri" charset="0"/>
@@ -8932,7 +8991,7 @@
         </p:nvSpPr>
         <p:spPr>
           <a:xfrm>
-            <a:off x="8503920" y="4663440"/>
+            <a:off x="8503920" y="4736592"/>
             <a:ext cx="384048" cy="274320"/>
           </a:xfrm>
           <a:prstGeom prst="rect">
@@ -8952,7 +9011,7 @@
         </p:nvSpPr>
         <p:spPr>
           <a:xfrm>
-            <a:off x="8503920" y="4663440"/>
+            <a:off x="8503920" y="4736592"/>
             <a:ext cx="384048" cy="274320"/>
           </a:xfrm>
           <a:prstGeom prst="rect">
@@ -8991,65 +9050,144 @@
         </p:nvSpPr>
         <p:spPr>
           <a:xfrm>
-            <a:off x="548640" y="274320"/>
-            <a:ext cx="5486400" cy="237744"/>
-          </a:xfrm>
-          <a:prstGeom prst="rect">
-            <a:avLst/>
-          </a:prstGeom>
-          <a:noFill/>
-          <a:ln/>
-        </p:spPr>
-        <p:txBody>
-          <a:bodyPr wrap="square" lIns="0" tIns="0" rIns="0" bIns="0" rtlCol="0" anchor="ctr"/>
-          <a:lstStyle/>
-          <a:p>
-            <a:pPr indent="0" marL="0">
-              <a:buNone/>
-            </a:pPr>
-            <a:r>
-              <a:rPr lang="en-US" sz="1000" b="1" spc="120" kern="0" dirty="0">
-                <a:solidFill>
-                  <a:srgbClr val="BC6C25"/>
+            <a:off x="548640" y="219456"/>
+            <a:ext cx="8229600" cy="420624"/>
+          </a:xfrm>
+          <a:prstGeom prst="rect">
+            <a:avLst/>
+          </a:prstGeom>
+          <a:noFill/>
+          <a:ln/>
+        </p:spPr>
+        <p:txBody>
+          <a:bodyPr wrap="square" lIns="0" tIns="0" rIns="0" bIns="0" rtlCol="0" anchor="ctr">
+            <a:normAutofit/>
+          </a:bodyPr>
+          <a:lstStyle/>
+          <a:p>
+            <a:pPr indent="0" marL="0">
+              <a:buNone/>
+            </a:pPr>
+            <a:r>
+              <a:rPr lang="en-US" sz="2300" b="1" dirty="0">
+                <a:solidFill>
+                  <a:srgbClr val="283618"/>
+                </a:solidFill>
+                <a:latin typeface="Georgia" pitchFamily="34" charset="0"/>
+                <a:ea typeface="Georgia" pitchFamily="34" charset="-122"/>
+                <a:cs typeface="Georgia" pitchFamily="34" charset="-120"/>
+              </a:rPr>
+              <a:t>Перенос выполнен на настоящей Digital Q.DataBase</a:t>
+            </a:r>
+            <a:endParaRPr lang="en-US" sz="2300" dirty="0"/>
+          </a:p>
+        </p:txBody>
+      </p:sp>
+      <p:sp>
+        <p:nvSpPr>
+          <p:cNvPr id="5" name="Text 3"/>
+          <p:cNvSpPr/>
+          <p:nvPr/>
+        </p:nvSpPr>
+        <p:spPr>
+          <a:xfrm>
+            <a:off x="548640" y="640080"/>
+            <a:ext cx="8229600" cy="365760"/>
+          </a:xfrm>
+          <a:prstGeom prst="rect">
+            <a:avLst/>
+          </a:prstGeom>
+          <a:noFill/>
+          <a:ln/>
+        </p:spPr>
+        <p:txBody>
+          <a:bodyPr wrap="square" lIns="0" tIns="0" rIns="0" bIns="0" rtlCol="0" anchor="ctr"/>
+          <a:lstStyle/>
+          <a:p>
+            <a:pPr indent="0" marL="0">
+              <a:buNone/>
+            </a:pPr>
+            <a:r>
+              <a:rPr lang="en-US" sz="1150" dirty="0">
+                <a:solidFill>
+                  <a:srgbClr val="606C38"/>
                 </a:solidFill>
                 <a:latin typeface="Calibri" pitchFamily="34" charset="0"/>
                 <a:ea typeface="Calibri" pitchFamily="34" charset="-122"/>
                 <a:cs typeface="Calibri" pitchFamily="34" charset="-120"/>
               </a:rPr>
-              <a:t>ПРИЛОЖЕНИЕ -- не показывать в базовом варианте</a:t>
-            </a:r>
-            <a:endParaRPr lang="en-US" sz="1000" dirty="0"/>
-          </a:p>
-        </p:txBody>
-      </p:sp>
-      <p:sp>
-        <p:nvSpPr>
-          <p:cNvPr id="5" name="Text 3"/>
-          <p:cNvSpPr/>
-          <p:nvPr/>
-        </p:nvSpPr>
-        <p:spPr>
-          <a:xfrm>
-            <a:off x="548640" y="548640"/>
-            <a:ext cx="8046720" cy="502920"/>
-          </a:xfrm>
-          <a:prstGeom prst="rect">
-            <a:avLst/>
-          </a:prstGeom>
-          <a:noFill/>
-          <a:ln/>
-        </p:spPr>
-        <p:txBody>
-          <a:bodyPr wrap="square" lIns="0" tIns="0" rIns="0" bIns="0" rtlCol="0" anchor="ctr">
-            <a:normAutofit/>
-          </a:bodyPr>
-          <a:lstStyle/>
-          <a:p>
-            <a:pPr indent="0" marL="0">
-              <a:buNone/>
-            </a:pPr>
-            <a:r>
-              <a:rPr lang="en-US" sz="2600" b="1" dirty="0">
+              <a:t>Схема применена без единой правки, данные перенесены одной транзакцией, расхождений не найдено. Ниже — результаты проверок, а не обещания.</a:t>
+            </a:r>
+            <a:endParaRPr lang="en-US" sz="1150" dirty="0"/>
+          </a:p>
+        </p:txBody>
+      </p:sp>
+      <p:sp>
+        <p:nvSpPr>
+          <p:cNvPr id="6" name="Shape 4"/>
+          <p:cNvSpPr/>
+          <p:nvPr/>
+        </p:nvSpPr>
+        <p:spPr>
+          <a:xfrm>
+            <a:off x="566928" y="1115568"/>
+            <a:ext cx="2066544" cy="859536"/>
+          </a:xfrm>
+          <a:prstGeom prst="rect">
+            <a:avLst/>
+          </a:prstGeom>
+          <a:solidFill>
+            <a:srgbClr val="DDA15E"/>
+          </a:solidFill>
+          <a:ln/>
+        </p:spPr>
+      </p:sp>
+      <p:sp>
+        <p:nvSpPr>
+          <p:cNvPr id="7" name="Shape 5"/>
+          <p:cNvSpPr/>
+          <p:nvPr/>
+        </p:nvSpPr>
+        <p:spPr>
+          <a:xfrm>
+            <a:off x="566928" y="1115568"/>
+            <a:ext cx="82296" cy="859536"/>
+          </a:xfrm>
+          <a:prstGeom prst="rect">
+            <a:avLst/>
+          </a:prstGeom>
+          <a:solidFill>
+            <a:srgbClr val="BC6C25"/>
+          </a:solidFill>
+          <a:ln/>
+        </p:spPr>
+      </p:sp>
+      <p:sp>
+        <p:nvSpPr>
+          <p:cNvPr id="8" name="Text 6"/>
+          <p:cNvSpPr/>
+          <p:nvPr/>
+        </p:nvSpPr>
+        <p:spPr>
+          <a:xfrm>
+            <a:off x="749808" y="1152144"/>
+            <a:ext cx="1792224" cy="420624"/>
+          </a:xfrm>
+          <a:prstGeom prst="rect">
+            <a:avLst/>
+          </a:prstGeom>
+          <a:noFill/>
+          <a:ln/>
+        </p:spPr>
+        <p:txBody>
+          <a:bodyPr wrap="square" lIns="0" tIns="0" rIns="0" bIns="0" rtlCol="0" anchor="ctr"/>
+          <a:lstStyle/>
+          <a:p>
+            <a:pPr indent="0" marL="0">
+              <a:buNone/>
+            </a:pPr>
+            <a:r>
+              <a:rPr lang="en-US" sz="2400" b="1" dirty="0">
                 <a:solidFill>
                   <a:srgbClr val="283618"/>
                 </a:solidFill>
@@ -9057,22 +9195,98 @@
                 <a:ea typeface="Georgia" pitchFamily="34" charset="-122"/>
                 <a:cs typeface="Georgia" pitchFamily="34" charset="-120"/>
               </a:rPr>
-              <a:t>Доказательство переноса на Digital Q.DataBase</a:t>
-            </a:r>
-            <a:endParaRPr lang="en-US" sz="2600" dirty="0"/>
-          </a:p>
-        </p:txBody>
-      </p:sp>
-      <p:sp>
-        <p:nvSpPr>
-          <p:cNvPr id="6" name="Shape 4"/>
-          <p:cNvSpPr/>
-          <p:nvPr/>
-        </p:nvSpPr>
-        <p:spPr>
-          <a:xfrm>
-            <a:off x="548640" y="1133856"/>
-            <a:ext cx="8046720" cy="512064"/>
+              <a:t>15/15</a:t>
+            </a:r>
+            <a:endParaRPr lang="en-US" sz="2400" dirty="0"/>
+          </a:p>
+        </p:txBody>
+      </p:sp>
+      <p:sp>
+        <p:nvSpPr>
+          <p:cNvPr id="9" name="Text 7"/>
+          <p:cNvSpPr/>
+          <p:nvPr/>
+        </p:nvSpPr>
+        <p:spPr>
+          <a:xfrm>
+            <a:off x="749808" y="1554480"/>
+            <a:ext cx="1792224" cy="384048"/>
+          </a:xfrm>
+          <a:prstGeom prst="rect">
+            <a:avLst/>
+          </a:prstGeom>
+          <a:noFill/>
+          <a:ln/>
+        </p:spPr>
+        <p:txBody>
+          <a:bodyPr wrap="square" lIns="0" tIns="0" rIns="0" bIns="0" rtlCol="0" anchor="ctr"/>
+          <a:lstStyle/>
+          <a:p>
+            <a:pPr indent="0" marL="0">
+              <a:buNone/>
+            </a:pPr>
+            <a:r>
+              <a:rPr lang="en-US" sz="900" dirty="0">
+                <a:solidFill>
+                  <a:srgbClr val="283618"/>
+                </a:solidFill>
+                <a:latin typeface="Calibri" pitchFamily="34" charset="0"/>
+                <a:ea typeface="Calibri" pitchFamily="34" charset="-122"/>
+                <a:cs typeface="Calibri" pitchFamily="34" charset="-120"/>
+              </a:rPr>
+              <a:t>проб совместимости</a:t>
+            </a:r>
+            <a:endParaRPr lang="en-US" sz="900" dirty="0"/>
+          </a:p>
+          <a:p>
+            <a:pPr indent="0" marL="0">
+              <a:buNone/>
+            </a:pPr>
+            <a:r>
+              <a:rPr lang="en-US" sz="900" dirty="0">
+                <a:solidFill>
+                  <a:srgbClr val="283618"/>
+                </a:solidFill>
+                <a:latin typeface="Calibri" pitchFamily="34" charset="0"/>
+                <a:ea typeface="Calibri" pitchFamily="34" charset="-122"/>
+                <a:cs typeface="Calibri" pitchFamily="34" charset="-120"/>
+              </a:rPr>
+              <a:t>на целевой базе</a:t>
+            </a:r>
+            <a:endParaRPr lang="en-US" sz="900" dirty="0"/>
+          </a:p>
+        </p:txBody>
+      </p:sp>
+      <p:sp>
+        <p:nvSpPr>
+          <p:cNvPr id="10" name="Shape 8"/>
+          <p:cNvSpPr/>
+          <p:nvPr/>
+        </p:nvSpPr>
+        <p:spPr>
+          <a:xfrm>
+            <a:off x="2697480" y="1115568"/>
+            <a:ext cx="2066544" cy="859536"/>
+          </a:xfrm>
+          <a:prstGeom prst="rect">
+            <a:avLst/>
+          </a:prstGeom>
+          <a:solidFill>
+            <a:srgbClr val="DDA15E"/>
+          </a:solidFill>
+          <a:ln/>
+        </p:spPr>
+      </p:sp>
+      <p:sp>
+        <p:nvSpPr>
+          <p:cNvPr id="11" name="Shape 9"/>
+          <p:cNvSpPr/>
+          <p:nvPr/>
+        </p:nvSpPr>
+        <p:spPr>
+          <a:xfrm>
+            <a:off x="2697480" y="1115568"/>
+            <a:ext cx="82296" cy="859536"/>
           </a:xfrm>
           <a:prstGeom prst="rect">
             <a:avLst/>
@@ -9085,53 +9299,518 @@
       </p:sp>
       <p:sp>
         <p:nvSpPr>
-          <p:cNvPr id="7" name="Text 5"/>
-          <p:cNvSpPr/>
-          <p:nvPr/>
-        </p:nvSpPr>
-        <p:spPr>
-          <a:xfrm>
-            <a:off x="749808" y="1133856"/>
-            <a:ext cx="7644384" cy="512064"/>
-          </a:xfrm>
-          <a:prstGeom prst="rect">
-            <a:avLst/>
-          </a:prstGeom>
-          <a:noFill/>
-          <a:ln/>
-        </p:spPr>
-        <p:txBody>
-          <a:bodyPr wrap="square" lIns="0" tIns="0" rIns="0" bIns="0" rtlCol="0" anchor="ctr"/>
-          <a:lstStyle/>
-          <a:p>
-            <a:pPr indent="0" marL="0">
-              <a:buNone/>
-            </a:pPr>
-            <a:r>
-              <a:rPr lang="en-US" sz="1250" dirty="0">
-                <a:solidFill>
-                  <a:srgbClr val="FEFAE0"/>
+          <p:cNvPr id="12" name="Text 10"/>
+          <p:cNvSpPr/>
+          <p:nvPr/>
+        </p:nvSpPr>
+        <p:spPr>
+          <a:xfrm>
+            <a:off x="2880360" y="1152144"/>
+            <a:ext cx="1792224" cy="420624"/>
+          </a:xfrm>
+          <a:prstGeom prst="rect">
+            <a:avLst/>
+          </a:prstGeom>
+          <a:noFill/>
+          <a:ln/>
+        </p:spPr>
+        <p:txBody>
+          <a:bodyPr wrap="square" lIns="0" tIns="0" rIns="0" bIns="0" rtlCol="0" anchor="ctr"/>
+          <a:lstStyle/>
+          <a:p>
+            <a:pPr indent="0" marL="0">
+              <a:buNone/>
+            </a:pPr>
+            <a:r>
+              <a:rPr lang="en-US" sz="2400" b="1" dirty="0">
+                <a:solidFill>
+                  <a:srgbClr val="283618"/>
+                </a:solidFill>
+                <a:latin typeface="Georgia" pitchFamily="34" charset="0"/>
+                <a:ea typeface="Georgia" pitchFamily="34" charset="-122"/>
+                <a:cs typeface="Georgia" pitchFamily="34" charset="-120"/>
+              </a:rPr>
+              <a:t>25/25</a:t>
+            </a:r>
+            <a:endParaRPr lang="en-US" sz="2400" dirty="0"/>
+          </a:p>
+        </p:txBody>
+      </p:sp>
+      <p:sp>
+        <p:nvSpPr>
+          <p:cNvPr id="13" name="Text 11"/>
+          <p:cNvSpPr/>
+          <p:nvPr/>
+        </p:nvSpPr>
+        <p:spPr>
+          <a:xfrm>
+            <a:off x="2880360" y="1554480"/>
+            <a:ext cx="1792224" cy="384048"/>
+          </a:xfrm>
+          <a:prstGeom prst="rect">
+            <a:avLst/>
+          </a:prstGeom>
+          <a:noFill/>
+          <a:ln/>
+        </p:spPr>
+        <p:txBody>
+          <a:bodyPr wrap="square" lIns="0" tIns="0" rIns="0" bIns="0" rtlCol="0" anchor="ctr"/>
+          <a:lstStyle/>
+          <a:p>
+            <a:pPr indent="0" marL="0">
+              <a:buNone/>
+            </a:pPr>
+            <a:r>
+              <a:rPr lang="en-US" sz="900" dirty="0">
+                <a:solidFill>
+                  <a:srgbClr val="283618"/>
                 </a:solidFill>
                 <a:latin typeface="Calibri" pitchFamily="34" charset="0"/>
                 <a:ea typeface="Calibri" pitchFamily="34" charset="-122"/>
                 <a:cs typeface="Calibri" pitchFamily="34" charset="-120"/>
               </a:rPr>
-              <a:t>Показывать этот слайд только после выполнения QDB-02 ... QDB-05. До этого заявлять миграцию нельзя.</a:t>
-            </a:r>
-            <a:endParaRPr lang="en-US" sz="1250" dirty="0"/>
-          </a:p>
-        </p:txBody>
-      </p:sp>
-      <p:sp>
-        <p:nvSpPr>
-          <p:cNvPr id="8" name="Shape 6"/>
-          <p:cNvSpPr/>
-          <p:nvPr/>
-        </p:nvSpPr>
-        <p:spPr>
-          <a:xfrm>
-            <a:off x="548640" y="1847088"/>
-            <a:ext cx="3913632" cy="1225296"/>
+              <a:t>проверок сверки</a:t>
+            </a:r>
+            <a:endParaRPr lang="en-US" sz="900" dirty="0"/>
+          </a:p>
+          <a:p>
+            <a:pPr indent="0" marL="0">
+              <a:buNone/>
+            </a:pPr>
+            <a:r>
+              <a:rPr lang="en-US" sz="900" dirty="0">
+                <a:solidFill>
+                  <a:srgbClr val="283618"/>
+                </a:solidFill>
+                <a:latin typeface="Calibri" pitchFamily="34" charset="0"/>
+                <a:ea typeface="Calibri" pitchFamily="34" charset="-122"/>
+                <a:cs typeface="Calibri" pitchFamily="34" charset="-120"/>
+              </a:rPr>
+              <a:t>после переноса</a:t>
+            </a:r>
+            <a:endParaRPr lang="en-US" sz="900" dirty="0"/>
+          </a:p>
+        </p:txBody>
+      </p:sp>
+      <p:sp>
+        <p:nvSpPr>
+          <p:cNvPr id="14" name="Shape 12"/>
+          <p:cNvSpPr/>
+          <p:nvPr/>
+        </p:nvSpPr>
+        <p:spPr>
+          <a:xfrm>
+            <a:off x="4828032" y="1115568"/>
+            <a:ext cx="2066544" cy="859536"/>
+          </a:xfrm>
+          <a:prstGeom prst="rect">
+            <a:avLst/>
+          </a:prstGeom>
+          <a:solidFill>
+            <a:srgbClr val="DDA15E"/>
+          </a:solidFill>
+          <a:ln/>
+        </p:spPr>
+      </p:sp>
+      <p:sp>
+        <p:nvSpPr>
+          <p:cNvPr id="15" name="Shape 13"/>
+          <p:cNvSpPr/>
+          <p:nvPr/>
+        </p:nvSpPr>
+        <p:spPr>
+          <a:xfrm>
+            <a:off x="4828032" y="1115568"/>
+            <a:ext cx="82296" cy="859536"/>
+          </a:xfrm>
+          <a:prstGeom prst="rect">
+            <a:avLst/>
+          </a:prstGeom>
+          <a:solidFill>
+            <a:srgbClr val="BC6C25"/>
+          </a:solidFill>
+          <a:ln/>
+        </p:spPr>
+      </p:sp>
+      <p:sp>
+        <p:nvSpPr>
+          <p:cNvPr id="16" name="Text 14"/>
+          <p:cNvSpPr/>
+          <p:nvPr/>
+        </p:nvSpPr>
+        <p:spPr>
+          <a:xfrm>
+            <a:off x="5010912" y="1152144"/>
+            <a:ext cx="1792224" cy="420624"/>
+          </a:xfrm>
+          <a:prstGeom prst="rect">
+            <a:avLst/>
+          </a:prstGeom>
+          <a:noFill/>
+          <a:ln/>
+        </p:spPr>
+        <p:txBody>
+          <a:bodyPr wrap="square" lIns="0" tIns="0" rIns="0" bIns="0" rtlCol="0" anchor="ctr"/>
+          <a:lstStyle/>
+          <a:p>
+            <a:pPr indent="0" marL="0">
+              <a:buNone/>
+            </a:pPr>
+            <a:r>
+              <a:rPr lang="en-US" sz="2400" b="1" dirty="0">
+                <a:solidFill>
+                  <a:srgbClr val="283618"/>
+                </a:solidFill>
+                <a:latin typeface="Georgia" pitchFamily="34" charset="0"/>
+                <a:ea typeface="Georgia" pitchFamily="34" charset="-122"/>
+                <a:cs typeface="Georgia" pitchFamily="34" charset="-120"/>
+              </a:rPr>
+              <a:t>60/60</a:t>
+            </a:r>
+            <a:endParaRPr lang="en-US" sz="2400" dirty="0"/>
+          </a:p>
+        </p:txBody>
+      </p:sp>
+      <p:sp>
+        <p:nvSpPr>
+          <p:cNvPr id="17" name="Text 15"/>
+          <p:cNvSpPr/>
+          <p:nvPr/>
+        </p:nvSpPr>
+        <p:spPr>
+          <a:xfrm>
+            <a:off x="5010912" y="1554480"/>
+            <a:ext cx="1792224" cy="384048"/>
+          </a:xfrm>
+          <a:prstGeom prst="rect">
+            <a:avLst/>
+          </a:prstGeom>
+          <a:noFill/>
+          <a:ln/>
+        </p:spPr>
+        <p:txBody>
+          <a:bodyPr wrap="square" lIns="0" tIns="0" rIns="0" bIns="0" rtlCol="0" anchor="ctr"/>
+          <a:lstStyle/>
+          <a:p>
+            <a:pPr indent="0" marL="0">
+              <a:buNone/>
+            </a:pPr>
+            <a:r>
+              <a:rPr lang="en-US" sz="900" dirty="0">
+                <a:solidFill>
+                  <a:srgbClr val="283618"/>
+                </a:solidFill>
+                <a:latin typeface="Calibri" pitchFamily="34" charset="0"/>
+                <a:ea typeface="Calibri" pitchFamily="34" charset="-122"/>
+                <a:cs typeface="Calibri" pitchFamily="34" charset="-120"/>
+              </a:rPr>
+              <a:t>тестов приложения,</a:t>
+            </a:r>
+            <a:endParaRPr lang="en-US" sz="900" dirty="0"/>
+          </a:p>
+          <a:p>
+            <a:pPr indent="0" marL="0">
+              <a:buNone/>
+            </a:pPr>
+            <a:r>
+              <a:rPr lang="en-US" sz="900" dirty="0">
+                <a:solidFill>
+                  <a:srgbClr val="283618"/>
+                </a:solidFill>
+                <a:latin typeface="Calibri" pitchFamily="34" charset="0"/>
+                <a:ea typeface="Calibri" pitchFamily="34" charset="-122"/>
+                <a:cs typeface="Calibri" pitchFamily="34" charset="-120"/>
+              </a:rPr>
+              <a:t>прогнанных на QDB</a:t>
+            </a:r>
+            <a:endParaRPr lang="en-US" sz="900" dirty="0"/>
+          </a:p>
+        </p:txBody>
+      </p:sp>
+      <p:sp>
+        <p:nvSpPr>
+          <p:cNvPr id="18" name="Shape 16"/>
+          <p:cNvSpPr/>
+          <p:nvPr/>
+        </p:nvSpPr>
+        <p:spPr>
+          <a:xfrm>
+            <a:off x="6958584" y="1115568"/>
+            <a:ext cx="2066544" cy="859536"/>
+          </a:xfrm>
+          <a:prstGeom prst="rect">
+            <a:avLst/>
+          </a:prstGeom>
+          <a:solidFill>
+            <a:srgbClr val="DDA15E"/>
+          </a:solidFill>
+          <a:ln/>
+        </p:spPr>
+      </p:sp>
+      <p:sp>
+        <p:nvSpPr>
+          <p:cNvPr id="19" name="Shape 17"/>
+          <p:cNvSpPr/>
+          <p:nvPr/>
+        </p:nvSpPr>
+        <p:spPr>
+          <a:xfrm>
+            <a:off x="6958584" y="1115568"/>
+            <a:ext cx="82296" cy="859536"/>
+          </a:xfrm>
+          <a:prstGeom prst="rect">
+            <a:avLst/>
+          </a:prstGeom>
+          <a:solidFill>
+            <a:srgbClr val="BC6C25"/>
+          </a:solidFill>
+          <a:ln/>
+        </p:spPr>
+      </p:sp>
+      <p:sp>
+        <p:nvSpPr>
+          <p:cNvPr id="20" name="Text 18"/>
+          <p:cNvSpPr/>
+          <p:nvPr/>
+        </p:nvSpPr>
+        <p:spPr>
+          <a:xfrm>
+            <a:off x="7141464" y="1152144"/>
+            <a:ext cx="1792224" cy="420624"/>
+          </a:xfrm>
+          <a:prstGeom prst="rect">
+            <a:avLst/>
+          </a:prstGeom>
+          <a:noFill/>
+          <a:ln/>
+        </p:spPr>
+        <p:txBody>
+          <a:bodyPr wrap="square" lIns="0" tIns="0" rIns="0" bIns="0" rtlCol="0" anchor="ctr"/>
+          <a:lstStyle/>
+          <a:p>
+            <a:pPr indent="0" marL="0">
+              <a:buNone/>
+            </a:pPr>
+            <a:r>
+              <a:rPr lang="en-US" sz="2400" b="1" dirty="0">
+                <a:solidFill>
+                  <a:srgbClr val="283618"/>
+                </a:solidFill>
+                <a:latin typeface="Georgia" pitchFamily="34" charset="0"/>
+                <a:ea typeface="Georgia" pitchFamily="34" charset="-122"/>
+                <a:cs typeface="Georgia" pitchFamily="34" charset="-120"/>
+              </a:rPr>
+              <a:t>0</a:t>
+            </a:r>
+            <a:endParaRPr lang="en-US" sz="2400" dirty="0"/>
+          </a:p>
+        </p:txBody>
+      </p:sp>
+      <p:sp>
+        <p:nvSpPr>
+          <p:cNvPr id="21" name="Text 19"/>
+          <p:cNvSpPr/>
+          <p:nvPr/>
+        </p:nvSpPr>
+        <p:spPr>
+          <a:xfrm>
+            <a:off x="7141464" y="1554480"/>
+            <a:ext cx="1792224" cy="384048"/>
+          </a:xfrm>
+          <a:prstGeom prst="rect">
+            <a:avLst/>
+          </a:prstGeom>
+          <a:noFill/>
+          <a:ln/>
+        </p:spPr>
+        <p:txBody>
+          <a:bodyPr wrap="square" lIns="0" tIns="0" rIns="0" bIns="0" rtlCol="0" anchor="ctr"/>
+          <a:lstStyle/>
+          <a:p>
+            <a:pPr indent="0" marL="0">
+              <a:buNone/>
+            </a:pPr>
+            <a:r>
+              <a:rPr lang="en-US" sz="900" dirty="0">
+                <a:solidFill>
+                  <a:srgbClr val="283618"/>
+                </a:solidFill>
+                <a:latin typeface="Calibri" pitchFamily="34" charset="0"/>
+                <a:ea typeface="Calibri" pitchFamily="34" charset="-122"/>
+                <a:cs typeface="Calibri" pitchFamily="34" charset="-120"/>
+              </a:rPr>
+              <a:t>правок в DDL</a:t>
+            </a:r>
+            <a:endParaRPr lang="en-US" sz="900" dirty="0"/>
+          </a:p>
+          <a:p>
+            <a:pPr indent="0" marL="0">
+              <a:buNone/>
+            </a:pPr>
+            <a:r>
+              <a:rPr lang="en-US" sz="900" dirty="0">
+                <a:solidFill>
+                  <a:srgbClr val="283618"/>
+                </a:solidFill>
+                <a:latin typeface="Calibri" pitchFamily="34" charset="0"/>
+                <a:ea typeface="Calibri" pitchFamily="34" charset="-122"/>
+                <a:cs typeface="Calibri" pitchFamily="34" charset="-120"/>
+              </a:rPr>
+              <a:t>при переносе схемы</a:t>
+            </a:r>
+            <a:endParaRPr lang="en-US" sz="900" dirty="0"/>
+          </a:p>
+        </p:txBody>
+      </p:sp>
+      <p:sp>
+        <p:nvSpPr>
+          <p:cNvPr id="22" name="Shape 20"/>
+          <p:cNvSpPr/>
+          <p:nvPr/>
+        </p:nvSpPr>
+        <p:spPr>
+          <a:xfrm>
+            <a:off x="566928" y="2157984"/>
+            <a:ext cx="3602736" cy="237744"/>
+          </a:xfrm>
+          <a:prstGeom prst="rect">
+            <a:avLst/>
+          </a:prstGeom>
+          <a:solidFill>
+            <a:srgbClr val="606C38"/>
+          </a:solidFill>
+          <a:ln/>
+        </p:spPr>
+      </p:sp>
+      <p:sp>
+        <p:nvSpPr>
+          <p:cNvPr id="23" name="Text 21"/>
+          <p:cNvSpPr/>
+          <p:nvPr/>
+        </p:nvSpPr>
+        <p:spPr>
+          <a:xfrm>
+            <a:off x="621792" y="2157984"/>
+            <a:ext cx="3493008" cy="237744"/>
+          </a:xfrm>
+          <a:prstGeom prst="rect">
+            <a:avLst/>
+          </a:prstGeom>
+          <a:noFill/>
+          <a:ln/>
+        </p:spPr>
+        <p:txBody>
+          <a:bodyPr wrap="square" lIns="0" tIns="0" rIns="0" bIns="0" rtlCol="0" anchor="ctr"/>
+          <a:lstStyle/>
+          <a:p>
+            <a:pPr indent="0" marL="0">
+              <a:buNone/>
+            </a:pPr>
+            <a:r>
+              <a:rPr lang="en-US" sz="750" b="1" spc="50" kern="0" dirty="0">
+                <a:solidFill>
+                  <a:srgbClr val="FEFAE0"/>
+                </a:solidFill>
+                <a:latin typeface="Calibri" pitchFamily="34" charset="0"/>
+                <a:ea typeface="Calibri" pitchFamily="34" charset="-122"/>
+                <a:cs typeface="Calibri" pitchFamily="34" charset="-120"/>
+              </a:rPr>
+              <a:t>ПРИЛОЖЕНИЕ НА ЦЕЛЕВОЙ БАЗЕ — КАТАЛОГ ПОСЛЕ ПРИЁМКИ</a:t>
+            </a:r>
+            <a:endParaRPr lang="en-US" sz="750" dirty="0"/>
+          </a:p>
+        </p:txBody>
+      </p:sp>
+      <p:pic>
+        <p:nvPicPr>
+          <p:cNvPr id="24" name="Image 0" descr="screenshots/needs-catalog-d2.png">    </p:cNvPr>
+          <p:cNvPicPr>
+            <a:picLocks noChangeAspect="1"/>
+          </p:cNvPicPr>
+          <p:nvPr/>
+        </p:nvPicPr>
+        <p:blipFill>
+          <a:blip r:embed="rId1"/>
+          <a:stretch>
+            <a:fillRect/>
+          </a:stretch>
+        </p:blipFill>
+        <p:spPr>
+          <a:xfrm>
+            <a:off x="768096" y="2414016"/>
+            <a:ext cx="3200400" cy="2250281"/>
+          </a:xfrm>
+          <a:prstGeom prst="rect">
+            <a:avLst/>
+          </a:prstGeom>
+        </p:spPr>
+      </p:pic>
+      <p:sp>
+        <p:nvSpPr>
+          <p:cNvPr id="25" name="Text 22"/>
+          <p:cNvSpPr/>
+          <p:nvPr/>
+        </p:nvSpPr>
+        <p:spPr>
+          <a:xfrm>
+            <a:off x="566928" y="4645152"/>
+            <a:ext cx="3602736" cy="402336"/>
+          </a:xfrm>
+          <a:prstGeom prst="rect">
+            <a:avLst/>
+          </a:prstGeom>
+          <a:noFill/>
+          <a:ln/>
+        </p:spPr>
+        <p:txBody>
+          <a:bodyPr wrap="square" lIns="0" tIns="0" rIns="0" bIns="0" rtlCol="0" anchor="ctr"/>
+          <a:lstStyle/>
+          <a:p>
+            <a:pPr indent="0" marL="0">
+              <a:buNone/>
+            </a:pPr>
+            <a:r>
+              <a:rPr lang="en-US" sz="750" i="1" dirty="0">
+                <a:solidFill>
+                  <a:srgbClr val="606C38"/>
+                </a:solidFill>
+                <a:latin typeface="Calibri" pitchFamily="34" charset="0"/>
+                <a:ea typeface="Calibri" pitchFamily="34" charset="-122"/>
+                <a:cs typeface="Calibri" pitchFamily="34" charset="-120"/>
+              </a:rPr>
+              <a:t>Сухой корм: 50 / 0 / 3 / 47 — те же счётчики, что и до переноса.</a:t>
+            </a:r>
+            <a:endParaRPr lang="en-US" sz="750" dirty="0"/>
+          </a:p>
+          <a:p>
+            <a:pPr indent="0" marL="0">
+              <a:buNone/>
+            </a:pPr>
+            <a:r>
+              <a:rPr lang="en-US" sz="750" i="1" dirty="0">
+                <a:solidFill>
+                  <a:srgbClr val="606C38"/>
+                </a:solidFill>
+                <a:latin typeface="Calibri" pitchFamily="34" charset="0"/>
+                <a:ea typeface="Calibri" pitchFamily="34" charset="-122"/>
+                <a:cs typeface="Calibri" pitchFamily="34" charset="-120"/>
+              </a:rPr>
+              <a:t>Перенесено одной транзакцией: 3 приюта, 4 аккаунта, 10 потребностей, 4 предложения, 1 доставка. Сирот и отрицательных остатков нет.</a:t>
+            </a:r>
+            <a:endParaRPr lang="en-US" sz="750" dirty="0"/>
+          </a:p>
+        </p:txBody>
+      </p:sp>
+      <p:sp>
+        <p:nvSpPr>
+          <p:cNvPr id="26" name="Shape 23"/>
+          <p:cNvSpPr/>
+          <p:nvPr/>
+        </p:nvSpPr>
+        <p:spPr>
+          <a:xfrm>
+            <a:off x="4334256" y="2157984"/>
+            <a:ext cx="4242816" cy="1133856"/>
           </a:xfrm>
           <a:prstGeom prst="rect">
             <a:avLst/>
@@ -9143,134 +9822,56 @@
             <a:solidFill>
               <a:srgbClr val="606C38"/>
             </a:solidFill>
-            <a:prstDash val="dash"/>
+            <a:prstDash val="solid"/>
           </a:ln>
         </p:spPr>
       </p:sp>
       <p:sp>
         <p:nvSpPr>
-          <p:cNvPr id="9" name="Shape 7"/>
-          <p:cNvSpPr/>
-          <p:nvPr/>
-        </p:nvSpPr>
-        <p:spPr>
-          <a:xfrm>
-            <a:off x="548640" y="1847088"/>
-            <a:ext cx="365760" cy="1225296"/>
+          <p:cNvPr id="27" name="Shape 24"/>
+          <p:cNvSpPr/>
+          <p:nvPr/>
+        </p:nvSpPr>
+        <p:spPr>
+          <a:xfrm>
+            <a:off x="4334256" y="2157984"/>
+            <a:ext cx="54864" cy="1133856"/>
           </a:xfrm>
           <a:prstGeom prst="rect">
             <a:avLst/>
           </a:prstGeom>
           <a:solidFill>
-            <a:srgbClr val="283618"/>
+            <a:srgbClr val="BC6C25"/>
           </a:solidFill>
           <a:ln/>
         </p:spPr>
       </p:sp>
       <p:sp>
         <p:nvSpPr>
-          <p:cNvPr id="10" name="Text 8"/>
-          <p:cNvSpPr/>
-          <p:nvPr/>
-        </p:nvSpPr>
-        <p:spPr>
-          <a:xfrm>
-            <a:off x="548640" y="1847088"/>
-            <a:ext cx="365760" cy="1225296"/>
-          </a:xfrm>
-          <a:prstGeom prst="rect">
-            <a:avLst/>
-          </a:prstGeom>
-          <a:noFill/>
-          <a:ln/>
-        </p:spPr>
-        <p:txBody>
-          <a:bodyPr wrap="square" lIns="0" tIns="0" rIns="0" bIns="0" rtlCol="0" anchor="ctr"/>
-          <a:lstStyle/>
-          <a:p>
-            <a:pPr algn="ctr" indent="0" marL="0">
-              <a:buNone/>
-            </a:pPr>
-            <a:r>
-              <a:rPr lang="en-US" sz="1800" b="1" dirty="0">
-                <a:solidFill>
-                  <a:srgbClr val="FEFAE0"/>
-                </a:solidFill>
-                <a:latin typeface="Georgia" pitchFamily="34" charset="0"/>
-                <a:ea typeface="Georgia" pitchFamily="34" charset="-122"/>
-                <a:cs typeface="Georgia" pitchFamily="34" charset="-120"/>
-              </a:rPr>
-              <a:t>1</a:t>
-            </a:r>
-            <a:endParaRPr lang="en-US" sz="1800" dirty="0"/>
-          </a:p>
-        </p:txBody>
-      </p:sp>
-      <p:sp>
-        <p:nvSpPr>
-          <p:cNvPr id="11" name="Text 9"/>
-          <p:cNvSpPr/>
-          <p:nvPr/>
-        </p:nvSpPr>
-        <p:spPr>
-          <a:xfrm>
-            <a:off x="1060704" y="1938528"/>
-            <a:ext cx="1920240" cy="256032"/>
-          </a:xfrm>
-          <a:prstGeom prst="rect">
-            <a:avLst/>
-          </a:prstGeom>
-          <a:noFill/>
-          <a:ln/>
-        </p:spPr>
-        <p:txBody>
-          <a:bodyPr wrap="square" lIns="0" tIns="0" rIns="0" bIns="0" rtlCol="0" anchor="ctr"/>
-          <a:lstStyle/>
-          <a:p>
-            <a:pPr indent="0" marL="0">
-              <a:buNone/>
-            </a:pPr>
-            <a:r>
-              <a:rPr lang="en-US" sz="1350" b="1" dirty="0">
-                <a:solidFill>
-                  <a:srgbClr val="283618"/>
-                </a:solidFill>
-                <a:latin typeface="Georgia" pitchFamily="34" charset="0"/>
-                <a:ea typeface="Georgia" pitchFamily="34" charset="-122"/>
-                <a:cs typeface="Georgia" pitchFamily="34" charset="-120"/>
-              </a:rPr>
-              <a:t>Источник</a:t>
-            </a:r>
-            <a:endParaRPr lang="en-US" sz="1350" dirty="0"/>
-          </a:p>
-        </p:txBody>
-      </p:sp>
-      <p:sp>
-        <p:nvSpPr>
-          <p:cNvPr id="12" name="Text 10"/>
-          <p:cNvSpPr/>
-          <p:nvPr/>
-        </p:nvSpPr>
-        <p:spPr>
-          <a:xfrm>
-            <a:off x="2834640" y="1956816"/>
-            <a:ext cx="1536192" cy="274320"/>
-          </a:xfrm>
-          <a:prstGeom prst="rect">
-            <a:avLst/>
-          </a:prstGeom>
-          <a:noFill/>
-          <a:ln/>
-        </p:spPr>
-        <p:txBody>
-          <a:bodyPr wrap="square" lIns="0" tIns="0" rIns="0" bIns="0" rtlCol="0" anchor="ctr"/>
-          <a:lstStyle/>
-          <a:p>
-            <a:pPr algn="r" indent="0" marL="0">
-              <a:buNone/>
-            </a:pPr>
-            <a:r>
-              <a:rPr lang="en-US" sz="950" i="1" dirty="0">
+          <p:cNvPr id="28" name="Text 25"/>
+          <p:cNvSpPr/>
+          <p:nvPr/>
+        </p:nvSpPr>
+        <p:spPr>
+          <a:xfrm>
+            <a:off x="4517136" y="2212848"/>
+            <a:ext cx="3968496" cy="219456"/>
+          </a:xfrm>
+          <a:prstGeom prst="rect">
+            <a:avLst/>
+          </a:prstGeom>
+          <a:noFill/>
+          <a:ln/>
+        </p:spPr>
+        <p:txBody>
+          <a:bodyPr wrap="square" lIns="0" tIns="0" rIns="0" bIns="0" rtlCol="0" anchor="ctr"/>
+          <a:lstStyle/>
+          <a:p>
+            <a:pPr indent="0" marL="0">
+              <a:buNone/>
+            </a:pPr>
+            <a:r>
+              <a:rPr lang="en-US" sz="850" b="1" spc="60" kern="0" dirty="0">
                 <a:solidFill>
                   <a:srgbClr val="BC6C25"/>
                 </a:solidFill>
@@ -9278,22 +9879,22 @@
                 <a:ea typeface="Calibri" pitchFamily="34" charset="-122"/>
                 <a:cs typeface="Calibri" pitchFamily="34" charset="-120"/>
               </a:rPr>
-              <a:t>PostgreSQL 17.10 / 6 таблиц + 1 вью</a:t>
-            </a:r>
-            <a:endParaRPr lang="en-US" sz="950" dirty="0"/>
-          </a:p>
-        </p:txBody>
-      </p:sp>
-      <p:sp>
-        <p:nvSpPr>
-          <p:cNvPr id="13" name="Text 11"/>
-          <p:cNvSpPr/>
-          <p:nvPr/>
-        </p:nvSpPr>
-        <p:spPr>
-          <a:xfrm>
-            <a:off x="1060704" y="2231136"/>
-            <a:ext cx="3291840" cy="749808"/>
+              <a:t>ПОЧЕМУ version() — НЕ ДОКАЗАТЕЛЬСТВО</a:t>
+            </a:r>
+            <a:endParaRPr lang="en-US" sz="850" dirty="0"/>
+          </a:p>
+        </p:txBody>
+      </p:sp>
+      <p:sp>
+        <p:nvSpPr>
+          <p:cNvPr id="29" name="Text 26"/>
+          <p:cNvSpPr/>
+          <p:nvPr/>
+        </p:nvSpPr>
+        <p:spPr>
+          <a:xfrm>
+            <a:off x="4517136" y="2432304"/>
+            <a:ext cx="3931920" cy="804672"/>
           </a:xfrm>
           <a:prstGeom prst="rect">
             <a:avLst/>
@@ -9313,7 +9914,7 @@
               <a:buChar char="•"/>
             </a:pPr>
             <a:r>
-              <a:rPr lang="en-US" sz="1050" dirty="0">
+              <a:rPr lang="en-US" sz="900" dirty="0">
                 <a:solidFill>
                   <a:srgbClr val="283618"/>
                 </a:solidFill>
@@ -9321,9 +9922,9 @@
                 <a:ea typeface="Calibri" pitchFamily="34" charset="-122"/>
                 <a:cs typeface="Calibri" pitchFamily="34" charset="-120"/>
               </a:rPr>
-              <a:t>Название и версия исходной СУБД</a:t>
-            </a:r>
-            <a:endParaRPr lang="en-US" sz="1050" dirty="0"/>
+              <a:t>Q.DataBase отвечает на version() как «PostgreSQL 18.2» и не называет себя.</a:t>
+            </a:r>
+            <a:endParaRPr lang="en-US" sz="900" dirty="0"/>
           </a:p>
           <a:p>
             <a:pPr marL="342900" indent="-342900">
@@ -9334,7 +9935,7 @@
               <a:buChar char="•"/>
             </a:pPr>
             <a:r>
-              <a:rPr lang="en-US" sz="1050" dirty="0">
+              <a:rPr lang="en-US" sz="900" dirty="0">
                 <a:solidFill>
                   <a:srgbClr val="283618"/>
                 </a:solidFill>
@@ -9342,43 +9943,22 @@
                 <a:ea typeface="Calibri" pitchFamily="34" charset="-122"/>
                 <a:cs typeface="Calibri" pitchFamily="34" charset="-120"/>
               </a:rPr>
-              <a:t>Перечень таблиц и представлений</a:t>
-            </a:r>
-            <a:endParaRPr lang="en-US" sz="1050" dirty="0"/>
-          </a:p>
-          <a:p>
-            <a:pPr marL="342900" indent="-342900">
-              <a:spcAft>
-                <a:spcPts val="200"/>
-              </a:spcAft>
-              <a:buSzPct val="100000"/>
-              <a:buChar char="•"/>
-            </a:pPr>
-            <a:r>
-              <a:rPr lang="en-US" sz="1050" dirty="0">
-                <a:solidFill>
-                  <a:srgbClr val="283618"/>
-                </a:solidFill>
-                <a:latin typeface="Calibri" pitchFamily="34" charset="0"/>
-                <a:ea typeface="Calibri" pitchFamily="34" charset="-122"/>
-                <a:cs typeface="Calibri" pitchFamily="34" charset="-120"/>
-              </a:rPr>
-              <a:t>Контрольное число строк из журнала</a:t>
-            </a:r>
-            <a:endParaRPr lang="en-US" sz="1050" dirty="0"/>
-          </a:p>
-        </p:txBody>
-      </p:sp>
-      <p:sp>
-        <p:nvSpPr>
-          <p:cNvPr id="14" name="Shape 12"/>
-          <p:cNvSpPr/>
-          <p:nvPr/>
-        </p:nvSpPr>
-        <p:spPr>
-          <a:xfrm>
-            <a:off x="4681728" y="1847088"/>
-            <a:ext cx="3913632" cy="1225296"/>
+              <a:t>Поэтому идентификация сделана по каталогу: qdb_procs, dgrid_procs, 20 настроек qdb_*, подключённые pg_cron, pg_stat_statements, pg_stat_kcache. В ванильном PostgreSQL этого нет.</a:t>
+            </a:r>
+            <a:endParaRPr lang="en-US" sz="900" dirty="0"/>
+          </a:p>
+        </p:txBody>
+      </p:sp>
+      <p:sp>
+        <p:nvSpPr>
+          <p:cNvPr id="30" name="Shape 27"/>
+          <p:cNvSpPr/>
+          <p:nvPr/>
+        </p:nvSpPr>
+        <p:spPr>
+          <a:xfrm>
+            <a:off x="4334256" y="3383280"/>
+            <a:ext cx="4242816" cy="1133856"/>
           </a:xfrm>
           <a:prstGeom prst="rect">
             <a:avLst/>
@@ -9390,20 +9970,20 @@
             <a:solidFill>
               <a:srgbClr val="606C38"/>
             </a:solidFill>
-            <a:prstDash val="dash"/>
+            <a:prstDash val="solid"/>
           </a:ln>
         </p:spPr>
       </p:sp>
       <p:sp>
         <p:nvSpPr>
-          <p:cNvPr id="15" name="Shape 13"/>
-          <p:cNvSpPr/>
-          <p:nvPr/>
-        </p:nvSpPr>
-        <p:spPr>
-          <a:xfrm>
-            <a:off x="4681728" y="1847088"/>
-            <a:ext cx="365760" cy="1225296"/>
+          <p:cNvPr id="31" name="Shape 28"/>
+          <p:cNvSpPr/>
+          <p:nvPr/>
+        </p:nvSpPr>
+        <p:spPr>
+          <a:xfrm>
+            <a:off x="4334256" y="3383280"/>
+            <a:ext cx="54864" cy="1133856"/>
           </a:xfrm>
           <a:prstGeom prst="rect">
             <a:avLst/>
@@ -9416,131 +9996,53 @@
       </p:sp>
       <p:sp>
         <p:nvSpPr>
-          <p:cNvPr id="16" name="Text 14"/>
-          <p:cNvSpPr/>
-          <p:nvPr/>
-        </p:nvSpPr>
-        <p:spPr>
-          <a:xfrm>
-            <a:off x="4681728" y="1847088"/>
-            <a:ext cx="365760" cy="1225296"/>
-          </a:xfrm>
-          <a:prstGeom prst="rect">
-            <a:avLst/>
-          </a:prstGeom>
-          <a:noFill/>
-          <a:ln/>
-        </p:spPr>
-        <p:txBody>
-          <a:bodyPr wrap="square" lIns="0" tIns="0" rIns="0" bIns="0" rtlCol="0" anchor="ctr"/>
-          <a:lstStyle/>
-          <a:p>
-            <a:pPr algn="ctr" indent="0" marL="0">
-              <a:buNone/>
-            </a:pPr>
-            <a:r>
-              <a:rPr lang="en-US" sz="1800" b="1" dirty="0">
-                <a:solidFill>
-                  <a:srgbClr val="FEFAE0"/>
-                </a:solidFill>
-                <a:latin typeface="Georgia" pitchFamily="34" charset="0"/>
-                <a:ea typeface="Georgia" pitchFamily="34" charset="-122"/>
-                <a:cs typeface="Georgia" pitchFamily="34" charset="-120"/>
-              </a:rPr>
-              <a:t>2</a:t>
-            </a:r>
-            <a:endParaRPr lang="en-US" sz="1800" dirty="0"/>
-          </a:p>
-        </p:txBody>
-      </p:sp>
-      <p:sp>
-        <p:nvSpPr>
-          <p:cNvPr id="17" name="Text 15"/>
-          <p:cNvSpPr/>
-          <p:nvPr/>
-        </p:nvSpPr>
-        <p:spPr>
-          <a:xfrm>
-            <a:off x="5193792" y="1938528"/>
-            <a:ext cx="1920240" cy="256032"/>
-          </a:xfrm>
-          <a:prstGeom prst="rect">
-            <a:avLst/>
-          </a:prstGeom>
-          <a:noFill/>
-          <a:ln/>
-        </p:spPr>
-        <p:txBody>
-          <a:bodyPr wrap="square" lIns="0" tIns="0" rIns="0" bIns="0" rtlCol="0" anchor="ctr"/>
-          <a:lstStyle/>
-          <a:p>
-            <a:pPr indent="0" marL="0">
-              <a:buNone/>
-            </a:pPr>
-            <a:r>
-              <a:rPr lang="en-US" sz="1350" b="1" dirty="0">
+          <p:cNvPr id="32" name="Text 29"/>
+          <p:cNvSpPr/>
+          <p:nvPr/>
+        </p:nvSpPr>
+        <p:spPr>
+          <a:xfrm>
+            <a:off x="4517136" y="3438144"/>
+            <a:ext cx="3968496" cy="219456"/>
+          </a:xfrm>
+          <a:prstGeom prst="rect">
+            <a:avLst/>
+          </a:prstGeom>
+          <a:noFill/>
+          <a:ln/>
+        </p:spPr>
+        <p:txBody>
+          <a:bodyPr wrap="square" lIns="0" tIns="0" rIns="0" bIns="0" rtlCol="0" anchor="ctr"/>
+          <a:lstStyle/>
+          <a:p>
+            <a:pPr indent="0" marL="0">
+              <a:buNone/>
+            </a:pPr>
+            <a:r>
+              <a:rPr lang="en-US" sz="850" b="1" spc="60" kern="0" dirty="0">
                 <a:solidFill>
                   <a:srgbClr val="283618"/>
-                </a:solidFill>
-                <a:latin typeface="Georgia" pitchFamily="34" charset="0"/>
-                <a:ea typeface="Georgia" pitchFamily="34" charset="-122"/>
-                <a:cs typeface="Georgia" pitchFamily="34" charset="-120"/>
-              </a:rPr>
-              <a:t>Перенос</a:t>
-            </a:r>
-            <a:endParaRPr lang="en-US" sz="1350" dirty="0"/>
-          </a:p>
-        </p:txBody>
-      </p:sp>
-      <p:sp>
-        <p:nvSpPr>
-          <p:cNvPr id="18" name="Text 16"/>
-          <p:cNvSpPr/>
-          <p:nvPr/>
-        </p:nvSpPr>
-        <p:spPr>
-          <a:xfrm>
-            <a:off x="6967728" y="1956816"/>
-            <a:ext cx="1536192" cy="274320"/>
-          </a:xfrm>
-          <a:prstGeom prst="rect">
-            <a:avLst/>
-          </a:prstGeom>
-          <a:noFill/>
-          <a:ln/>
-        </p:spPr>
-        <p:txBody>
-          <a:bodyPr wrap="square" lIns="0" tIns="0" rIns="0" bIns="0" rtlCol="0" anchor="ctr"/>
-          <a:lstStyle/>
-          <a:p>
-            <a:pPr algn="r" indent="0" marL="0">
-              <a:buNone/>
-            </a:pPr>
-            <a:r>
-              <a:rPr lang="en-US" sz="950" i="1" dirty="0">
-                <a:solidFill>
-                  <a:srgbClr val="BC6C25"/>
                 </a:solidFill>
                 <a:latin typeface="Calibri" pitchFamily="34" charset="0"/>
                 <a:ea typeface="Calibri" pitchFamily="34" charset="-122"/>
                 <a:cs typeface="Calibri" pitchFamily="34" charset="-120"/>
               </a:rPr>
-              <a:t>команда + дата + OK</a:t>
-            </a:r>
-            <a:endParaRPr lang="en-US" sz="950" dirty="0"/>
-          </a:p>
-        </p:txBody>
-      </p:sp>
-      <p:sp>
-        <p:nvSpPr>
-          <p:cNvPr id="19" name="Text 17"/>
-          <p:cNvSpPr/>
-          <p:nvPr/>
-        </p:nvSpPr>
-        <p:spPr>
-          <a:xfrm>
-            <a:off x="5193792" y="2231136"/>
-            <a:ext cx="3291840" cy="749808"/>
+              <a:t>ЧТО ДЕЙСТВИТЕЛЬНО ОТЛИЧАЕТСЯ — И КАК УЧТЕНО</a:t>
+            </a:r>
+            <a:endParaRPr lang="en-US" sz="850" dirty="0"/>
+          </a:p>
+        </p:txBody>
+      </p:sp>
+      <p:sp>
+        <p:nvSpPr>
+          <p:cNvPr id="33" name="Text 30"/>
+          <p:cNvSpPr/>
+          <p:nvPr/>
+        </p:nvSpPr>
+        <p:spPr>
+          <a:xfrm>
+            <a:off x="4517136" y="3657600"/>
+            <a:ext cx="3931920" cy="804672"/>
           </a:xfrm>
           <a:prstGeom prst="rect">
             <a:avLst/>
@@ -9560,7 +10062,7 @@
               <a:buChar char="•"/>
             </a:pPr>
             <a:r>
-              <a:rPr lang="en-US" sz="1050" dirty="0">
+              <a:rPr lang="en-US" sz="900" dirty="0">
                 <a:solidFill>
                   <a:srgbClr val="283618"/>
                 </a:solidFill>
@@ -9568,9 +10070,9 @@
                 <a:ea typeface="Calibri" pitchFamily="34" charset="-122"/>
                 <a:cs typeface="Calibri" pitchFamily="34" charset="-120"/>
               </a:rPr>
-              <a:t>Выполненная команда или журнал</a:t>
-            </a:r>
-            <a:endParaRPr lang="en-US" sz="1050" dirty="0"/>
+              <a:t>Метка времени: QDB хранит миллисекунды, PostgreSQL — микросекунды. Сверка идёт по date_trunc(«milliseconds») и EXTRACT(EPOCH), иначе получается ложное расхождение.</a:t>
+            </a:r>
+            <a:endParaRPr lang="en-US" sz="900" dirty="0"/>
           </a:p>
           <a:p>
             <a:pPr marL="342900" indent="-342900">
@@ -9581,7 +10083,7 @@
               <a:buChar char="•"/>
             </a:pPr>
             <a:r>
-              <a:rPr lang="en-US" sz="1050" dirty="0">
+              <a:rPr lang="en-US" sz="900" dirty="0">
                 <a:solidFill>
                   <a:srgbClr val="283618"/>
                 </a:solidFill>
@@ -9589,563 +10091,9 @@
                 <a:ea typeface="Calibri" pitchFamily="34" charset="-122"/>
                 <a:cs typeface="Calibri" pitchFamily="34" charset="-120"/>
               </a:rPr>
-              <a:t>Дата и результат</a:t>
-            </a:r>
-            <a:endParaRPr lang="en-US" sz="1050" dirty="0"/>
-          </a:p>
-          <a:p>
-            <a:pPr marL="342900" indent="-342900">
-              <a:spcAft>
-                <a:spcPts val="200"/>
-              </a:spcAft>
-              <a:buSzPct val="100000"/>
-              <a:buChar char="•"/>
-            </a:pPr>
-            <a:r>
-              <a:rPr lang="en-US" sz="1050" dirty="0">
-                <a:solidFill>
-                  <a:srgbClr val="283618"/>
-                </a:solidFill>
-                <a:latin typeface="Calibri" pitchFamily="34" charset="0"/>
-                <a:ea typeface="Calibri" pitchFamily="34" charset="-122"/>
-                <a:cs typeface="Calibri" pitchFamily="34" charset="-120"/>
-              </a:rPr>
-              <a:t>Без учётных данных и секретов</a:t>
-            </a:r>
-            <a:endParaRPr lang="en-US" sz="1050" dirty="0"/>
-          </a:p>
-        </p:txBody>
-      </p:sp>
-      <p:sp>
-        <p:nvSpPr>
-          <p:cNvPr id="20" name="Shape 18"/>
-          <p:cNvSpPr/>
-          <p:nvPr/>
-        </p:nvSpPr>
-        <p:spPr>
-          <a:xfrm>
-            <a:off x="548640" y="3236976"/>
-            <a:ext cx="3913632" cy="1225296"/>
-          </a:xfrm>
-          <a:prstGeom prst="rect">
-            <a:avLst/>
-          </a:prstGeom>
-          <a:solidFill>
-            <a:srgbClr val="FEFAE0"/>
-          </a:solidFill>
-          <a:ln w="12700">
-            <a:solidFill>
-              <a:srgbClr val="606C38"/>
-            </a:solidFill>
-            <a:prstDash val="dash"/>
-          </a:ln>
-        </p:spPr>
-      </p:sp>
-      <p:sp>
-        <p:nvSpPr>
-          <p:cNvPr id="21" name="Shape 19"/>
-          <p:cNvSpPr/>
-          <p:nvPr/>
-        </p:nvSpPr>
-        <p:spPr>
-          <a:xfrm>
-            <a:off x="548640" y="3236976"/>
-            <a:ext cx="365760" cy="1225296"/>
-          </a:xfrm>
-          <a:prstGeom prst="rect">
-            <a:avLst/>
-          </a:prstGeom>
-          <a:solidFill>
-            <a:srgbClr val="283618"/>
-          </a:solidFill>
-          <a:ln/>
-        </p:spPr>
-      </p:sp>
-      <p:sp>
-        <p:nvSpPr>
-          <p:cNvPr id="22" name="Text 20"/>
-          <p:cNvSpPr/>
-          <p:nvPr/>
-        </p:nvSpPr>
-        <p:spPr>
-          <a:xfrm>
-            <a:off x="548640" y="3236976"/>
-            <a:ext cx="365760" cy="1225296"/>
-          </a:xfrm>
-          <a:prstGeom prst="rect">
-            <a:avLst/>
-          </a:prstGeom>
-          <a:noFill/>
-          <a:ln/>
-        </p:spPr>
-        <p:txBody>
-          <a:bodyPr wrap="square" lIns="0" tIns="0" rIns="0" bIns="0" rtlCol="0" anchor="ctr"/>
-          <a:lstStyle/>
-          <a:p>
-            <a:pPr algn="ctr" indent="0" marL="0">
-              <a:buNone/>
-            </a:pPr>
-            <a:r>
-              <a:rPr lang="en-US" sz="1800" b="1" dirty="0">
-                <a:solidFill>
-                  <a:srgbClr val="FEFAE0"/>
-                </a:solidFill>
-                <a:latin typeface="Georgia" pitchFamily="34" charset="0"/>
-                <a:ea typeface="Georgia" pitchFamily="34" charset="-122"/>
-                <a:cs typeface="Georgia" pitchFamily="34" charset="-120"/>
-              </a:rPr>
-              <a:t>3</a:t>
-            </a:r>
-            <a:endParaRPr lang="en-US" sz="1800" dirty="0"/>
-          </a:p>
-        </p:txBody>
-      </p:sp>
-      <p:sp>
-        <p:nvSpPr>
-          <p:cNvPr id="23" name="Text 21"/>
-          <p:cNvSpPr/>
-          <p:nvPr/>
-        </p:nvSpPr>
-        <p:spPr>
-          <a:xfrm>
-            <a:off x="1060704" y="3328416"/>
-            <a:ext cx="1920240" cy="256032"/>
-          </a:xfrm>
-          <a:prstGeom prst="rect">
-            <a:avLst/>
-          </a:prstGeom>
-          <a:noFill/>
-          <a:ln/>
-        </p:spPr>
-        <p:txBody>
-          <a:bodyPr wrap="square" lIns="0" tIns="0" rIns="0" bIns="0" rtlCol="0" anchor="ctr"/>
-          <a:lstStyle/>
-          <a:p>
-            <a:pPr indent="0" marL="0">
-              <a:buNone/>
-            </a:pPr>
-            <a:r>
-              <a:rPr lang="en-US" sz="1350" b="1" dirty="0">
-                <a:solidFill>
-                  <a:srgbClr val="283618"/>
-                </a:solidFill>
-                <a:latin typeface="Georgia" pitchFamily="34" charset="0"/>
-                <a:ea typeface="Georgia" pitchFamily="34" charset="-122"/>
-                <a:cs typeface="Georgia" pitchFamily="34" charset="-120"/>
-              </a:rPr>
-              <a:t>Цель</a:t>
-            </a:r>
-            <a:endParaRPr lang="en-US" sz="1350" dirty="0"/>
-          </a:p>
-        </p:txBody>
-      </p:sp>
-      <p:sp>
-        <p:nvSpPr>
-          <p:cNvPr id="24" name="Text 22"/>
-          <p:cNvSpPr/>
-          <p:nvPr/>
-        </p:nvSpPr>
-        <p:spPr>
-          <a:xfrm>
-            <a:off x="2834640" y="3346704"/>
-            <a:ext cx="1536192" cy="274320"/>
-          </a:xfrm>
-          <a:prstGeom prst="rect">
-            <a:avLst/>
-          </a:prstGeom>
-          <a:noFill/>
-          <a:ln/>
-        </p:spPr>
-        <p:txBody>
-          <a:bodyPr wrap="square" lIns="0" tIns="0" rIns="0" bIns="0" rtlCol="0" anchor="ctr"/>
-          <a:lstStyle/>
-          <a:p>
-            <a:pPr algn="r" indent="0" marL="0">
-              <a:buNone/>
-            </a:pPr>
-            <a:r>
-              <a:rPr lang="en-US" sz="950" i="1" dirty="0">
-                <a:solidFill>
-                  <a:srgbClr val="BC6C25"/>
-                </a:solidFill>
-                <a:latin typeface="Calibri" pitchFamily="34" charset="0"/>
-                <a:ea typeface="Calibri" pitchFamily="34" charset="-122"/>
-                <a:cs typeface="Calibri" pitchFamily="34" charset="-120"/>
-              </a:rPr>
-              <a:t>Digital Q.DataBase, сборка ...</a:t>
-            </a:r>
-            <a:endParaRPr lang="en-US" sz="950" dirty="0"/>
-          </a:p>
-        </p:txBody>
-      </p:sp>
-      <p:sp>
-        <p:nvSpPr>
-          <p:cNvPr id="25" name="Text 23"/>
-          <p:cNvSpPr/>
-          <p:nvPr/>
-        </p:nvSpPr>
-        <p:spPr>
-          <a:xfrm>
-            <a:off x="1060704" y="3621024"/>
-            <a:ext cx="3291840" cy="749808"/>
-          </a:xfrm>
-          <a:prstGeom prst="rect">
-            <a:avLst/>
-          </a:prstGeom>
-          <a:noFill/>
-          <a:ln/>
-        </p:spPr>
-        <p:txBody>
-          <a:bodyPr wrap="square" lIns="0" tIns="0" rIns="0" bIns="0" rtlCol="0" anchor="ctr"/>
-          <a:lstStyle/>
-          <a:p>
-            <a:pPr marL="342900" indent="-342900">
-              <a:spcAft>
-                <a:spcPts val="200"/>
-              </a:spcAft>
-              <a:buSzPct val="100000"/>
-              <a:buChar char="•"/>
-            </a:pPr>
-            <a:r>
-              <a:rPr lang="en-US" sz="1050" dirty="0">
-                <a:solidFill>
-                  <a:srgbClr val="283618"/>
-                </a:solidFill>
-                <a:latin typeface="Calibri" pitchFamily="34" charset="0"/>
-                <a:ea typeface="Calibri" pitchFamily="34" charset="-122"/>
-                <a:cs typeface="Calibri" pitchFamily="34" charset="-120"/>
-              </a:rPr>
-              <a:t>Подтверждённое подключение</a:t>
-            </a:r>
-            <a:endParaRPr lang="en-US" sz="1050" dirty="0"/>
-          </a:p>
-          <a:p>
-            <a:pPr marL="342900" indent="-342900">
-              <a:spcAft>
-                <a:spcPts val="200"/>
-              </a:spcAft>
-              <a:buSzPct val="100000"/>
-              <a:buChar char="•"/>
-            </a:pPr>
-            <a:r>
-              <a:rPr lang="en-US" sz="1050" dirty="0">
-                <a:solidFill>
-                  <a:srgbClr val="283618"/>
-                </a:solidFill>
-                <a:latin typeface="Calibri" pitchFamily="34" charset="0"/>
-                <a:ea typeface="Calibri" pitchFamily="34" charset="-122"/>
-                <a:cs typeface="Calibri" pitchFamily="34" charset="-120"/>
-              </a:rPr>
-              <a:t>Те же записи и сохранённые связи</a:t>
-            </a:r>
-            <a:endParaRPr lang="en-US" sz="1050" dirty="0"/>
-          </a:p>
-          <a:p>
-            <a:pPr marL="342900" indent="-342900">
-              <a:spcAft>
-                <a:spcPts val="200"/>
-              </a:spcAft>
-              <a:buSzPct val="100000"/>
-              <a:buChar char="•"/>
-            </a:pPr>
-            <a:r>
-              <a:rPr lang="en-US" sz="1050" dirty="0">
-                <a:solidFill>
-                  <a:srgbClr val="283618"/>
-                </a:solidFill>
-                <a:latin typeface="Calibri" pitchFamily="34" charset="0"/>
-                <a:ea typeface="Calibri" pitchFamily="34" charset="-122"/>
-                <a:cs typeface="Calibri" pitchFamily="34" charset="-120"/>
-              </a:rPr>
-              <a:t>Сведения о сборке из администрирования</a:t>
-            </a:r>
-            <a:endParaRPr lang="en-US" sz="1050" dirty="0"/>
-          </a:p>
-        </p:txBody>
-      </p:sp>
-      <p:sp>
-        <p:nvSpPr>
-          <p:cNvPr id="26" name="Shape 24"/>
-          <p:cNvSpPr/>
-          <p:nvPr/>
-        </p:nvSpPr>
-        <p:spPr>
-          <a:xfrm>
-            <a:off x="4681728" y="3236976"/>
-            <a:ext cx="3913632" cy="1225296"/>
-          </a:xfrm>
-          <a:prstGeom prst="rect">
-            <a:avLst/>
-          </a:prstGeom>
-          <a:solidFill>
-            <a:srgbClr val="FEFAE0"/>
-          </a:solidFill>
-          <a:ln w="12700">
-            <a:solidFill>
-              <a:srgbClr val="606C38"/>
-            </a:solidFill>
-            <a:prstDash val="dash"/>
-          </a:ln>
-        </p:spPr>
-      </p:sp>
-      <p:sp>
-        <p:nvSpPr>
-          <p:cNvPr id="27" name="Shape 25"/>
-          <p:cNvSpPr/>
-          <p:nvPr/>
-        </p:nvSpPr>
-        <p:spPr>
-          <a:xfrm>
-            <a:off x="4681728" y="3236976"/>
-            <a:ext cx="365760" cy="1225296"/>
-          </a:xfrm>
-          <a:prstGeom prst="rect">
-            <a:avLst/>
-          </a:prstGeom>
-          <a:solidFill>
-            <a:srgbClr val="283618"/>
-          </a:solidFill>
-          <a:ln/>
-        </p:spPr>
-      </p:sp>
-      <p:sp>
-        <p:nvSpPr>
-          <p:cNvPr id="28" name="Text 26"/>
-          <p:cNvSpPr/>
-          <p:nvPr/>
-        </p:nvSpPr>
-        <p:spPr>
-          <a:xfrm>
-            <a:off x="4681728" y="3236976"/>
-            <a:ext cx="365760" cy="1225296"/>
-          </a:xfrm>
-          <a:prstGeom prst="rect">
-            <a:avLst/>
-          </a:prstGeom>
-          <a:noFill/>
-          <a:ln/>
-        </p:spPr>
-        <p:txBody>
-          <a:bodyPr wrap="square" lIns="0" tIns="0" rIns="0" bIns="0" rtlCol="0" anchor="ctr"/>
-          <a:lstStyle/>
-          <a:p>
-            <a:pPr algn="ctr" indent="0" marL="0">
-              <a:buNone/>
-            </a:pPr>
-            <a:r>
-              <a:rPr lang="en-US" sz="1800" b="1" dirty="0">
-                <a:solidFill>
-                  <a:srgbClr val="FEFAE0"/>
-                </a:solidFill>
-                <a:latin typeface="Georgia" pitchFamily="34" charset="0"/>
-                <a:ea typeface="Georgia" pitchFamily="34" charset="-122"/>
-                <a:cs typeface="Georgia" pitchFamily="34" charset="-120"/>
-              </a:rPr>
-              <a:t>4</a:t>
-            </a:r>
-            <a:endParaRPr lang="en-US" sz="1800" dirty="0"/>
-          </a:p>
-        </p:txBody>
-      </p:sp>
-      <p:sp>
-        <p:nvSpPr>
-          <p:cNvPr id="29" name="Text 27"/>
-          <p:cNvSpPr/>
-          <p:nvPr/>
-        </p:nvSpPr>
-        <p:spPr>
-          <a:xfrm>
-            <a:off x="5193792" y="3328416"/>
-            <a:ext cx="1920240" cy="256032"/>
-          </a:xfrm>
-          <a:prstGeom prst="rect">
-            <a:avLst/>
-          </a:prstGeom>
-          <a:noFill/>
-          <a:ln/>
-        </p:spPr>
-        <p:txBody>
-          <a:bodyPr wrap="square" lIns="0" tIns="0" rIns="0" bIns="0" rtlCol="0" anchor="ctr"/>
-          <a:lstStyle/>
-          <a:p>
-            <a:pPr indent="0" marL="0">
-              <a:buNone/>
-            </a:pPr>
-            <a:r>
-              <a:rPr lang="en-US" sz="1350" b="1" dirty="0">
-                <a:solidFill>
-                  <a:srgbClr val="283618"/>
-                </a:solidFill>
-                <a:latin typeface="Georgia" pitchFamily="34" charset="0"/>
-                <a:ea typeface="Georgia" pitchFamily="34" charset="-122"/>
-                <a:cs typeface="Georgia" pitchFamily="34" charset="-120"/>
-              </a:rPr>
-              <a:t>После переноса</a:t>
-            </a:r>
-            <a:endParaRPr lang="en-US" sz="1350" dirty="0"/>
-          </a:p>
-        </p:txBody>
-      </p:sp>
-      <p:sp>
-        <p:nvSpPr>
-          <p:cNvPr id="30" name="Text 28"/>
-          <p:cNvSpPr/>
-          <p:nvPr/>
-        </p:nvSpPr>
-        <p:spPr>
-          <a:xfrm>
-            <a:off x="6967728" y="3346704"/>
-            <a:ext cx="1536192" cy="274320"/>
-          </a:xfrm>
-          <a:prstGeom prst="rect">
-            <a:avLst/>
-          </a:prstGeom>
-          <a:noFill/>
-          <a:ln/>
-        </p:spPr>
-        <p:txBody>
-          <a:bodyPr wrap="square" lIns="0" tIns="0" rIns="0" bIns="0" rtlCol="0" anchor="ctr"/>
-          <a:lstStyle/>
-          <a:p>
-            <a:pPr algn="r" indent="0" marL="0">
-              <a:buNone/>
-            </a:pPr>
-            <a:r>
-              <a:rPr lang="en-US" sz="950" i="1" dirty="0">
-                <a:solidFill>
-                  <a:srgbClr val="BC6C25"/>
-                </a:solidFill>
-                <a:latin typeface="Calibri" pitchFamily="34" charset="0"/>
-                <a:ea typeface="Calibri" pitchFamily="34" charset="-122"/>
-                <a:cs typeface="Calibri" pitchFamily="34" charset="-120"/>
-              </a:rPr>
-              <a:t>D0/D1/D2 на целевой базе</a:t>
-            </a:r>
-            <a:endParaRPr lang="en-US" sz="950" dirty="0"/>
-          </a:p>
-        </p:txBody>
-      </p:sp>
-      <p:sp>
-        <p:nvSpPr>
-          <p:cNvPr id="31" name="Text 29"/>
-          <p:cNvSpPr/>
-          <p:nvPr/>
-        </p:nvSpPr>
-        <p:spPr>
-          <a:xfrm>
-            <a:off x="5193792" y="3621024"/>
-            <a:ext cx="3291840" cy="749808"/>
-          </a:xfrm>
-          <a:prstGeom prst="rect">
-            <a:avLst/>
-          </a:prstGeom>
-          <a:noFill/>
-          <a:ln/>
-        </p:spPr>
-        <p:txBody>
-          <a:bodyPr wrap="square" lIns="0" tIns="0" rIns="0" bIns="0" rtlCol="0" anchor="ctr"/>
-          <a:lstStyle/>
-          <a:p>
-            <a:pPr marL="342900" indent="-342900">
-              <a:spcAft>
-                <a:spcPts val="200"/>
-              </a:spcAft>
-              <a:buSzPct val="100000"/>
-              <a:buChar char="•"/>
-            </a:pPr>
-            <a:r>
-              <a:rPr lang="en-US" sz="1050" dirty="0">
-                <a:solidFill>
-                  <a:srgbClr val="283618"/>
-                </a:solidFill>
-                <a:latin typeface="Calibri" pitchFamily="34" charset="0"/>
-                <a:ea typeface="Calibri" pitchFamily="34" charset="-122"/>
-                <a:cs typeface="Calibri" pitchFamily="34" charset="-120"/>
-              </a:rPr>
-              <a:t>Сценарий резервирования</a:t>
-            </a:r>
-            <a:endParaRPr lang="en-US" sz="1050" dirty="0"/>
-          </a:p>
-          <a:p>
-            <a:pPr marL="342900" indent="-342900">
-              <a:spcAft>
-                <a:spcPts val="200"/>
-              </a:spcAft>
-              <a:buSzPct val="100000"/>
-              <a:buChar char="•"/>
-            </a:pPr>
-            <a:r>
-              <a:rPr lang="en-US" sz="1050" dirty="0">
-                <a:solidFill>
-                  <a:srgbClr val="283618"/>
-                </a:solidFill>
-                <a:latin typeface="Calibri" pitchFamily="34" charset="0"/>
-                <a:ea typeface="Calibri" pitchFamily="34" charset="-122"/>
-                <a:cs typeface="Calibri" pitchFamily="34" charset="-120"/>
-              </a:rPr>
-              <a:t>Сценарий подтверждения</a:t>
-            </a:r>
-            <a:endParaRPr lang="en-US" sz="1050" dirty="0"/>
-          </a:p>
-          <a:p>
-            <a:pPr marL="342900" indent="-342900">
-              <a:spcAft>
-                <a:spcPts val="200"/>
-              </a:spcAft>
-              <a:buSzPct val="100000"/>
-              <a:buChar char="•"/>
-            </a:pPr>
-            <a:r>
-              <a:rPr lang="en-US" sz="1050" dirty="0">
-                <a:solidFill>
-                  <a:srgbClr val="283618"/>
-                </a:solidFill>
-                <a:latin typeface="Calibri" pitchFamily="34" charset="0"/>
-                <a:ea typeface="Calibri" pitchFamily="34" charset="-122"/>
-                <a:cs typeface="Calibri" pitchFamily="34" charset="-120"/>
-              </a:rPr>
-              <a:t>Счётчики D0 -&gt; D1 -&gt; D2 совпали</a:t>
-            </a:r>
-            <a:endParaRPr lang="en-US" sz="1050" dirty="0"/>
-          </a:p>
-        </p:txBody>
-      </p:sp>
-      <p:sp>
-        <p:nvSpPr>
-          <p:cNvPr id="32" name="Text 30"/>
-          <p:cNvSpPr/>
-          <p:nvPr/>
-        </p:nvSpPr>
-        <p:spPr>
-          <a:xfrm>
-            <a:off x="548640" y="4626864"/>
-            <a:ext cx="7680960" cy="274320"/>
-          </a:xfrm>
-          <a:prstGeom prst="rect">
-            <a:avLst/>
-          </a:prstGeom>
-          <a:noFill/>
-          <a:ln/>
-        </p:spPr>
-        <p:txBody>
-          <a:bodyPr wrap="square" lIns="0" tIns="0" rIns="0" bIns="0" rtlCol="0" anchor="ctr"/>
-          <a:lstStyle/>
-          <a:p>
-            <a:pPr indent="0" marL="0">
-              <a:buNone/>
-            </a:pPr>
-            <a:r>
-              <a:rPr lang="en-US" sz="1000" i="1" dirty="0">
-                <a:solidFill>
-                  <a:srgbClr val="606C38"/>
-                </a:solidFill>
-                <a:latin typeface="Calibri" pitchFamily="34" charset="0"/>
-                <a:ea typeface="Calibri" pitchFamily="34" charset="-122"/>
-                <a:cs typeface="Calibri" pitchFamily="34" charset="-120"/>
-              </a:rPr>
-              <a:t>Запрещено называть неподтверждённые цифры. SELECT version() сам по себе недостаточен как доказательство.</a:t>
-            </a:r>
-            <a:endParaRPr lang="en-US" sz="1000" dirty="0"/>
+              <a:t>Ошибка UNIQUE приходит по-русски. Признак дубликата ловится по SQLSTATE 23505, а не по английскому тексту.</a:t>
+            </a:r>
+            <a:endParaRPr lang="en-US" sz="900" dirty="0"/>
           </a:p>
         </p:txBody>
       </p:sp>
@@ -10468,7 +10416,7 @@
                 <a:ea typeface="Calibri" pitchFamily="34" charset="-122"/>
                 <a:cs typeface="Calibri" pitchFamily="34" charset="-120"/>
               </a:rPr>
-              <a:t>[Показать готовую потребность, предложение 5 упаковок, подтверждение 3, результат: свободно 17.]</a:t>
+              <a:t>[Показать кадры D0 → D1 → приёмка: обещано 5, принято 3, свободно 47.]</a:t>
             </a:r>
             <a:endParaRPr lang="en-US" sz="1100" dirty="0"/>
           </a:p>
@@ -12226,7 +12174,7 @@
                 <a:ea typeface="Calibri" pitchFamily="34" charset="-122"/>
                 <a:cs typeface="Calibri" pitchFamily="34" charset="-120"/>
               </a:rPr>
-              <a:t>Живая демонстрация</a:t>
+              <a:t>От заявки до приёмки (кадры D0 → D1 → D2)</a:t>
             </a:r>
             <a:endParaRPr lang="en-US" sz="1050" dirty="0"/>
           </a:p>

--- a/slides/output/lapa-ryadom-pitch.pptx
+++ b/slides/output/lapa-ryadom-pitch.pptx
@@ -12174,7 +12174,7 @@
                 <a:ea typeface="Calibri" pitchFamily="34" charset="-122"/>
                 <a:cs typeface="Calibri" pitchFamily="34" charset="-120"/>
               </a:rPr>
-              <a:t>От заявки до приёмки (кадры D0 → D1 → D2)</a:t>
+              <a:t>От заявки до приёмки (кадры D0 → D2)</a:t>
             </a:r>
             <a:endParaRPr lang="en-US" sz="1050" dirty="0"/>
           </a:p>

--- a/slides/output/lapa-ryadom-pitch.pptx
+++ b/slides/output/lapa-ryadom-pitch.pptx
@@ -12,9 +12,10 @@
     <p:sldId id="260" r:id="rId6"/>
     <p:sldId id="261" r:id="rId7"/>
     <p:sldId id="262" r:id="rId8"/>
+    <p:sldId id="263" r:id="rId9"/>
   </p:sldIdLst>
   <p:notesMasterIdLst>
-    <p:notesMasterId r:id="rId9"/>
+    <p:notesMasterId r:id="rId10"/>
   </p:notesMasterIdLst>
   <p:sldSz cx="9144000" cy="5143500"/>
   <p:notesSz cx="5143500" cy="9144000"/>
@@ -1060,6 +1061,94 @@
             <a:fld id="{F7021451-1387-4CA6-816F-3879F97B5CBC}" type="slidenum">
               <a:rPr lang="en-US"/>
               <a:t>7</a:t>
+            </a:fld>
+            <a:endParaRPr lang="en-US"/>
+          </a:p>
+        </p:txBody>
+      </p:sp>
+    </p:spTree>
+    <p:extLst>
+      <p:ext uri="{BB962C8B-B14F-4D97-AF65-F5344CB8AC3E}">
+        <p14:creationId xmlns:p14="http://schemas.microsoft.com/office/powerpoint/2010/main" val="1024086991"/>
+      </p:ext>
+    </p:extLst>
+  </p:cSld>
+  <p:clrMapOvr>
+    <a:masterClrMapping/>
+  </p:clrMapOvr>
+</p:notes>
+</file>
+
+<file path=ppt/notesSlides/notesSlide8.xml><?xml version="1.0" encoding="utf-8"?>
+<p:notes xmlns:a="http://schemas.openxmlformats.org/drawingml/2006/main" xmlns:r="http://schemas.openxmlformats.org/officeDocument/2006/relationships" xmlns:p="http://schemas.openxmlformats.org/presentationml/2006/main">
+  <p:cSld>
+    <p:spTree>
+      <p:nvGrpSpPr>
+        <p:cNvPr id="1" name=""/>
+        <p:cNvGrpSpPr/>
+        <p:nvPr/>
+      </p:nvGrpSpPr>
+      <p:grpSpPr>
+        <a:xfrm>
+          <a:off x="0" y="0"/>
+          <a:ext cx="0" cy="0"/>
+          <a:chOff x="0" y="0"/>
+          <a:chExt cx="0" cy="0"/>
+        </a:xfrm>
+      </p:grpSpPr>
+      <p:sp>
+        <p:nvSpPr>
+          <p:cNvPr id="2" name="Slide Image Placeholder 1"/>
+          <p:cNvSpPr>
+            <a:spLocks noGrp="1" noRot="1" noChangeAspect="1"/>
+          </p:cNvSpPr>
+          <p:nvPr>
+            <p:ph type="sldImg"/>
+          </p:nvPr>
+        </p:nvSpPr>
+        <p:spPr/>
+      </p:sp>
+      <p:sp>
+        <p:nvSpPr>
+          <p:cNvPr id="3" name="Notes Placeholder 2"/>
+          <p:cNvSpPr>
+            <a:spLocks noGrp="1"/>
+          </p:cNvSpPr>
+          <p:nvPr>
+            <p:ph type="body" idx="1"/>
+          </p:nvPr>
+        </p:nvSpPr>
+        <p:spPr/>
+        <p:txBody>
+          <a:bodyPr/>
+          <a:lstStyle/>
+          <a:p>
+            <a:r>
+              <a:rPr lang="en-US" dirty="0"/>
+              <a:t/>
+            </a:r>
+            <a:endParaRPr lang="en-US" dirty="0"/>
+          </a:p>
+        </p:txBody>
+      </p:sp>
+      <p:sp>
+        <p:nvSpPr>
+          <p:cNvPr id="4" name="Slide Number Placeholder 3"/>
+          <p:cNvSpPr>
+            <a:spLocks noGrp="1"/>
+          </p:cNvSpPr>
+          <p:nvPr>
+            <p:ph type="sldNum" sz="quarter" idx="10"/>
+          </p:nvPr>
+        </p:nvSpPr>
+        <p:spPr/>
+        <p:txBody>
+          <a:bodyPr/>
+          <a:lstStyle/>
+          <a:p>
+            <a:fld id="{F7021451-1387-4CA6-816F-3879F97B5CBC}" type="slidenum">
+              <a:rPr lang="en-US"/>
+              <a:t>8</a:t>
             </a:fld>
             <a:endParaRPr lang="en-US"/>
           </a:p>
@@ -2119,7 +2208,7 @@
                 <a:ea typeface="PT Sans Narrow" pitchFamily="34" charset="-122"/>
                 <a:cs typeface="PT Sans Narrow" pitchFamily="34" charset="-120"/>
               </a:rPr>
-              <a:t>Милана Солодовник</a:t>
+              <a:t>Солодовник М. Е.</a:t>
             </a:r>
             <a:endParaRPr lang="en-US" sz="1700" dirty="0"/>
           </a:p>
@@ -2133,17 +2222,17 @@
         </p:nvSpPr>
         <p:spPr>
           <a:xfrm>
-            <a:off x="621792" y="2834640"/>
-            <a:ext cx="4206240" cy="219456"/>
-          </a:xfrm>
-          <a:prstGeom prst="rect">
-            <a:avLst/>
-          </a:prstGeom>
-          <a:noFill/>
-          <a:ln/>
-        </p:spPr>
-        <p:txBody>
-          <a:bodyPr wrap="square" lIns="0" tIns="0" rIns="0" bIns="0" rtlCol="0" anchor="ctr"/>
+            <a:off x="621792" y="2889504"/>
+            <a:ext cx="4206240" cy="457200"/>
+          </a:xfrm>
+          <a:prstGeom prst="rect">
+            <a:avLst/>
+          </a:prstGeom>
+          <a:noFill/>
+          <a:ln/>
+        </p:spPr>
+        <p:txBody>
+          <a:bodyPr wrap="square" lIns="0" tIns="0" rIns="0" bIns="0" rtlCol="0" anchor="t"/>
           <a:lstStyle/>
           <a:p>
             <a:pPr indent="0" marL="0">
@@ -2158,7 +2247,7 @@
                 <a:ea typeface="PT Sans" pitchFamily="34" charset="-122"/>
                 <a:cs typeface="PT Sans" pitchFamily="34" charset="-120"/>
               </a:rPr>
-              <a:t>Московский технический университет связи и информатики (МТУСИ)</a:t>
+              <a:t>Колледж телекоммуникаций Московского технического университета связи и информатики (КТ МТУСИ)</a:t>
             </a:r>
             <a:endParaRPr lang="en-US" sz="1050" dirty="0"/>
           </a:p>
@@ -2166,46 +2255,7 @@
       </p:sp>
       <p:sp>
         <p:nvSpPr>
-          <p:cNvPr id="23" name="Text 19"/>
-          <p:cNvSpPr/>
-          <p:nvPr/>
-        </p:nvSpPr>
-        <p:spPr>
-          <a:xfrm>
-            <a:off x="621792" y="3054096"/>
-            <a:ext cx="4206240" cy="201168"/>
-          </a:xfrm>
-          <a:prstGeom prst="rect">
-            <a:avLst/>
-          </a:prstGeom>
-          <a:noFill/>
-          <a:ln/>
-        </p:spPr>
-        <p:txBody>
-          <a:bodyPr wrap="square" lIns="0" tIns="0" rIns="0" bIns="0" rtlCol="0" anchor="ctr"/>
-          <a:lstStyle/>
-          <a:p>
-            <a:pPr indent="0" marL="0">
-              <a:buNone/>
-            </a:pPr>
-            <a:r>
-              <a:rPr lang="en-US" sz="950" dirty="0">
-                <a:solidFill>
-                  <a:srgbClr val="6E6E7A"/>
-                </a:solidFill>
-                <a:latin typeface="PT Sans" pitchFamily="34" charset="0"/>
-                <a:ea typeface="PT Sans" pitchFamily="34" charset="-122"/>
-                <a:cs typeface="PT Sans" pitchFamily="34" charset="-120"/>
-              </a:rPr>
-              <a:t>Колледж Телекоммуникаций</a:t>
-            </a:r>
-            <a:endParaRPr lang="en-US" sz="950" dirty="0"/>
-          </a:p>
-        </p:txBody>
-      </p:sp>
-      <p:sp>
-        <p:nvSpPr>
-          <p:cNvPr id="24" name="Shape 20"/>
+          <p:cNvPr id="23" name="Shape 19"/>
           <p:cNvSpPr/>
           <p:nvPr/>
         </p:nvSpPr>
@@ -2225,7 +2275,7 @@
       </p:sp>
       <p:sp>
         <p:nvSpPr>
-          <p:cNvPr id="25" name="Text 21"/>
+          <p:cNvPr id="24" name="Text 20"/>
           <p:cNvSpPr/>
           <p:nvPr/>
         </p:nvSpPr>
@@ -2264,7 +2314,7 @@
       </p:sp>
       <p:sp>
         <p:nvSpPr>
-          <p:cNvPr id="26" name="Shape 22"/>
+          <p:cNvPr id="25" name="Shape 21"/>
           <p:cNvSpPr/>
           <p:nvPr/>
         </p:nvSpPr>
@@ -2284,7 +2334,7 @@
       </p:sp>
       <p:sp>
         <p:nvSpPr>
-          <p:cNvPr id="27" name="Shape 23"/>
+          <p:cNvPr id="26" name="Shape 22"/>
           <p:cNvSpPr/>
           <p:nvPr/>
         </p:nvSpPr>
@@ -2304,7 +2354,7 @@
       </p:sp>
       <p:sp>
         <p:nvSpPr>
-          <p:cNvPr id="28" name="Shape 24"/>
+          <p:cNvPr id="27" name="Shape 23"/>
           <p:cNvSpPr/>
           <p:nvPr/>
         </p:nvSpPr>
@@ -2324,7 +2374,7 @@
       </p:sp>
       <p:sp>
         <p:nvSpPr>
-          <p:cNvPr id="29" name="Text 25"/>
+          <p:cNvPr id="28" name="Text 24"/>
           <p:cNvSpPr/>
           <p:nvPr/>
         </p:nvSpPr>
@@ -3460,7 +3510,7 @@
                 <a:ea typeface="PT Sans" pitchFamily="34" charset="-122"/>
                 <a:cs typeface="PT Sans" pitchFamily="34" charset="-120"/>
               </a:rPr>
-              <a:t>Четыре шага. Регистрация посетителю не нужна.</a:t>
+              <a:t>4 шага. Регистрация посетителю не нужна.</a:t>
             </a:r>
             <a:endParaRPr lang="en-US" sz="1250" dirty="0"/>
           </a:p>
@@ -4799,7 +4849,7 @@
                 <a:ea typeface="PT Sans" pitchFamily="34" charset="-122"/>
                 <a:cs typeface="PT Sans" pitchFamily="34" charset="-120"/>
               </a:rPr>
-              <a:t>Десять потребностей трёх приютов. У каждой четыре счётчика: сколько нужно, сколько пообещали, сколько принесли, сколько осталось.</a:t>
+              <a:t>10 потребностей трёх приютов. У каждой 4 счётчика: сколько нужно, сколько пообещали, сколько принесли, сколько осталось.</a:t>
             </a:r>
             <a:endParaRPr lang="en-US" sz="800" dirty="0"/>
           </a:p>
@@ -5012,7 +5062,7 @@
                 <a:ea typeface="PT Sans" pitchFamily="34" charset="-122"/>
                 <a:cs typeface="PT Sans" pitchFamily="34" charset="-120"/>
               </a:rPr>
-              <a:t>Три посетителя выбрали разные потребности. Каждый получил одноразовый код — он показывается один раз, в базе хранится только его хеш.</a:t>
+              <a:t>3 посетителя выбрали разные потребности. Каждый получил одноразовый код (в базе хранится только его хеш).</a:t>
             </a:r>
             <a:endParaRPr lang="en-US" sz="800" dirty="0"/>
           </a:p>
@@ -5478,7 +5528,7 @@
                 <a:ea typeface="PT Sans" pitchFamily="34" charset="-122"/>
                 <a:cs typeface="PT Sans" pitchFamily="34" charset="-120"/>
               </a:rPr>
-              <a:t>Приёмку ведёт только представитель приюта. Пять обещанных превращаются в три полученные</a:t>
+              <a:t>Приёмку ведёт только представитель приюта. 5 обещанных превращаются в 3 полученные.</a:t>
             </a:r>
             <a:endParaRPr lang="en-US" sz="1200" dirty="0"/>
           </a:p>
@@ -7701,7 +7751,7 @@
                 <a:ea typeface="PT Sans" pitchFamily="34" charset="-122"/>
                 <a:cs typeface="PT Sans" pitchFamily="34" charset="-120"/>
               </a:rPr>
-              <a:t>База различает обещанное и полученное: пять обещанных упаковок и три полученные — это разные числа.</a:t>
+              <a:t>База различает обещанное и полученное: 5 обещанных упаковок и 3 полученные — это разные числа.</a:t>
             </a:r>
             <a:endParaRPr lang="en-US" sz="1050" dirty="0"/>
           </a:p>
@@ -7841,16 +7891,72 @@
           </a:p>
         </p:txBody>
       </p:sp>
-      <p:sp>
-        <p:nvSpPr>
-          <p:cNvPr id="18" name="Text 15"/>
-          <p:cNvSpPr/>
-          <p:nvPr/>
-        </p:nvSpPr>
-        <p:spPr>
-          <a:xfrm>
-            <a:off x="548640" y="3895344"/>
-            <a:ext cx="8046720" cy="329184"/>
+    </p:spTree>
+  </p:cSld>
+  <p:clrMapOvr>
+    <a:masterClrMapping/>
+  </p:clrMapOvr>
+</p:sld>
+</file>
+
+<file path=ppt/slides/slide8.xml><?xml version="1.0" encoding="utf-8"?>
+<p:sld xmlns:a="http://schemas.openxmlformats.org/drawingml/2006/main" xmlns:r="http://schemas.openxmlformats.org/officeDocument/2006/relationships" xmlns:p="http://schemas.openxmlformats.org/presentationml/2006/main">
+  <p:cSld name="Slide 8">
+    <p:bg>
+      <p:bgPr>
+        <a:solidFill>
+          <a:srgbClr val="3A1A99"/>
+        </a:solidFill>
+      </p:bgPr>
+    </p:bg>
+    <p:spTree>
+      <p:nvGrpSpPr>
+        <p:cNvPr id="1" name=""/>
+        <p:cNvGrpSpPr/>
+        <p:nvPr/>
+      </p:nvGrpSpPr>
+      <p:grpSpPr>
+        <a:xfrm>
+          <a:off x="0" y="0"/>
+          <a:ext cx="0" cy="0"/>
+          <a:chOff x="0" y="0"/>
+          <a:chExt cx="0" cy="0"/>
+        </a:xfrm>
+      </p:grpSpPr>
+      <p:pic>
+        <p:nvPicPr>
+          <p:cNvPr id="2" name="Image 0" descr="F:\MVP\hakaton\slides\assets\bg-dark.png">    </p:cNvPr>
+          <p:cNvPicPr>
+            <a:picLocks noChangeAspect="1"/>
+          </p:cNvPicPr>
+          <p:nvPr/>
+        </p:nvPicPr>
+        <p:blipFill>
+          <a:blip r:embed="rId1"/>
+          <a:stretch>
+            <a:fillRect/>
+          </a:stretch>
+        </p:blipFill>
+        <p:spPr>
+          <a:xfrm>
+            <a:off x="0" y="0"/>
+            <a:ext cx="9144000" cy="5143500"/>
+          </a:xfrm>
+          <a:prstGeom prst="rect">
+            <a:avLst/>
+          </a:prstGeom>
+        </p:spPr>
+      </p:pic>
+      <p:sp>
+        <p:nvSpPr>
+          <p:cNvPr id="3" name="Text 0"/>
+          <p:cNvSpPr/>
+          <p:nvPr/>
+        </p:nvSpPr>
+        <p:spPr>
+          <a:xfrm>
+            <a:off x="548640" y="1517904"/>
+            <a:ext cx="8046720" cy="384048"/>
           </a:xfrm>
           <a:prstGeom prst="rect">
             <a:avLst/>
@@ -7866,7 +7972,7 @@
               <a:buNone/>
             </a:pPr>
             <a:r>
-              <a:rPr lang="en-US" sz="1800" b="1" spc="200" kern="0" dirty="0">
+              <a:rPr lang="en-US" sz="2000" b="1" spc="200" kern="0" dirty="0">
                 <a:solidFill>
                   <a:srgbClr val="FFFFFF"/>
                 </a:solidFill>
@@ -7876,19 +7982,82 @@
               </a:rPr>
               <a:t>СПАСИБО ЗА ВНИМАНИЕ</a:t>
             </a:r>
-            <a:endParaRPr lang="en-US" sz="1800" dirty="0"/>
-          </a:p>
-        </p:txBody>
-      </p:sp>
-      <p:sp>
-        <p:nvSpPr>
-          <p:cNvPr id="19" name="Text 16"/>
-          <p:cNvSpPr/>
-          <p:nvPr/>
-        </p:nvSpPr>
-        <p:spPr>
-          <a:xfrm>
-            <a:off x="548640" y="4261104"/>
+            <a:endParaRPr lang="en-US" sz="2000" dirty="0"/>
+          </a:p>
+        </p:txBody>
+      </p:sp>
+      <p:sp>
+        <p:nvSpPr>
+          <p:cNvPr id="4" name="Text 1"/>
+          <p:cNvSpPr/>
+          <p:nvPr/>
+        </p:nvSpPr>
+        <p:spPr>
+          <a:xfrm>
+            <a:off x="548640" y="1975104"/>
+            <a:ext cx="8046720" cy="274320"/>
+          </a:xfrm>
+          <a:prstGeom prst="rect">
+            <a:avLst/>
+          </a:prstGeom>
+          <a:noFill/>
+          <a:ln/>
+        </p:spPr>
+        <p:txBody>
+          <a:bodyPr wrap="square" lIns="0" tIns="0" rIns="0" bIns="0" rtlCol="0" anchor="ctr"/>
+          <a:lstStyle/>
+          <a:p>
+            <a:pPr algn="ctr" indent="0" marL="0">
+              <a:buNone/>
+            </a:pPr>
+            <a:r>
+              <a:rPr lang="en-US" sz="1100" dirty="0">
+                <a:solidFill>
+                  <a:srgbClr val="EEDCF7"/>
+                </a:solidFill>
+                <a:latin typeface="PT Sans" pitchFamily="34" charset="0"/>
+                <a:ea typeface="PT Sans" pitchFamily="34" charset="-122"/>
+                <a:cs typeface="PT Sans" pitchFamily="34" charset="-120"/>
+              </a:rPr>
+              <a:t>Солодовник М. Е.  ·  КТ МТУСИ  ·  День СУБД 2026</a:t>
+            </a:r>
+            <a:endParaRPr lang="en-US" sz="1100" dirty="0"/>
+          </a:p>
+        </p:txBody>
+      </p:sp>
+      <p:pic>
+        <p:nvPicPr>
+          <p:cNvPr id="5" name="Image 1" descr="F:\MVP\hakaton\slides\assets\qr-repo.png">    </p:cNvPr>
+          <p:cNvPicPr>
+            <a:picLocks noChangeAspect="1"/>
+          </p:cNvPicPr>
+          <p:nvPr/>
+        </p:nvPicPr>
+        <p:blipFill>
+          <a:blip r:embed="rId2"/>
+          <a:stretch>
+            <a:fillRect/>
+          </a:stretch>
+        </p:blipFill>
+        <p:spPr>
+          <a:xfrm>
+            <a:off x="3657600" y="2432304"/>
+            <a:ext cx="1828800" cy="1828800"/>
+          </a:xfrm>
+          <a:prstGeom prst="rect">
+            <a:avLst/>
+          </a:prstGeom>
+        </p:spPr>
+      </p:pic>
+      <p:sp>
+        <p:nvSpPr>
+          <p:cNvPr id="6" name="Text 2"/>
+          <p:cNvSpPr/>
+          <p:nvPr/>
+        </p:nvSpPr>
+        <p:spPr>
+          <a:xfrm>
+            <a:off x="548640" y="4389120"/>
             <a:ext cx="8046720" cy="256032"/>
           </a:xfrm>
           <a:prstGeom prst="rect">
@@ -7905,6 +8074,45 @@
               <a:buNone/>
             </a:pPr>
             <a:r>
+              <a:rPr lang="en-US" sz="1200" b="1" dirty="0">
+                <a:solidFill>
+                  <a:srgbClr val="FFFFFF"/>
+                </a:solidFill>
+                <a:latin typeface="PT Sans" pitchFamily="34" charset="0"/>
+                <a:ea typeface="PT Sans" pitchFamily="34" charset="-122"/>
+                <a:cs typeface="PT Sans" pitchFamily="34" charset="-120"/>
+              </a:rPr>
+              <a:t>Проект на GitHub — сканируйте</a:t>
+            </a:r>
+            <a:endParaRPr lang="en-US" sz="1200" dirty="0"/>
+          </a:p>
+        </p:txBody>
+      </p:sp>
+      <p:sp>
+        <p:nvSpPr>
+          <p:cNvPr id="7" name="Text 3"/>
+          <p:cNvSpPr/>
+          <p:nvPr/>
+        </p:nvSpPr>
+        <p:spPr>
+          <a:xfrm>
+            <a:off x="914400" y="4645152"/>
+            <a:ext cx="7315200" cy="237744"/>
+          </a:xfrm>
+          <a:prstGeom prst="rect">
+            <a:avLst/>
+          </a:prstGeom>
+          <a:noFill/>
+          <a:ln/>
+        </p:spPr>
+        <p:txBody>
+          <a:bodyPr wrap="square" lIns="0" tIns="0" rIns="0" bIns="0" rtlCol="0" anchor="ctr"/>
+          <a:lstStyle/>
+          <a:p>
+            <a:pPr algn="ctr" indent="0" marL="0">
+              <a:buNone/>
+            </a:pPr>
+            <a:r>
               <a:rPr lang="en-US" sz="1050" dirty="0">
                 <a:solidFill>
                   <a:srgbClr val="EEDCF7"/>
@@ -7913,9 +8121,48 @@
                 <a:ea typeface="PT Sans" pitchFamily="34" charset="-122"/>
                 <a:cs typeface="PT Sans" pitchFamily="34" charset="-120"/>
               </a:rPr>
-              <a:t>Милана Солодовник  ·  МТУСИ, Колледж Телекоммуникаций  ·  День СУБД 2026</a:t>
+              <a:t>github.com/milana-solodovnik/lapa-ryadom</a:t>
             </a:r>
             <a:endParaRPr lang="en-US" sz="1050" dirty="0"/>
+          </a:p>
+        </p:txBody>
+      </p:sp>
+      <p:sp>
+        <p:nvSpPr>
+          <p:cNvPr id="8" name="Text 4"/>
+          <p:cNvSpPr/>
+          <p:nvPr/>
+        </p:nvSpPr>
+        <p:spPr>
+          <a:xfrm>
+            <a:off x="8366760" y="4668012"/>
+            <a:ext cx="457200" cy="292608"/>
+          </a:xfrm>
+          <a:prstGeom prst="rect">
+            <a:avLst/>
+          </a:prstGeom>
+          <a:noFill/>
+          <a:ln/>
+        </p:spPr>
+        <p:txBody>
+          <a:bodyPr wrap="square" lIns="0" tIns="0" rIns="0" bIns="0" rtlCol="0" anchor="ctr"/>
+          <a:lstStyle/>
+          <a:p>
+            <a:pPr algn="r" indent="0" marL="0">
+              <a:buNone/>
+            </a:pPr>
+            <a:r>
+              <a:rPr lang="en-US" sz="1200" dirty="0">
+                <a:solidFill>
+                  <a:srgbClr val="E3D4F2"/>
+                </a:solidFill>
+                <a:latin typeface="PT Sans" pitchFamily="34" charset="0"/>
+                <a:ea typeface="PT Sans" pitchFamily="34" charset="-122"/>
+                <a:cs typeface="PT Sans" pitchFamily="34" charset="-120"/>
+              </a:rPr>
+              <a:t>8</a:t>
+            </a:r>
+            <a:endParaRPr lang="en-US" sz="1200" dirty="0"/>
           </a:p>
         </p:txBody>
       </p:sp>

--- a/slides/output/lapa-ryadom-pitch.pptx
+++ b/slides/output/lapa-ryadom-pitch.pptx
@@ -1985,7 +1985,7 @@
             <a:r>
               <a:rPr lang="en-US" sz="1050" dirty="0">
                 <a:solidFill>
-                  <a:srgbClr val="E8D9F4"/>
+                  <a:srgbClr val="FFFFFF"/>
                 </a:solidFill>
                 <a:latin typeface="PT Sans" pitchFamily="34" charset="0"/>
                 <a:ea typeface="PT Sans" pitchFamily="34" charset="-122"/>
@@ -2044,7 +2044,7 @@
         </p:nvSpPr>
         <p:spPr>
           <a:xfrm>
-            <a:off x="621792" y="786384"/>
+            <a:off x="548640" y="786384"/>
             <a:ext cx="4206240" cy="237744"/>
           </a:xfrm>
           <a:prstGeom prst="rect">
@@ -2083,7 +2083,7 @@
         </p:nvSpPr>
         <p:spPr>
           <a:xfrm>
-            <a:off x="585216" y="1042416"/>
+            <a:off x="548640" y="1060704"/>
             <a:ext cx="4206240" cy="786384"/>
           </a:xfrm>
           <a:prstGeom prst="rect">
@@ -2124,7 +2124,7 @@
         </p:nvSpPr>
         <p:spPr>
           <a:xfrm>
-            <a:off x="621792" y="1865376"/>
+            <a:off x="548640" y="1993392"/>
             <a:ext cx="4206240" cy="310896"/>
           </a:xfrm>
           <a:prstGeom prst="rect">
@@ -2163,7 +2163,7 @@
         </p:nvSpPr>
         <p:spPr>
           <a:xfrm>
-            <a:off x="621792" y="2359152"/>
+            <a:off x="548640" y="2542032"/>
             <a:ext cx="960120" cy="32004"/>
           </a:xfrm>
           <a:prstGeom prst="rect">
@@ -2183,7 +2183,7 @@
         </p:nvSpPr>
         <p:spPr>
           <a:xfrm>
-            <a:off x="621792" y="2505456"/>
+            <a:off x="548640" y="2706624"/>
             <a:ext cx="4206240" cy="310896"/>
           </a:xfrm>
           <a:prstGeom prst="rect">
@@ -2222,7 +2222,7 @@
         </p:nvSpPr>
         <p:spPr>
           <a:xfrm>
-            <a:off x="621792" y="2889504"/>
+            <a:off x="548640" y="3127248"/>
             <a:ext cx="4206240" cy="457200"/>
           </a:xfrm>
           <a:prstGeom prst="rect">
@@ -2261,7 +2261,7 @@
         </p:nvSpPr>
         <p:spPr>
           <a:xfrm>
-            <a:off x="621792" y="3474720"/>
+            <a:off x="548640" y="3822192"/>
             <a:ext cx="960120" cy="18288"/>
           </a:xfrm>
           <a:prstGeom prst="rect">
@@ -2281,7 +2281,7 @@
         </p:nvSpPr>
         <p:spPr>
           <a:xfrm>
-            <a:off x="621792" y="3584448"/>
+            <a:off x="548640" y="3950208"/>
             <a:ext cx="4206240" cy="237744"/>
           </a:xfrm>
           <a:prstGeom prst="rect">
@@ -2320,7 +2320,7 @@
         </p:nvSpPr>
         <p:spPr>
           <a:xfrm>
-            <a:off x="4315968" y="1024128"/>
+            <a:off x="4279392" y="1042416"/>
             <a:ext cx="137160" cy="137160"/>
           </a:xfrm>
           <a:prstGeom prst="ellipse">
@@ -2340,7 +2340,7 @@
         </p:nvSpPr>
         <p:spPr>
           <a:xfrm>
-            <a:off x="4507992" y="1161288"/>
+            <a:off x="4471416" y="1179576"/>
             <a:ext cx="100584" cy="100584"/>
           </a:xfrm>
           <a:prstGeom prst="ellipse">
@@ -2360,7 +2360,7 @@
         </p:nvSpPr>
         <p:spPr>
           <a:xfrm>
-            <a:off x="4242816" y="1216152"/>
+            <a:off x="4206240" y="1234440"/>
             <a:ext cx="82296" cy="82296"/>
           </a:xfrm>
           <a:prstGeom prst="ellipse">
@@ -4572,7 +4572,7 @@
         </p:nvSpPr>
         <p:spPr>
           <a:xfrm>
-            <a:off x="731520" y="146304"/>
+            <a:off x="548640" y="146304"/>
             <a:ext cx="3291840" cy="384048"/>
           </a:xfrm>
           <a:prstGeom prst="rect">
@@ -4611,7 +4611,7 @@
         </p:nvSpPr>
         <p:spPr>
           <a:xfrm>
-            <a:off x="731520" y="530352"/>
+            <a:off x="548640" y="530352"/>
             <a:ext cx="7680960" cy="274320"/>
           </a:xfrm>
           <a:prstGeom prst="rect">
@@ -4650,7 +4650,7 @@
         </p:nvSpPr>
         <p:spPr>
           <a:xfrm>
-            <a:off x="731520" y="896112"/>
+            <a:off x="548640" y="896112"/>
             <a:ext cx="3703320" cy="274320"/>
           </a:xfrm>
           <a:prstGeom prst="rect">
@@ -4675,7 +4675,7 @@
         </p:nvSpPr>
         <p:spPr>
           <a:xfrm>
-            <a:off x="795528" y="941832"/>
+            <a:off x="612648" y="941832"/>
             <a:ext cx="457200" cy="182880"/>
           </a:xfrm>
           <a:prstGeom prst="roundRect">
@@ -4697,7 +4697,7 @@
         </p:nvSpPr>
         <p:spPr>
           <a:xfrm>
-            <a:off x="795528" y="941832"/>
+            <a:off x="612648" y="941832"/>
             <a:ext cx="457200" cy="182880"/>
           </a:xfrm>
           <a:prstGeom prst="rect">
@@ -4736,7 +4736,7 @@
         </p:nvSpPr>
         <p:spPr>
           <a:xfrm>
-            <a:off x="1335024" y="896112"/>
+            <a:off x="1152144" y="896112"/>
             <a:ext cx="3044952" cy="274320"/>
           </a:xfrm>
           <a:prstGeom prst="rect">
@@ -4753,7 +4753,7 @@
               <a:buNone/>
             </a:pPr>
             <a:r>
-              <a:rPr lang="en-US" sz="800" b="1" spc="50" kern="0" dirty="0">
+              <a:rPr lang="en-US" sz="850" b="1" spc="50" kern="0" dirty="0">
                 <a:solidFill>
                   <a:srgbClr val="17161C"/>
                 </a:solidFill>
@@ -4763,7 +4763,7 @@
               </a:rPr>
               <a:t>КАТАЛОГ — ЧТО ВИДИТ ПОСЕТИТЕЛЬ</a:t>
             </a:r>
-            <a:endParaRPr lang="en-US" sz="800" dirty="0"/>
+            <a:endParaRPr lang="en-US" sz="850" dirty="0"/>
           </a:p>
         </p:txBody>
       </p:sp>
@@ -4775,7 +4775,7 @@
         </p:nvSpPr>
         <p:spPr>
           <a:xfrm>
-            <a:off x="731520" y="1188720"/>
+            <a:off x="548640" y="1188720"/>
             <a:ext cx="3703320" cy="2622185"/>
           </a:xfrm>
           <a:prstGeom prst="rect">
@@ -4808,7 +4808,7 @@
         </p:blipFill>
         <p:spPr>
           <a:xfrm>
-            <a:off x="731520" y="1188720"/>
+            <a:off x="548640" y="1188720"/>
             <a:ext cx="3703320" cy="2603897"/>
           </a:xfrm>
           <a:prstGeom prst="rect">
@@ -4824,7 +4824,7 @@
         </p:nvSpPr>
         <p:spPr>
           <a:xfrm>
-            <a:off x="731520" y="3829193"/>
+            <a:off x="548640" y="3829193"/>
             <a:ext cx="3703320" cy="310896"/>
           </a:xfrm>
           <a:prstGeom prst="rect">
@@ -4841,7 +4841,7 @@
               <a:buNone/>
             </a:pPr>
             <a:r>
-              <a:rPr lang="en-US" sz="800" dirty="0">
+              <a:rPr lang="en-US" sz="850" dirty="0">
                 <a:solidFill>
                   <a:srgbClr val="6E6E7A"/>
                 </a:solidFill>
@@ -4851,7 +4851,7 @@
               </a:rPr>
               <a:t>10 потребностей трёх приютов. У каждой 4 счётчика: сколько нужно, сколько пообещали, сколько принесли, сколько осталось.</a:t>
             </a:r>
-            <a:endParaRPr lang="en-US" sz="800" dirty="0"/>
+            <a:endParaRPr lang="en-US" sz="850" dirty="0"/>
           </a:p>
         </p:txBody>
       </p:sp>
@@ -4863,7 +4863,7 @@
         </p:nvSpPr>
         <p:spPr>
           <a:xfrm>
-            <a:off x="4663440" y="896112"/>
+            <a:off x="4480560" y="896112"/>
             <a:ext cx="3703320" cy="274320"/>
           </a:xfrm>
           <a:prstGeom prst="rect">
@@ -4888,7 +4888,7 @@
         </p:nvSpPr>
         <p:spPr>
           <a:xfrm>
-            <a:off x="4727448" y="941832"/>
+            <a:off x="4544568" y="941832"/>
             <a:ext cx="457200" cy="182880"/>
           </a:xfrm>
           <a:prstGeom prst="roundRect">
@@ -4910,7 +4910,7 @@
         </p:nvSpPr>
         <p:spPr>
           <a:xfrm>
-            <a:off x="4727448" y="941832"/>
+            <a:off x="4544568" y="941832"/>
             <a:ext cx="457200" cy="182880"/>
           </a:xfrm>
           <a:prstGeom prst="rect">
@@ -4949,7 +4949,7 @@
         </p:nvSpPr>
         <p:spPr>
           <a:xfrm>
-            <a:off x="5266944" y="896112"/>
+            <a:off x="5084064" y="896112"/>
             <a:ext cx="3044952" cy="274320"/>
           </a:xfrm>
           <a:prstGeom prst="rect">
@@ -4966,7 +4966,7 @@
               <a:buNone/>
             </a:pPr>
             <a:r>
-              <a:rPr lang="en-US" sz="800" b="1" spc="50" kern="0" dirty="0">
+              <a:rPr lang="en-US" sz="850" b="1" spc="50" kern="0" dirty="0">
                 <a:solidFill>
                   <a:srgbClr val="17161C"/>
                 </a:solidFill>
@@ -4976,7 +4976,7 @@
               </a:rPr>
               <a:t>ПОСЛЕ ТРЁХ ЗАЯВОК</a:t>
             </a:r>
-            <a:endParaRPr lang="en-US" sz="800" dirty="0"/>
+            <a:endParaRPr lang="en-US" sz="850" dirty="0"/>
           </a:p>
         </p:txBody>
       </p:sp>
@@ -4988,7 +4988,7 @@
         </p:nvSpPr>
         <p:spPr>
           <a:xfrm>
-            <a:off x="4663440" y="1188720"/>
+            <a:off x="4480560" y="1188720"/>
             <a:ext cx="3703320" cy="2622185"/>
           </a:xfrm>
           <a:prstGeom prst="rect">
@@ -5021,7 +5021,7 @@
         </p:blipFill>
         <p:spPr>
           <a:xfrm>
-            <a:off x="4663440" y="1188720"/>
+            <a:off x="4480560" y="1188720"/>
             <a:ext cx="3703320" cy="2603897"/>
           </a:xfrm>
           <a:prstGeom prst="rect">
@@ -5037,7 +5037,7 @@
         </p:nvSpPr>
         <p:spPr>
           <a:xfrm>
-            <a:off x="4663440" y="3829193"/>
+            <a:off x="4480560" y="3829193"/>
             <a:ext cx="3703320" cy="310896"/>
           </a:xfrm>
           <a:prstGeom prst="rect">
@@ -5054,7 +5054,7 @@
               <a:buNone/>
             </a:pPr>
             <a:r>
-              <a:rPr lang="en-US" sz="800" dirty="0">
+              <a:rPr lang="en-US" sz="850" dirty="0">
                 <a:solidFill>
                   <a:srgbClr val="6E6E7A"/>
                 </a:solidFill>
@@ -5064,7 +5064,7 @@
               </a:rPr>
               <a:t>3 посетителя выбрали разные потребности. Каждый получил одноразовый код (в базе хранится только его хеш).</a:t>
             </a:r>
-            <a:endParaRPr lang="en-US" sz="800" dirty="0"/>
+            <a:endParaRPr lang="en-US" sz="850" dirty="0"/>
           </a:p>
         </p:txBody>
       </p:sp>
@@ -5076,7 +5076,7 @@
         </p:nvSpPr>
         <p:spPr>
           <a:xfrm>
-            <a:off x="731520" y="4206240"/>
+            <a:off x="548640" y="4206240"/>
             <a:ext cx="1819656" cy="384048"/>
           </a:xfrm>
           <a:prstGeom prst="roundRect">
@@ -5103,7 +5103,7 @@
         </p:nvSpPr>
         <p:spPr>
           <a:xfrm>
-            <a:off x="795528" y="4261104"/>
+            <a:off x="612648" y="4261104"/>
             <a:ext cx="384048" cy="274320"/>
           </a:xfrm>
           <a:prstGeom prst="roundRect">
@@ -5125,7 +5125,7 @@
         </p:nvSpPr>
         <p:spPr>
           <a:xfrm>
-            <a:off x="795528" y="4261104"/>
+            <a:off x="612648" y="4261104"/>
             <a:ext cx="384048" cy="274320"/>
           </a:xfrm>
           <a:prstGeom prst="rect">
@@ -5164,7 +5164,7 @@
         </p:nvSpPr>
         <p:spPr>
           <a:xfrm>
-            <a:off x="1243584" y="4206240"/>
+            <a:off x="1060704" y="4206240"/>
             <a:ext cx="1252728" cy="384048"/>
           </a:xfrm>
           <a:prstGeom prst="rect">
@@ -5203,7 +5203,7 @@
         </p:nvSpPr>
         <p:spPr>
           <a:xfrm>
-            <a:off x="2697480" y="4206240"/>
+            <a:off x="2514600" y="4206240"/>
             <a:ext cx="1819656" cy="384048"/>
           </a:xfrm>
           <a:prstGeom prst="roundRect">
@@ -5230,7 +5230,7 @@
         </p:nvSpPr>
         <p:spPr>
           <a:xfrm>
-            <a:off x="2761488" y="4261104"/>
+            <a:off x="2578608" y="4261104"/>
             <a:ext cx="384048" cy="274320"/>
           </a:xfrm>
           <a:prstGeom prst="roundRect">
@@ -5252,7 +5252,7 @@
         </p:nvSpPr>
         <p:spPr>
           <a:xfrm>
-            <a:off x="2761488" y="4261104"/>
+            <a:off x="2578608" y="4261104"/>
             <a:ext cx="384048" cy="274320"/>
           </a:xfrm>
           <a:prstGeom prst="rect">
@@ -5291,7 +5291,7 @@
         </p:nvSpPr>
         <p:spPr>
           <a:xfrm>
-            <a:off x="3209544" y="4206240"/>
+            <a:off x="3026664" y="4206240"/>
             <a:ext cx="1252728" cy="384048"/>
           </a:xfrm>
           <a:prstGeom prst="rect">
@@ -5330,7 +5330,7 @@
         </p:nvSpPr>
         <p:spPr>
           <a:xfrm>
-            <a:off x="731520" y="4645152"/>
+            <a:off x="548640" y="4645152"/>
             <a:ext cx="7315200" cy="219456"/>
           </a:xfrm>
           <a:prstGeom prst="rect">
@@ -5464,7 +5464,7 @@
         </p:nvSpPr>
         <p:spPr>
           <a:xfrm>
-            <a:off x="731520" y="146304"/>
+            <a:off x="548640" y="146304"/>
             <a:ext cx="3291840" cy="384048"/>
           </a:xfrm>
           <a:prstGeom prst="rect">
@@ -5503,7 +5503,7 @@
         </p:nvSpPr>
         <p:spPr>
           <a:xfrm>
-            <a:off x="731520" y="530352"/>
+            <a:off x="548640" y="530352"/>
             <a:ext cx="7680960" cy="274320"/>
           </a:xfrm>
           <a:prstGeom prst="rect">
@@ -5542,7 +5542,7 @@
         </p:nvSpPr>
         <p:spPr>
           <a:xfrm>
-            <a:off x="731520" y="896112"/>
+            <a:off x="548640" y="896112"/>
             <a:ext cx="3703320" cy="274320"/>
           </a:xfrm>
           <a:prstGeom prst="rect">
@@ -5567,7 +5567,7 @@
         </p:nvSpPr>
         <p:spPr>
           <a:xfrm>
-            <a:off x="795528" y="941832"/>
+            <a:off x="612648" y="941832"/>
             <a:ext cx="457200" cy="182880"/>
           </a:xfrm>
           <a:prstGeom prst="roundRect">
@@ -5589,7 +5589,7 @@
         </p:nvSpPr>
         <p:spPr>
           <a:xfrm>
-            <a:off x="795528" y="941832"/>
+            <a:off x="612648" y="941832"/>
             <a:ext cx="457200" cy="182880"/>
           </a:xfrm>
           <a:prstGeom prst="rect">
@@ -5628,7 +5628,7 @@
         </p:nvSpPr>
         <p:spPr>
           <a:xfrm>
-            <a:off x="1335024" y="896112"/>
+            <a:off x="1152144" y="896112"/>
             <a:ext cx="3044952" cy="274320"/>
           </a:xfrm>
           <a:prstGeom prst="rect">
@@ -5645,7 +5645,7 @@
               <a:buNone/>
             </a:pPr>
             <a:r>
-              <a:rPr lang="en-US" sz="800" b="1" spc="50" kern="0" dirty="0">
+              <a:rPr lang="en-US" sz="850" b="1" spc="50" kern="0" dirty="0">
                 <a:solidFill>
                   <a:srgbClr val="17161C"/>
                 </a:solidFill>
@@ -5655,7 +5655,7 @@
               </a:rPr>
               <a:t>ВХОД ДЛЯ ПРИЮТОВ</a:t>
             </a:r>
-            <a:endParaRPr lang="en-US" sz="800" dirty="0"/>
+            <a:endParaRPr lang="en-US" sz="850" dirty="0"/>
           </a:p>
         </p:txBody>
       </p:sp>
@@ -5667,7 +5667,7 @@
         </p:nvSpPr>
         <p:spPr>
           <a:xfrm>
-            <a:off x="731520" y="1188720"/>
+            <a:off x="548640" y="1188720"/>
             <a:ext cx="3703320" cy="2622185"/>
           </a:xfrm>
           <a:prstGeom prst="rect">
@@ -5700,7 +5700,7 @@
         </p:blipFill>
         <p:spPr>
           <a:xfrm>
-            <a:off x="731520" y="1188720"/>
+            <a:off x="548640" y="1188720"/>
             <a:ext cx="3703320" cy="2603897"/>
           </a:xfrm>
           <a:prstGeom prst="rect">
@@ -5716,7 +5716,7 @@
         </p:nvSpPr>
         <p:spPr>
           <a:xfrm>
-            <a:off x="731520" y="3829193"/>
+            <a:off x="548640" y="3829193"/>
             <a:ext cx="3703320" cy="310896"/>
           </a:xfrm>
           <a:prstGeom prst="rect">
@@ -5733,7 +5733,7 @@
               <a:buNone/>
             </a:pPr>
             <a:r>
-              <a:rPr lang="en-US" sz="800" dirty="0">
+              <a:rPr lang="en-US" sz="850" dirty="0">
                 <a:solidFill>
                   <a:srgbClr val="6E6E7A"/>
                 </a:solidFill>
@@ -5743,7 +5743,7 @@
               </a:rPr>
               <a:t>Вход есть только у сотрудника приюта, и он привязан к своему приюту: чужой приют не примет чужую передачу.</a:t>
             </a:r>
-            <a:endParaRPr lang="en-US" sz="800" dirty="0"/>
+            <a:endParaRPr lang="en-US" sz="850" dirty="0"/>
           </a:p>
         </p:txBody>
       </p:sp>
@@ -5755,7 +5755,7 @@
         </p:nvSpPr>
         <p:spPr>
           <a:xfrm>
-            <a:off x="4663440" y="896112"/>
+            <a:off x="4480560" y="896112"/>
             <a:ext cx="3703320" cy="274320"/>
           </a:xfrm>
           <a:prstGeom prst="rect">
@@ -5780,7 +5780,7 @@
         </p:nvSpPr>
         <p:spPr>
           <a:xfrm>
-            <a:off x="4727448" y="941832"/>
+            <a:off x="4544568" y="941832"/>
             <a:ext cx="457200" cy="182880"/>
           </a:xfrm>
           <a:prstGeom prst="roundRect">
@@ -5802,7 +5802,7 @@
         </p:nvSpPr>
         <p:spPr>
           <a:xfrm>
-            <a:off x="4727448" y="941832"/>
+            <a:off x="4544568" y="941832"/>
             <a:ext cx="457200" cy="182880"/>
           </a:xfrm>
           <a:prstGeom prst="rect">
@@ -5841,7 +5841,7 @@
         </p:nvSpPr>
         <p:spPr>
           <a:xfrm>
-            <a:off x="5266944" y="896112"/>
+            <a:off x="5084064" y="896112"/>
             <a:ext cx="3044952" cy="274320"/>
           </a:xfrm>
           <a:prstGeom prst="rect">
@@ -5858,7 +5858,7 @@
               <a:buNone/>
             </a:pPr>
             <a:r>
-              <a:rPr lang="en-US" sz="800" b="1" spc="50" kern="0" dirty="0">
+              <a:rPr lang="en-US" sz="850" b="1" spc="50" kern="0" dirty="0">
                 <a:solidFill>
                   <a:srgbClr val="17161C"/>
                 </a:solidFill>
@@ -5868,7 +5868,7 @@
               </a:rPr>
               <a:t>ПОСЛЕ ПРИЁМКИ</a:t>
             </a:r>
-            <a:endParaRPr lang="en-US" sz="800" dirty="0"/>
+            <a:endParaRPr lang="en-US" sz="850" dirty="0"/>
           </a:p>
         </p:txBody>
       </p:sp>
@@ -5880,7 +5880,7 @@
         </p:nvSpPr>
         <p:spPr>
           <a:xfrm>
-            <a:off x="4663440" y="1188720"/>
+            <a:off x="4480560" y="1188720"/>
             <a:ext cx="3703320" cy="2622185"/>
           </a:xfrm>
           <a:prstGeom prst="rect">
@@ -5913,7 +5913,7 @@
         </p:blipFill>
         <p:spPr>
           <a:xfrm>
-            <a:off x="4663440" y="1188720"/>
+            <a:off x="4480560" y="1188720"/>
             <a:ext cx="3703320" cy="2603897"/>
           </a:xfrm>
           <a:prstGeom prst="rect">
@@ -5929,7 +5929,7 @@
         </p:nvSpPr>
         <p:spPr>
           <a:xfrm>
-            <a:off x="4663440" y="3829193"/>
+            <a:off x="4480560" y="3829193"/>
             <a:ext cx="3703320" cy="310896"/>
           </a:xfrm>
           <a:prstGeom prst="rect">
@@ -5946,7 +5946,7 @@
               <a:buNone/>
             </a:pPr>
             <a:r>
-              <a:rPr lang="en-US" sz="800" dirty="0">
+              <a:rPr lang="en-US" sz="850" dirty="0">
                 <a:solidFill>
                   <a:srgbClr val="6E6E7A"/>
                 </a:solidFill>
@@ -5956,7 +5956,7 @@
               </a:rPr>
               <a:t>Сотрудник принял 3 упаковки из 5. Обещанное стало нулём, две непривезённые сразу вернулись в свободный остаток.</a:t>
             </a:r>
-            <a:endParaRPr lang="en-US" sz="800" dirty="0"/>
+            <a:endParaRPr lang="en-US" sz="850" dirty="0"/>
           </a:p>
         </p:txBody>
       </p:sp>
@@ -5968,7 +5968,7 @@
         </p:nvSpPr>
         <p:spPr>
           <a:xfrm>
-            <a:off x="731520" y="4206240"/>
+            <a:off x="548640" y="4206240"/>
             <a:ext cx="1819656" cy="384048"/>
           </a:xfrm>
           <a:prstGeom prst="roundRect">
@@ -5995,7 +5995,7 @@
         </p:nvSpPr>
         <p:spPr>
           <a:xfrm>
-            <a:off x="795528" y="4261104"/>
+            <a:off x="612648" y="4261104"/>
             <a:ext cx="384048" cy="274320"/>
           </a:xfrm>
           <a:prstGeom prst="roundRect">
@@ -6017,7 +6017,7 @@
         </p:nvSpPr>
         <p:spPr>
           <a:xfrm>
-            <a:off x="795528" y="4261104"/>
+            <a:off x="612648" y="4261104"/>
             <a:ext cx="384048" cy="274320"/>
           </a:xfrm>
           <a:prstGeom prst="rect">
@@ -6056,7 +6056,7 @@
         </p:nvSpPr>
         <p:spPr>
           <a:xfrm>
-            <a:off x="1243584" y="4206240"/>
+            <a:off x="1060704" y="4206240"/>
             <a:ext cx="1252728" cy="384048"/>
           </a:xfrm>
           <a:prstGeom prst="rect">
@@ -6095,7 +6095,7 @@
         </p:nvSpPr>
         <p:spPr>
           <a:xfrm>
-            <a:off x="2697480" y="4206240"/>
+            <a:off x="2514600" y="4206240"/>
             <a:ext cx="1819656" cy="384048"/>
           </a:xfrm>
           <a:prstGeom prst="roundRect">
@@ -6122,7 +6122,7 @@
         </p:nvSpPr>
         <p:spPr>
           <a:xfrm>
-            <a:off x="2761488" y="4261104"/>
+            <a:off x="2578608" y="4261104"/>
             <a:ext cx="384048" cy="274320"/>
           </a:xfrm>
           <a:prstGeom prst="roundRect">
@@ -6144,7 +6144,7 @@
         </p:nvSpPr>
         <p:spPr>
           <a:xfrm>
-            <a:off x="2761488" y="4261104"/>
+            <a:off x="2578608" y="4261104"/>
             <a:ext cx="384048" cy="274320"/>
           </a:xfrm>
           <a:prstGeom prst="rect">
@@ -6183,7 +6183,7 @@
         </p:nvSpPr>
         <p:spPr>
           <a:xfrm>
-            <a:off x="3209544" y="4206240"/>
+            <a:off x="3026664" y="4206240"/>
             <a:ext cx="1252728" cy="384048"/>
           </a:xfrm>
           <a:prstGeom prst="rect">
@@ -6222,7 +6222,7 @@
         </p:nvSpPr>
         <p:spPr>
           <a:xfrm>
-            <a:off x="731520" y="4645152"/>
+            <a:off x="548640" y="4645152"/>
             <a:ext cx="7315200" cy="219456"/>
           </a:xfrm>
           <a:prstGeom prst="rect">

--- a/slides/output/lapa-ryadom-pitch.pptx
+++ b/slides/output/lapa-ryadom-pitch.pptx
@@ -4573,7 +4573,7 @@
         <p:spPr>
           <a:xfrm>
             <a:off x="548640" y="146304"/>
-            <a:ext cx="3291840" cy="384048"/>
+            <a:ext cx="3291840" cy="365760"/>
           </a:xfrm>
           <a:prstGeom prst="rect">
             <a:avLst/>
@@ -4611,8 +4611,8 @@
         </p:nvSpPr>
         <p:spPr>
           <a:xfrm>
-            <a:off x="548640" y="530352"/>
-            <a:ext cx="7680960" cy="274320"/>
+            <a:off x="548640" y="493776"/>
+            <a:ext cx="8046720" cy="274320"/>
           </a:xfrm>
           <a:prstGeom prst="rect">
             <a:avLst/>
@@ -4650,8 +4650,8 @@
         </p:nvSpPr>
         <p:spPr>
           <a:xfrm>
-            <a:off x="548640" y="896112"/>
-            <a:ext cx="3703320" cy="274320"/>
+            <a:off x="548640" y="804672"/>
+            <a:ext cx="3909060" cy="274320"/>
           </a:xfrm>
           <a:prstGeom prst="rect">
             <a:avLst/>
@@ -4675,7 +4675,7 @@
         </p:nvSpPr>
         <p:spPr>
           <a:xfrm>
-            <a:off x="612648" y="941832"/>
+            <a:off x="612648" y="850392"/>
             <a:ext cx="457200" cy="182880"/>
           </a:xfrm>
           <a:prstGeom prst="roundRect">
@@ -4697,7 +4697,7 @@
         </p:nvSpPr>
         <p:spPr>
           <a:xfrm>
-            <a:off x="612648" y="941832"/>
+            <a:off x="612648" y="850392"/>
             <a:ext cx="457200" cy="182880"/>
           </a:xfrm>
           <a:prstGeom prst="rect">
@@ -4736,8 +4736,8 @@
         </p:nvSpPr>
         <p:spPr>
           <a:xfrm>
-            <a:off x="1152144" y="896112"/>
-            <a:ext cx="3044952" cy="274320"/>
+            <a:off x="1152144" y="804672"/>
+            <a:ext cx="3250692" cy="274320"/>
           </a:xfrm>
           <a:prstGeom prst="rect">
             <a:avLst/>
@@ -4775,8 +4775,8 @@
         </p:nvSpPr>
         <p:spPr>
           <a:xfrm>
-            <a:off x="548640" y="1188720"/>
-            <a:ext cx="3703320" cy="2622185"/>
+            <a:off x="548640" y="1097280"/>
+            <a:ext cx="3909060" cy="2766846"/>
           </a:xfrm>
           <a:prstGeom prst="rect">
             <a:avLst/>
@@ -4808,8 +4808,8 @@
         </p:blipFill>
         <p:spPr>
           <a:xfrm>
-            <a:off x="548640" y="1188720"/>
-            <a:ext cx="3703320" cy="2603897"/>
+            <a:off x="548640" y="1097280"/>
+            <a:ext cx="3909060" cy="2748558"/>
           </a:xfrm>
           <a:prstGeom prst="rect">
             <a:avLst/>
@@ -4824,8 +4824,8 @@
         </p:nvSpPr>
         <p:spPr>
           <a:xfrm>
-            <a:off x="548640" y="3829193"/>
-            <a:ext cx="3703320" cy="310896"/>
+            <a:off x="548640" y="3882414"/>
+            <a:ext cx="3909060" cy="310896"/>
           </a:xfrm>
           <a:prstGeom prst="rect">
             <a:avLst/>
@@ -4863,8 +4863,8 @@
         </p:nvSpPr>
         <p:spPr>
           <a:xfrm>
-            <a:off x="4480560" y="896112"/>
-            <a:ext cx="3703320" cy="274320"/>
+            <a:off x="4686300" y="804672"/>
+            <a:ext cx="3909060" cy="274320"/>
           </a:xfrm>
           <a:prstGeom prst="rect">
             <a:avLst/>
@@ -4888,7 +4888,7 @@
         </p:nvSpPr>
         <p:spPr>
           <a:xfrm>
-            <a:off x="4544568" y="941832"/>
+            <a:off x="4750308" y="850392"/>
             <a:ext cx="457200" cy="182880"/>
           </a:xfrm>
           <a:prstGeom prst="roundRect">
@@ -4910,7 +4910,7 @@
         </p:nvSpPr>
         <p:spPr>
           <a:xfrm>
-            <a:off x="4544568" y="941832"/>
+            <a:off x="4750308" y="850392"/>
             <a:ext cx="457200" cy="182880"/>
           </a:xfrm>
           <a:prstGeom prst="rect">
@@ -4949,8 +4949,8 @@
         </p:nvSpPr>
         <p:spPr>
           <a:xfrm>
-            <a:off x="5084064" y="896112"/>
-            <a:ext cx="3044952" cy="274320"/>
+            <a:off x="5289804" y="804672"/>
+            <a:ext cx="3250692" cy="274320"/>
           </a:xfrm>
           <a:prstGeom prst="rect">
             <a:avLst/>
@@ -4988,8 +4988,8 @@
         </p:nvSpPr>
         <p:spPr>
           <a:xfrm>
-            <a:off x="4480560" y="1188720"/>
-            <a:ext cx="3703320" cy="2622185"/>
+            <a:off x="4686300" y="1097280"/>
+            <a:ext cx="3909060" cy="2766846"/>
           </a:xfrm>
           <a:prstGeom prst="rect">
             <a:avLst/>
@@ -5021,8 +5021,8 @@
         </p:blipFill>
         <p:spPr>
           <a:xfrm>
-            <a:off x="4480560" y="1188720"/>
-            <a:ext cx="3703320" cy="2603897"/>
+            <a:off x="4686300" y="1097280"/>
+            <a:ext cx="3909060" cy="2748558"/>
           </a:xfrm>
           <a:prstGeom prst="rect">
             <a:avLst/>
@@ -5037,8 +5037,8 @@
         </p:nvSpPr>
         <p:spPr>
           <a:xfrm>
-            <a:off x="4480560" y="3829193"/>
-            <a:ext cx="3703320" cy="310896"/>
+            <a:off x="4686300" y="3882414"/>
+            <a:ext cx="3909060" cy="310896"/>
           </a:xfrm>
           <a:prstGeom prst="rect">
             <a:avLst/>
@@ -5076,8 +5076,8 @@
         </p:nvSpPr>
         <p:spPr>
           <a:xfrm>
-            <a:off x="548640" y="4206240"/>
-            <a:ext cx="1819656" cy="384048"/>
+            <a:off x="548640" y="4224528"/>
+            <a:ext cx="3909060" cy="384048"/>
           </a:xfrm>
           <a:prstGeom prst="roundRect">
             <a:avLst>
@@ -5103,7 +5103,7 @@
         </p:nvSpPr>
         <p:spPr>
           <a:xfrm>
-            <a:off x="612648" y="4261104"/>
+            <a:off x="612648" y="4279392"/>
             <a:ext cx="384048" cy="274320"/>
           </a:xfrm>
           <a:prstGeom prst="roundRect">
@@ -5125,7 +5125,7 @@
         </p:nvSpPr>
         <p:spPr>
           <a:xfrm>
-            <a:off x="612648" y="4261104"/>
+            <a:off x="612648" y="4279392"/>
             <a:ext cx="384048" cy="274320"/>
           </a:xfrm>
           <a:prstGeom prst="rect">
@@ -5164,8 +5164,8 @@
         </p:nvSpPr>
         <p:spPr>
           <a:xfrm>
-            <a:off x="1060704" y="4206240"/>
-            <a:ext cx="1252728" cy="384048"/>
+            <a:off x="1060704" y="4224528"/>
+            <a:ext cx="3342132" cy="384048"/>
           </a:xfrm>
           <a:prstGeom prst="rect">
             <a:avLst/>
@@ -5203,8 +5203,8 @@
         </p:nvSpPr>
         <p:spPr>
           <a:xfrm>
-            <a:off x="2514600" y="4206240"/>
-            <a:ext cx="1819656" cy="384048"/>
+            <a:off x="4686300" y="4224528"/>
+            <a:ext cx="3909060" cy="384048"/>
           </a:xfrm>
           <a:prstGeom prst="roundRect">
             <a:avLst>
@@ -5230,7 +5230,7 @@
         </p:nvSpPr>
         <p:spPr>
           <a:xfrm>
-            <a:off x="2578608" y="4261104"/>
+            <a:off x="4750308" y="4279392"/>
             <a:ext cx="384048" cy="274320"/>
           </a:xfrm>
           <a:prstGeom prst="roundRect">
@@ -5252,7 +5252,7 @@
         </p:nvSpPr>
         <p:spPr>
           <a:xfrm>
-            <a:off x="2578608" y="4261104"/>
+            <a:off x="4750308" y="4279392"/>
             <a:ext cx="384048" cy="274320"/>
           </a:xfrm>
           <a:prstGeom prst="rect">
@@ -5291,8 +5291,8 @@
         </p:nvSpPr>
         <p:spPr>
           <a:xfrm>
-            <a:off x="3026664" y="4206240"/>
-            <a:ext cx="1252728" cy="384048"/>
+            <a:off x="5198364" y="4224528"/>
+            <a:ext cx="3342132" cy="384048"/>
           </a:xfrm>
           <a:prstGeom prst="rect">
             <a:avLst/>
@@ -5330,7 +5330,7 @@
         </p:nvSpPr>
         <p:spPr>
           <a:xfrm>
-            <a:off x="548640" y="4645152"/>
+            <a:off x="548640" y="4663440"/>
             <a:ext cx="7315200" cy="219456"/>
           </a:xfrm>
           <a:prstGeom prst="rect">
@@ -5465,7 +5465,7 @@
         <p:spPr>
           <a:xfrm>
             <a:off x="548640" y="146304"/>
-            <a:ext cx="3291840" cy="384048"/>
+            <a:ext cx="3291840" cy="365760"/>
           </a:xfrm>
           <a:prstGeom prst="rect">
             <a:avLst/>
@@ -5503,8 +5503,8 @@
         </p:nvSpPr>
         <p:spPr>
           <a:xfrm>
-            <a:off x="548640" y="530352"/>
-            <a:ext cx="7680960" cy="274320"/>
+            <a:off x="548640" y="493776"/>
+            <a:ext cx="8046720" cy="274320"/>
           </a:xfrm>
           <a:prstGeom prst="rect">
             <a:avLst/>
@@ -5542,8 +5542,8 @@
         </p:nvSpPr>
         <p:spPr>
           <a:xfrm>
-            <a:off x="548640" y="896112"/>
-            <a:ext cx="3703320" cy="274320"/>
+            <a:off x="548640" y="804672"/>
+            <a:ext cx="3909060" cy="274320"/>
           </a:xfrm>
           <a:prstGeom prst="rect">
             <a:avLst/>
@@ -5567,7 +5567,7 @@
         </p:nvSpPr>
         <p:spPr>
           <a:xfrm>
-            <a:off x="612648" y="941832"/>
+            <a:off x="612648" y="850392"/>
             <a:ext cx="457200" cy="182880"/>
           </a:xfrm>
           <a:prstGeom prst="roundRect">
@@ -5589,7 +5589,7 @@
         </p:nvSpPr>
         <p:spPr>
           <a:xfrm>
-            <a:off x="612648" y="941832"/>
+            <a:off x="612648" y="850392"/>
             <a:ext cx="457200" cy="182880"/>
           </a:xfrm>
           <a:prstGeom prst="rect">
@@ -5628,8 +5628,8 @@
         </p:nvSpPr>
         <p:spPr>
           <a:xfrm>
-            <a:off x="1152144" y="896112"/>
-            <a:ext cx="3044952" cy="274320"/>
+            <a:off x="1152144" y="804672"/>
+            <a:ext cx="3250692" cy="274320"/>
           </a:xfrm>
           <a:prstGeom prst="rect">
             <a:avLst/>
@@ -5667,8 +5667,8 @@
         </p:nvSpPr>
         <p:spPr>
           <a:xfrm>
-            <a:off x="548640" y="1188720"/>
-            <a:ext cx="3703320" cy="2622185"/>
+            <a:off x="548640" y="1097280"/>
+            <a:ext cx="3909060" cy="2766846"/>
           </a:xfrm>
           <a:prstGeom prst="rect">
             <a:avLst/>
@@ -5700,8 +5700,8 @@
         </p:blipFill>
         <p:spPr>
           <a:xfrm>
-            <a:off x="548640" y="1188720"/>
-            <a:ext cx="3703320" cy="2603897"/>
+            <a:off x="548640" y="1097280"/>
+            <a:ext cx="3909060" cy="2748558"/>
           </a:xfrm>
           <a:prstGeom prst="rect">
             <a:avLst/>
@@ -5716,8 +5716,8 @@
         </p:nvSpPr>
         <p:spPr>
           <a:xfrm>
-            <a:off x="548640" y="3829193"/>
-            <a:ext cx="3703320" cy="310896"/>
+            <a:off x="548640" y="3882414"/>
+            <a:ext cx="3909060" cy="310896"/>
           </a:xfrm>
           <a:prstGeom prst="rect">
             <a:avLst/>
@@ -5755,8 +5755,8 @@
         </p:nvSpPr>
         <p:spPr>
           <a:xfrm>
-            <a:off x="4480560" y="896112"/>
-            <a:ext cx="3703320" cy="274320"/>
+            <a:off x="4686300" y="804672"/>
+            <a:ext cx="3909060" cy="274320"/>
           </a:xfrm>
           <a:prstGeom prst="rect">
             <a:avLst/>
@@ -5780,7 +5780,7 @@
         </p:nvSpPr>
         <p:spPr>
           <a:xfrm>
-            <a:off x="4544568" y="941832"/>
+            <a:off x="4750308" y="850392"/>
             <a:ext cx="457200" cy="182880"/>
           </a:xfrm>
           <a:prstGeom prst="roundRect">
@@ -5802,7 +5802,7 @@
         </p:nvSpPr>
         <p:spPr>
           <a:xfrm>
-            <a:off x="4544568" y="941832"/>
+            <a:off x="4750308" y="850392"/>
             <a:ext cx="457200" cy="182880"/>
           </a:xfrm>
           <a:prstGeom prst="rect">
@@ -5841,8 +5841,8 @@
         </p:nvSpPr>
         <p:spPr>
           <a:xfrm>
-            <a:off x="5084064" y="896112"/>
-            <a:ext cx="3044952" cy="274320"/>
+            <a:off x="5289804" y="804672"/>
+            <a:ext cx="3250692" cy="274320"/>
           </a:xfrm>
           <a:prstGeom prst="rect">
             <a:avLst/>
@@ -5880,8 +5880,8 @@
         </p:nvSpPr>
         <p:spPr>
           <a:xfrm>
-            <a:off x="4480560" y="1188720"/>
-            <a:ext cx="3703320" cy="2622185"/>
+            <a:off x="4686300" y="1097280"/>
+            <a:ext cx="3909060" cy="2766846"/>
           </a:xfrm>
           <a:prstGeom prst="rect">
             <a:avLst/>
@@ -5913,8 +5913,8 @@
         </p:blipFill>
         <p:spPr>
           <a:xfrm>
-            <a:off x="4480560" y="1188720"/>
-            <a:ext cx="3703320" cy="2603897"/>
+            <a:off x="4686300" y="1097280"/>
+            <a:ext cx="3909060" cy="2748558"/>
           </a:xfrm>
           <a:prstGeom prst="rect">
             <a:avLst/>
@@ -5929,8 +5929,8 @@
         </p:nvSpPr>
         <p:spPr>
           <a:xfrm>
-            <a:off x="4480560" y="3829193"/>
-            <a:ext cx="3703320" cy="310896"/>
+            <a:off x="4686300" y="3882414"/>
+            <a:ext cx="3909060" cy="310896"/>
           </a:xfrm>
           <a:prstGeom prst="rect">
             <a:avLst/>
@@ -5968,8 +5968,8 @@
         </p:nvSpPr>
         <p:spPr>
           <a:xfrm>
-            <a:off x="548640" y="4206240"/>
-            <a:ext cx="1819656" cy="384048"/>
+            <a:off x="548640" y="4224528"/>
+            <a:ext cx="3909060" cy="384048"/>
           </a:xfrm>
           <a:prstGeom prst="roundRect">
             <a:avLst>
@@ -5995,7 +5995,7 @@
         </p:nvSpPr>
         <p:spPr>
           <a:xfrm>
-            <a:off x="612648" y="4261104"/>
+            <a:off x="612648" y="4279392"/>
             <a:ext cx="384048" cy="274320"/>
           </a:xfrm>
           <a:prstGeom prst="roundRect">
@@ -6017,7 +6017,7 @@
         </p:nvSpPr>
         <p:spPr>
           <a:xfrm>
-            <a:off x="612648" y="4261104"/>
+            <a:off x="612648" y="4279392"/>
             <a:ext cx="384048" cy="274320"/>
           </a:xfrm>
           <a:prstGeom prst="rect">
@@ -6056,8 +6056,8 @@
         </p:nvSpPr>
         <p:spPr>
           <a:xfrm>
-            <a:off x="1060704" y="4206240"/>
-            <a:ext cx="1252728" cy="384048"/>
+            <a:off x="1060704" y="4224528"/>
+            <a:ext cx="3342132" cy="384048"/>
           </a:xfrm>
           <a:prstGeom prst="rect">
             <a:avLst/>
@@ -6095,8 +6095,8 @@
         </p:nvSpPr>
         <p:spPr>
           <a:xfrm>
-            <a:off x="2514600" y="4206240"/>
-            <a:ext cx="1819656" cy="384048"/>
+            <a:off x="4686300" y="4224528"/>
+            <a:ext cx="3909060" cy="384048"/>
           </a:xfrm>
           <a:prstGeom prst="roundRect">
             <a:avLst>
@@ -6122,7 +6122,7 @@
         </p:nvSpPr>
         <p:spPr>
           <a:xfrm>
-            <a:off x="2578608" y="4261104"/>
+            <a:off x="4750308" y="4279392"/>
             <a:ext cx="384048" cy="274320"/>
           </a:xfrm>
           <a:prstGeom prst="roundRect">
@@ -6144,7 +6144,7 @@
         </p:nvSpPr>
         <p:spPr>
           <a:xfrm>
-            <a:off x="2578608" y="4261104"/>
+            <a:off x="4750308" y="4279392"/>
             <a:ext cx="384048" cy="274320"/>
           </a:xfrm>
           <a:prstGeom prst="rect">
@@ -6183,8 +6183,8 @@
         </p:nvSpPr>
         <p:spPr>
           <a:xfrm>
-            <a:off x="3026664" y="4206240"/>
-            <a:ext cx="1252728" cy="384048"/>
+            <a:off x="5198364" y="4224528"/>
+            <a:ext cx="3342132" cy="384048"/>
           </a:xfrm>
           <a:prstGeom prst="rect">
             <a:avLst/>
@@ -6222,7 +6222,7 @@
         </p:nvSpPr>
         <p:spPr>
           <a:xfrm>
-            <a:off x="548640" y="4645152"/>
+            <a:off x="548640" y="4663440"/>
             <a:ext cx="7315200" cy="219456"/>
           </a:xfrm>
           <a:prstGeom prst="rect">
